--- a/2025/LEC/04-1 ARIMA new.pptx
+++ b/2025/LEC/04-1 ARIMA new.pptx
@@ -6,12 +6,25 @@
   </p:sldMasterIdLst>
   <p:sldIdLst>
     <p:sldId id="256" r:id="rId2"/>
-    <p:sldId id="257" r:id="rId3"/>
-    <p:sldId id="259" r:id="rId4"/>
-    <p:sldId id="258" r:id="rId5"/>
-    <p:sldId id="260" r:id="rId6"/>
-    <p:sldId id="261" r:id="rId7"/>
-    <p:sldId id="262" r:id="rId8"/>
+    <p:sldId id="275" r:id="rId3"/>
+    <p:sldId id="257" r:id="rId4"/>
+    <p:sldId id="259" r:id="rId5"/>
+    <p:sldId id="258" r:id="rId6"/>
+    <p:sldId id="260" r:id="rId7"/>
+    <p:sldId id="261" r:id="rId8"/>
+    <p:sldId id="262" r:id="rId9"/>
+    <p:sldId id="264" r:id="rId10"/>
+    <p:sldId id="263" r:id="rId11"/>
+    <p:sldId id="265" r:id="rId12"/>
+    <p:sldId id="266" r:id="rId13"/>
+    <p:sldId id="267" r:id="rId14"/>
+    <p:sldId id="268" r:id="rId15"/>
+    <p:sldId id="269" r:id="rId16"/>
+    <p:sldId id="270" r:id="rId17"/>
+    <p:sldId id="271" r:id="rId18"/>
+    <p:sldId id="272" r:id="rId19"/>
+    <p:sldId id="273" r:id="rId20"/>
+    <p:sldId id="274" r:id="rId21"/>
   </p:sldIdLst>
   <p:sldSz cx="12192000" cy="6858000"/>
   <p:notesSz cx="6858000" cy="9144000"/>
@@ -3080,7 +3093,6203 @@
 </p:sld>
 </file>
 
+<file path=ppt/slides/slide10.xml><?xml version="1.0" encoding="utf-8"?>
+<p:sld xmlns:a="http://schemas.openxmlformats.org/drawingml/2006/main" xmlns:r="http://schemas.openxmlformats.org/officeDocument/2006/relationships" xmlns:p="http://schemas.openxmlformats.org/presentationml/2006/main">
+  <p:cSld>
+    <p:spTree>
+      <p:nvGrpSpPr>
+        <p:cNvPr id="1" name=""/>
+        <p:cNvGrpSpPr/>
+        <p:nvPr/>
+      </p:nvGrpSpPr>
+      <p:grpSpPr>
+        <a:xfrm>
+          <a:off x="0" y="0"/>
+          <a:ext cx="0" cy="0"/>
+          <a:chOff x="0" y="0"/>
+          <a:chExt cx="0" cy="0"/>
+        </a:xfrm>
+      </p:grpSpPr>
+      <p:sp>
+        <p:nvSpPr>
+          <p:cNvPr id="2" name="Заголовок 1">
+            <a:extLst>
+              <a:ext uri="{FF2B5EF4-FFF2-40B4-BE49-F238E27FC236}">
+                <a16:creationId xmlns:a16="http://schemas.microsoft.com/office/drawing/2014/main" id="{7CB29E92-B795-4F44-A577-A4EBC753A5A5}"/>
+              </a:ext>
+            </a:extLst>
+          </p:cNvPr>
+          <p:cNvSpPr>
+            <a:spLocks noGrp="1"/>
+          </p:cNvSpPr>
+          <p:nvPr>
+            <p:ph type="title"/>
+          </p:nvPr>
+        </p:nvSpPr>
+        <p:spPr>
+          <a:xfrm>
+            <a:off x="294341" y="147911"/>
+            <a:ext cx="10515600" cy="612028"/>
+          </a:xfrm>
+        </p:spPr>
+        <p:txBody>
+          <a:bodyPr>
+            <a:normAutofit fontScale="90000"/>
+          </a:bodyPr>
+          <a:lstStyle/>
+          <a:p>
+            <a:pPr algn="ctr" rtl="0"/>
+            <a:r>
+              <a:rPr lang="en-US" b="1" dirty="0" err="1" smtClean="0"/>
+              <a:t>Выбор</a:t>
+            </a:r>
+            <a:r>
+              <a:rPr lang="en-US" b="1" dirty="0" smtClean="0"/>
+              <a:t> </a:t>
+            </a:r>
+            <a:r>
+              <a:rPr lang="ru-RU" b="1" dirty="0" smtClean="0"/>
+              <a:t>начальных значений</a:t>
+            </a:r>
+            <a:r>
+              <a:rPr lang="en-US" b="1" dirty="0" smtClean="0"/>
+              <a:t> </a:t>
+            </a:r>
+            <a:r>
+              <a:rPr lang="ru-RU" b="1" dirty="0"/>
+              <a:t>порядка</a:t>
+            </a:r>
+            <a:r>
+              <a:rPr lang="en-US" b="1" dirty="0"/>
+              <a:t> ARMA</a:t>
+            </a:r>
+            <a:endParaRPr lang="en-US" dirty="0"/>
+          </a:p>
+        </p:txBody>
+      </p:sp>
+      <p:sp>
+        <p:nvSpPr>
+          <p:cNvPr id="3" name="Объект 2">
+            <a:extLst>
+              <a:ext uri="{FF2B5EF4-FFF2-40B4-BE49-F238E27FC236}">
+                <a16:creationId xmlns:a16="http://schemas.microsoft.com/office/drawing/2014/main" id="{40ACB7F2-07F5-4100-AF8D-CFA14F65E0BA}"/>
+              </a:ext>
+            </a:extLst>
+          </p:cNvPr>
+          <p:cNvSpPr>
+            <a:spLocks noGrp="1"/>
+          </p:cNvSpPr>
+          <p:nvPr>
+            <p:ph idx="1"/>
+          </p:nvPr>
+        </p:nvSpPr>
+        <p:spPr>
+          <a:xfrm>
+            <a:off x="168428" y="678330"/>
+            <a:ext cx="11932241" cy="687001"/>
+          </a:xfrm>
+        </p:spPr>
+        <p:txBody>
+          <a:bodyPr>
+            <a:normAutofit lnSpcReduction="10000"/>
+          </a:bodyPr>
+          <a:lstStyle/>
+          <a:p>
+            <a:pPr marL="0" indent="0" algn="l" rtl="0">
+              <a:buNone/>
+            </a:pPr>
+            <a:r>
+              <a:rPr lang="ru-RU" sz="2200" dirty="0" smtClean="0"/>
+              <a:t>Эмпирические правила </a:t>
+            </a:r>
+            <a:r>
+              <a:rPr lang="ru-RU" sz="2200" dirty="0"/>
+              <a:t>для выбора порядка </a:t>
+            </a:r>
+            <a:r>
+              <a:rPr lang="en-US" sz="2200" dirty="0"/>
+              <a:t>ARMA </a:t>
+            </a:r>
+            <a:r>
+              <a:rPr lang="ru-RU" sz="2200" dirty="0" smtClean="0"/>
+              <a:t>моделей </a:t>
+            </a:r>
+            <a:r>
+              <a:rPr lang="ru-RU" sz="2200" dirty="0"/>
+              <a:t>на основе вида графиков автокорреляции и частичной автокорреляции. </a:t>
+            </a:r>
+            <a:endParaRPr lang="en-US" sz="2200" dirty="0"/>
+          </a:p>
+          <a:p>
+            <a:pPr algn="l" rtl="0"/>
+            <a:endParaRPr lang="en-US" sz="2400" b="1" dirty="0"/>
+          </a:p>
+        </p:txBody>
+      </p:sp>
+      <p:graphicFrame>
+        <p:nvGraphicFramePr>
+          <p:cNvPr id="4" name="Таблица 3">
+            <a:extLst>
+              <a:ext uri="{FF2B5EF4-FFF2-40B4-BE49-F238E27FC236}">
+                <a16:creationId xmlns:a16="http://schemas.microsoft.com/office/drawing/2014/main" id="{88679285-94BC-45E3-AB5C-3D14E13D5EEA}"/>
+              </a:ext>
+            </a:extLst>
+          </p:cNvPr>
+          <p:cNvGraphicFramePr>
+            <a:graphicFrameLocks noGrp="1"/>
+          </p:cNvGraphicFramePr>
+          <p:nvPr>
+            <p:extLst>
+              <p:ext uri="{D42A27DB-BD31-4B8C-83A1-F6EECF244321}">
+                <p14:modId xmlns:p14="http://schemas.microsoft.com/office/powerpoint/2010/main" val="1142289971"/>
+              </p:ext>
+            </p:extLst>
+          </p:nvPr>
+        </p:nvGraphicFramePr>
+        <p:xfrm>
+          <a:off x="168428" y="1290358"/>
+          <a:ext cx="11854143" cy="4505325"/>
+        </p:xfrm>
+        <a:graphic>
+          <a:graphicData uri="http://schemas.openxmlformats.org/drawingml/2006/table">
+            <a:tbl>
+              <a:tblPr>
+                <a:tableStyleId>{5C22544A-7EE6-4342-B048-85BDC9FD1C3A}</a:tableStyleId>
+              </a:tblPr>
+              <a:tblGrid>
+                <a:gridCol w="4496922">
+                  <a:extLst>
+                    <a:ext uri="{9D8B030D-6E8A-4147-A177-3AD203B41FA5}">
+                      <a16:colId xmlns:a16="http://schemas.microsoft.com/office/drawing/2014/main" val="3810330014"/>
+                    </a:ext>
+                  </a:extLst>
+                </a:gridCol>
+                <a:gridCol w="2411725">
+                  <a:extLst>
+                    <a:ext uri="{9D8B030D-6E8A-4147-A177-3AD203B41FA5}">
+                      <a16:colId xmlns:a16="http://schemas.microsoft.com/office/drawing/2014/main" val="928333261"/>
+                    </a:ext>
+                  </a:extLst>
+                </a:gridCol>
+                <a:gridCol w="4945496">
+                  <a:extLst>
+                    <a:ext uri="{9D8B030D-6E8A-4147-A177-3AD203B41FA5}">
+                      <a16:colId xmlns:a16="http://schemas.microsoft.com/office/drawing/2014/main" val="2644834403"/>
+                    </a:ext>
+                  </a:extLst>
+                </a:gridCol>
+              </a:tblGrid>
+              <a:tr h="329404">
+                <a:tc>
+                  <a:txBody>
+                    <a:bodyPr/>
+                    <a:lstStyle/>
+                    <a:p>
+                      <a:pPr algn="l" rtl="0" fontAlgn="ctr"/>
+                      <a:r>
+                        <a:rPr lang="ru-RU" sz="2000" b="1" u="none" strike="noStrike" kern="1200" dirty="0" smtClean="0">
+                          <a:solidFill>
+                            <a:schemeClr val="dk1"/>
+                          </a:solidFill>
+                          <a:effectLst/>
+                          <a:latin typeface="+mn-lt"/>
+                          <a:ea typeface="+mn-ea"/>
+                          <a:cs typeface="+mn-cs"/>
+                        </a:rPr>
+                        <a:t>PACF обрывается после лага  p</a:t>
+                      </a:r>
+                      <a:endParaRPr lang="en-US" sz="2000" b="1" u="none" strike="noStrike" kern="1200" dirty="0">
+                        <a:solidFill>
+                          <a:schemeClr val="dk1"/>
+                        </a:solidFill>
+                        <a:effectLst/>
+                        <a:latin typeface="+mn-lt"/>
+                        <a:ea typeface="+mn-ea"/>
+                        <a:cs typeface="+mn-cs"/>
+                      </a:endParaRPr>
+                    </a:p>
+                  </a:txBody>
+                  <a:tcPr marL="9525" marR="9525" marT="9525" marB="0" anchor="ctr"/>
+                </a:tc>
+                <a:tc>
+                  <a:txBody>
+                    <a:bodyPr/>
+                    <a:lstStyle/>
+                    <a:p>
+                      <a:pPr algn="l" rtl="0" fontAlgn="ctr"/>
+                      <a:r>
+                        <a:rPr lang="ru-RU" sz="2000" u="none" strike="noStrike" kern="1200" dirty="0" smtClean="0">
+                          <a:solidFill>
+                            <a:schemeClr val="dk1"/>
+                          </a:solidFill>
+                          <a:effectLst/>
+                          <a:latin typeface="+mn-lt"/>
+                          <a:ea typeface="+mn-ea"/>
+                          <a:cs typeface="+mn-cs"/>
+                        </a:rPr>
+                        <a:t> </a:t>
+                      </a:r>
+                      <a:r>
+                        <a:rPr lang="ru-RU" sz="1800" b="1" u="none" strike="noStrike" kern="1200" dirty="0" smtClean="0">
+                          <a:solidFill>
+                            <a:schemeClr val="dk1"/>
+                          </a:solidFill>
+                          <a:effectLst/>
+                          <a:latin typeface="+mn-lt"/>
+                          <a:ea typeface="+mn-ea"/>
+                          <a:cs typeface="+mn-cs"/>
+                        </a:rPr>
+                        <a:t>p =  номер последнего значимого лага</a:t>
+                      </a:r>
+                      <a:endParaRPr lang="en-US" sz="2000" b="1" u="none" strike="noStrike" kern="1200" dirty="0">
+                        <a:solidFill>
+                          <a:schemeClr val="dk1"/>
+                        </a:solidFill>
+                        <a:effectLst/>
+                        <a:latin typeface="+mn-lt"/>
+                        <a:ea typeface="+mn-ea"/>
+                        <a:cs typeface="+mn-cs"/>
+                      </a:endParaRPr>
+                    </a:p>
+                  </a:txBody>
+                  <a:tcPr marL="9525" marR="9525" marT="9525" marB="0" anchor="ctr"/>
+                </a:tc>
+                <a:tc>
+                  <a:txBody>
+                    <a:bodyPr/>
+                    <a:lstStyle/>
+                    <a:p>
+                      <a:pPr algn="l" rtl="0" fontAlgn="ctr"/>
+                      <a:r>
+                        <a:rPr lang="ru-RU" sz="2000" u="none" strike="noStrike" kern="1200" dirty="0" smtClean="0">
+                          <a:solidFill>
+                            <a:schemeClr val="dk1"/>
+                          </a:solidFill>
+                          <a:effectLst/>
+                          <a:latin typeface="+mn-lt"/>
+                          <a:ea typeface="+mn-ea"/>
+                          <a:cs typeface="+mn-cs"/>
+                        </a:rPr>
+                        <a:t>признак AR(p) — прямая зависимость от  p  прошлых значений</a:t>
+                      </a:r>
+                      <a:endParaRPr lang="en-US" sz="2000" u="none" strike="noStrike" kern="1200" dirty="0">
+                        <a:solidFill>
+                          <a:schemeClr val="dk1"/>
+                        </a:solidFill>
+                        <a:effectLst/>
+                        <a:latin typeface="+mn-lt"/>
+                        <a:ea typeface="+mn-ea"/>
+                        <a:cs typeface="+mn-cs"/>
+                      </a:endParaRPr>
+                    </a:p>
+                  </a:txBody>
+                  <a:tcPr marL="9525" marR="9525" marT="9525" marB="0" anchor="ctr"/>
+                </a:tc>
+                <a:extLst>
+                  <a:ext uri="{0D108BD9-81ED-4DB2-BD59-A6C34878D82A}">
+                    <a16:rowId xmlns:a16="http://schemas.microsoft.com/office/drawing/2014/main" val="460986974"/>
+                  </a:ext>
+                </a:extLst>
+              </a:tr>
+              <a:tr h="329404">
+                <a:tc>
+                  <a:txBody>
+                    <a:bodyPr/>
+                    <a:lstStyle/>
+                    <a:p>
+                      <a:pPr algn="l" rtl="0" fontAlgn="ctr"/>
+                      <a:r>
+                        <a:rPr lang="ru-RU" sz="2000" b="1" u="none" strike="noStrike" kern="1200" dirty="0" smtClean="0">
+                          <a:solidFill>
+                            <a:schemeClr val="dk1"/>
+                          </a:solidFill>
+                          <a:effectLst/>
+                          <a:latin typeface="+mn-lt"/>
+                          <a:ea typeface="+mn-ea"/>
+                          <a:cs typeface="+mn-cs"/>
+                        </a:rPr>
+                        <a:t>ACF обрывается после лага  q </a:t>
+                      </a:r>
+                      <a:endParaRPr lang="en-US" sz="2000" b="1" u="none" strike="noStrike" kern="1200" dirty="0">
+                        <a:solidFill>
+                          <a:schemeClr val="dk1"/>
+                        </a:solidFill>
+                        <a:effectLst/>
+                        <a:latin typeface="+mn-lt"/>
+                        <a:ea typeface="+mn-ea"/>
+                        <a:cs typeface="+mn-cs"/>
+                      </a:endParaRPr>
+                    </a:p>
+                  </a:txBody>
+                  <a:tcPr marL="9525" marR="9525" marT="9525" marB="0" anchor="ctr"/>
+                </a:tc>
+                <a:tc>
+                  <a:txBody>
+                    <a:bodyPr/>
+                    <a:lstStyle/>
+                    <a:p>
+                      <a:pPr marL="0" marR="0" indent="0" algn="l" defTabSz="914400" rtl="0" eaLnBrk="1" fontAlgn="ctr" latinLnBrk="0" hangingPunct="1">
+                        <a:lnSpc>
+                          <a:spcPct val="100000"/>
+                        </a:lnSpc>
+                        <a:spcBef>
+                          <a:spcPts val="0"/>
+                        </a:spcBef>
+                        <a:spcAft>
+                          <a:spcPts val="0"/>
+                        </a:spcAft>
+                        <a:buClrTx/>
+                        <a:buSzTx/>
+                        <a:buFontTx/>
+                        <a:buNone/>
+                        <a:tabLst/>
+                        <a:defRPr/>
+                      </a:pPr>
+                      <a:r>
+                        <a:rPr lang="ru-RU" sz="2000" u="none" strike="noStrike" kern="1200" dirty="0" smtClean="0">
+                          <a:solidFill>
+                            <a:schemeClr val="dk1"/>
+                          </a:solidFill>
+                          <a:effectLst/>
+                          <a:latin typeface="+mn-lt"/>
+                          <a:ea typeface="+mn-ea"/>
+                          <a:cs typeface="+mn-cs"/>
+                        </a:rPr>
+                        <a:t> </a:t>
+                      </a:r>
+                      <a:r>
+                        <a:rPr lang="ru-RU" sz="1800" b="1" u="none" strike="noStrike" kern="1200" dirty="0" smtClean="0">
+                          <a:solidFill>
+                            <a:schemeClr val="dk1"/>
+                          </a:solidFill>
+                          <a:effectLst/>
+                          <a:latin typeface="+mn-lt"/>
+                          <a:ea typeface="+mn-ea"/>
+                          <a:cs typeface="+mn-cs"/>
+                        </a:rPr>
+                        <a:t>q =  номер последнего значимого лага</a:t>
+                      </a:r>
+                      <a:endParaRPr lang="en-US" sz="2000" b="1" u="none" strike="noStrike" kern="1200" dirty="0">
+                        <a:solidFill>
+                          <a:schemeClr val="dk1"/>
+                        </a:solidFill>
+                        <a:effectLst/>
+                        <a:latin typeface="+mn-lt"/>
+                        <a:ea typeface="+mn-ea"/>
+                        <a:cs typeface="+mn-cs"/>
+                      </a:endParaRPr>
+                    </a:p>
+                  </a:txBody>
+                  <a:tcPr marL="9525" marR="9525" marT="9525" marB="0" anchor="ctr"/>
+                </a:tc>
+                <a:tc>
+                  <a:txBody>
+                    <a:bodyPr/>
+                    <a:lstStyle/>
+                    <a:p>
+                      <a:pPr algn="l" rtl="0" fontAlgn="ctr"/>
+                      <a:r>
+                        <a:rPr lang="ru-RU" sz="2000" u="none" strike="noStrike" kern="1200" dirty="0" smtClean="0">
+                          <a:solidFill>
+                            <a:schemeClr val="dk1"/>
+                          </a:solidFill>
+                          <a:effectLst/>
+                          <a:latin typeface="+mn-lt"/>
+                          <a:ea typeface="+mn-ea"/>
+                          <a:cs typeface="+mn-cs"/>
+                        </a:rPr>
+                        <a:t>признак MA(q) — влияние ошибок исчезает после  q  шагов</a:t>
+                      </a:r>
+                      <a:endParaRPr lang="en-US" sz="2000" u="none" strike="noStrike" kern="1200" dirty="0">
+                        <a:solidFill>
+                          <a:schemeClr val="dk1"/>
+                        </a:solidFill>
+                        <a:effectLst/>
+                        <a:latin typeface="+mn-lt"/>
+                        <a:ea typeface="+mn-ea"/>
+                        <a:cs typeface="+mn-cs"/>
+                      </a:endParaRPr>
+                    </a:p>
+                  </a:txBody>
+                  <a:tcPr marL="9525" marR="9525" marT="9525" marB="0" anchor="ctr"/>
+                </a:tc>
+                <a:extLst>
+                  <a:ext uri="{0D108BD9-81ED-4DB2-BD59-A6C34878D82A}">
+                    <a16:rowId xmlns:a16="http://schemas.microsoft.com/office/drawing/2014/main" val="4099842672"/>
+                  </a:ext>
+                </a:extLst>
+              </a:tr>
+              <a:tr h="313187">
+                <a:tc>
+                  <a:txBody>
+                    <a:bodyPr/>
+                    <a:lstStyle/>
+                    <a:p>
+                      <a:pPr algn="l" rtl="0" fontAlgn="ctr"/>
+                      <a:r>
+                        <a:rPr lang="en-US" sz="2000" b="0" u="none" strike="noStrike" dirty="0" smtClean="0">
+                          <a:effectLst/>
+                        </a:rPr>
+                        <a:t>P</a:t>
+                      </a:r>
+                      <a:r>
+                        <a:rPr lang="ru-RU" sz="2000" b="0" u="none" strike="noStrike" dirty="0" smtClean="0">
+                          <a:effectLst/>
+                        </a:rPr>
+                        <a:t>ACF затухает</a:t>
+                      </a:r>
+                      <a:r>
+                        <a:rPr lang="en-US" sz="2000" b="0" u="none" strike="noStrike" dirty="0" smtClean="0">
+                          <a:effectLst/>
+                        </a:rPr>
+                        <a:t> </a:t>
+                      </a:r>
+                      <a:r>
+                        <a:rPr lang="ru-RU" sz="2000" b="0" u="none" strike="noStrike" dirty="0" smtClean="0">
+                          <a:effectLst/>
+                        </a:rPr>
+                        <a:t>медленно</a:t>
+                      </a:r>
+                      <a:endParaRPr lang="en-US" sz="2000" b="0" i="0" u="none" strike="noStrike" dirty="0">
+                        <a:solidFill>
+                          <a:srgbClr val="000000"/>
+                        </a:solidFill>
+                        <a:effectLst/>
+                        <a:latin typeface="Georgia" panose="02040502050405020303" pitchFamily="18" charset="0"/>
+                      </a:endParaRPr>
+                    </a:p>
+                  </a:txBody>
+                  <a:tcPr marL="9525" marR="9525" marT="9525" marB="0" anchor="ctr"/>
+                </a:tc>
+                <a:tc>
+                  <a:txBody>
+                    <a:bodyPr/>
+                    <a:lstStyle/>
+                    <a:p>
+                      <a:pPr algn="l" rtl="0" fontAlgn="ctr"/>
+                      <a:r>
+                        <a:rPr lang="en-US" sz="2000" u="none" strike="noStrike" dirty="0" smtClean="0">
+                          <a:effectLst/>
+                        </a:rPr>
+                        <a:t>P =1 </a:t>
+                      </a:r>
+                      <a:r>
+                        <a:rPr lang="ru-RU" sz="2000" u="none" strike="noStrike" dirty="0" smtClean="0">
+                          <a:effectLst/>
+                        </a:rPr>
+                        <a:t>или</a:t>
+                      </a:r>
+                      <a:r>
+                        <a:rPr lang="ru-RU" sz="2000" u="none" strike="noStrike" baseline="0" dirty="0" smtClean="0">
+                          <a:effectLst/>
+                        </a:rPr>
+                        <a:t> </a:t>
+                      </a:r>
+                      <a:r>
+                        <a:rPr lang="ru-RU" sz="2000" u="none" strike="noStrike" baseline="0" dirty="0" smtClean="0">
+                          <a:effectLst/>
+                        </a:rPr>
+                        <a:t>2</a:t>
+                      </a:r>
+                      <a:r>
+                        <a:rPr lang="en-US" sz="2000" u="none" strike="noStrike" baseline="0" dirty="0" smtClean="0">
+                          <a:effectLst/>
+                        </a:rPr>
+                        <a:t> ++</a:t>
+                      </a:r>
+                      <a:endParaRPr lang="en-US" sz="2000" b="0" i="0" u="none" strike="noStrike" dirty="0">
+                        <a:solidFill>
+                          <a:srgbClr val="000000"/>
+                        </a:solidFill>
+                        <a:effectLst/>
+                        <a:latin typeface="Georgia" panose="02040502050405020303" pitchFamily="18" charset="0"/>
+                      </a:endParaRPr>
+                    </a:p>
+                  </a:txBody>
+                  <a:tcPr marL="9525" marR="9525" marT="9525" marB="0" anchor="ctr"/>
+                </a:tc>
+                <a:tc>
+                  <a:txBody>
+                    <a:bodyPr/>
+                    <a:lstStyle/>
+                    <a:p>
+                      <a:pPr algn="l" rtl="0" fontAlgn="ctr"/>
+                      <a:r>
+                        <a:rPr lang="en-US" sz="2000" b="0" u="none" strike="noStrike" dirty="0" smtClean="0">
+                          <a:effectLst/>
+                        </a:rPr>
+                        <a:t>AR</a:t>
+                      </a:r>
+                      <a:r>
+                        <a:rPr lang="en-US" sz="2000" b="1" u="none" strike="noStrike" dirty="0" smtClean="0">
+                          <a:effectLst/>
+                        </a:rPr>
+                        <a:t>-</a:t>
+                      </a:r>
+                      <a:r>
+                        <a:rPr lang="ru-RU" sz="2000" b="0" u="none" strike="noStrike" dirty="0" smtClean="0">
+                          <a:effectLst/>
+                        </a:rPr>
+                        <a:t>эффект </a:t>
+                      </a:r>
+                      <a:r>
+                        <a:rPr lang="ru-RU" sz="2000" b="0" u="none" strike="noStrike" dirty="0" smtClean="0">
+                          <a:effectLst/>
+                        </a:rPr>
+                        <a:t>слабый </a:t>
+                      </a:r>
+                      <a:r>
+                        <a:rPr lang="ru-RU" sz="2000" b="1" u="none" strike="noStrike" dirty="0" smtClean="0">
+                          <a:effectLst/>
+                        </a:rPr>
+                        <a:t/>
+                      </a:r>
+                      <a:br>
+                        <a:rPr lang="ru-RU" sz="2000" b="1" u="none" strike="noStrike" dirty="0" smtClean="0">
+                          <a:effectLst/>
+                        </a:rPr>
+                      </a:br>
+                      <a:r>
+                        <a:rPr lang="ru-RU" sz="1800" b="0" i="0" kern="1200" dirty="0" smtClean="0">
+                          <a:solidFill>
+                            <a:schemeClr val="dk1"/>
+                          </a:solidFill>
+                          <a:effectLst/>
+                          <a:latin typeface="+mn-lt"/>
+                          <a:ea typeface="+mn-ea"/>
+                          <a:cs typeface="+mn-cs"/>
+                        </a:rPr>
+                        <a:t>Долгая "память", но без чёткой структуры</a:t>
+                      </a:r>
+                      <a:endParaRPr lang="en-US" sz="2000" b="1" i="0" u="none" strike="noStrike" dirty="0">
+                        <a:solidFill>
+                          <a:srgbClr val="000000"/>
+                        </a:solidFill>
+                        <a:effectLst/>
+                        <a:latin typeface="Georgia" panose="02040502050405020303" pitchFamily="18" charset="0"/>
+                      </a:endParaRPr>
+                    </a:p>
+                  </a:txBody>
+                  <a:tcPr marL="9525" marR="9525" marT="9525" marB="0" anchor="ctr"/>
+                </a:tc>
+                <a:extLst>
+                  <a:ext uri="{0D108BD9-81ED-4DB2-BD59-A6C34878D82A}">
+                    <a16:rowId xmlns:a16="http://schemas.microsoft.com/office/drawing/2014/main" val="3740229302"/>
+                  </a:ext>
+                </a:extLst>
+              </a:tr>
+              <a:tr h="329404">
+                <a:tc>
+                  <a:txBody>
+                    <a:bodyPr/>
+                    <a:lstStyle/>
+                    <a:p>
+                      <a:pPr algn="l" rtl="0" fontAlgn="ctr"/>
+                      <a:r>
+                        <a:rPr lang="ru-RU" sz="2000" b="0" u="none" strike="noStrike" dirty="0" smtClean="0">
+                          <a:effectLst/>
+                        </a:rPr>
+                        <a:t>ACF затухает плавно</a:t>
+                      </a:r>
+                      <a:r>
+                        <a:rPr lang="en-US" sz="2000" b="0" u="none" strike="noStrike" dirty="0" smtClean="0">
+                          <a:effectLst/>
+                        </a:rPr>
+                        <a:t> </a:t>
+                      </a:r>
+                      <a:r>
+                        <a:rPr lang="ru-RU" sz="2000" b="0" u="none" strike="noStrike" dirty="0" smtClean="0">
+                          <a:effectLst/>
+                        </a:rPr>
+                        <a:t>(экспоненциально или волнообразно)</a:t>
+                      </a:r>
+                      <a:endParaRPr lang="en-US" sz="2000" b="0" i="0" u="none" strike="noStrike" dirty="0">
+                        <a:solidFill>
+                          <a:srgbClr val="000000"/>
+                        </a:solidFill>
+                        <a:effectLst/>
+                        <a:latin typeface="Georgia" panose="02040502050405020303" pitchFamily="18" charset="0"/>
+                      </a:endParaRPr>
+                    </a:p>
+                  </a:txBody>
+                  <a:tcPr marL="9525" marR="9525" marT="9525" marB="0" anchor="ctr"/>
+                </a:tc>
+                <a:tc>
+                  <a:txBody>
+                    <a:bodyPr/>
+                    <a:lstStyle/>
+                    <a:p>
+                      <a:pPr algn="l" rtl="0" fontAlgn="ctr"/>
+                      <a:r>
+                        <a:rPr lang="en-US" sz="2000" u="none" strike="noStrike" dirty="0" smtClean="0">
+                          <a:effectLst/>
+                        </a:rPr>
+                        <a:t>q  = 1 </a:t>
+                      </a:r>
+                      <a:r>
+                        <a:rPr lang="ru-RU" sz="2000" u="none" strike="noStrike" dirty="0" smtClean="0">
+                          <a:effectLst/>
+                        </a:rPr>
+                        <a:t>или</a:t>
+                      </a:r>
+                      <a:r>
+                        <a:rPr lang="ru-RU" sz="2000" u="none" strike="noStrike" baseline="0" dirty="0" smtClean="0">
+                          <a:effectLst/>
+                        </a:rPr>
+                        <a:t> 2</a:t>
+                      </a:r>
+                      <a:r>
+                        <a:rPr lang="en-US" sz="2000" u="none" strike="noStrike" baseline="0" dirty="0" smtClean="0">
+                          <a:effectLst/>
+                        </a:rPr>
+                        <a:t> ++</a:t>
+                      </a:r>
+                      <a:endParaRPr lang="en-US" sz="2000" b="0" i="0" u="none" strike="noStrike" dirty="0">
+                        <a:solidFill>
+                          <a:srgbClr val="000000"/>
+                        </a:solidFill>
+                        <a:effectLst/>
+                        <a:latin typeface="Georgia" panose="02040502050405020303" pitchFamily="18" charset="0"/>
+                      </a:endParaRPr>
+                    </a:p>
+                  </a:txBody>
+                  <a:tcPr marL="9525" marR="9525" marT="9525" marB="0" anchor="ctr"/>
+                </a:tc>
+                <a:tc>
+                  <a:txBody>
+                    <a:bodyPr/>
+                    <a:lstStyle/>
+                    <a:p>
+                      <a:pPr algn="l" rtl="0" fontAlgn="ctr"/>
+                      <a:r>
+                        <a:rPr lang="en-US" sz="2000" b="0" u="none" strike="noStrike" dirty="0" smtClean="0">
+                          <a:effectLst/>
+                        </a:rPr>
+                        <a:t>MA-</a:t>
+                      </a:r>
+                      <a:r>
+                        <a:rPr lang="ru-RU" sz="2000" b="0" u="none" strike="noStrike" dirty="0" smtClean="0">
+                          <a:effectLst/>
+                        </a:rPr>
+                        <a:t>эффект слабый</a:t>
+                      </a:r>
+                      <a:endParaRPr lang="en-US" sz="2000" b="0" i="0" u="none" strike="noStrike" dirty="0">
+                        <a:solidFill>
+                          <a:srgbClr val="000000"/>
+                        </a:solidFill>
+                        <a:effectLst/>
+                        <a:latin typeface="Georgia" panose="02040502050405020303" pitchFamily="18" charset="0"/>
+                      </a:endParaRPr>
+                    </a:p>
+                  </a:txBody>
+                  <a:tcPr marL="9525" marR="9525" marT="9525" marB="0" anchor="ctr"/>
+                </a:tc>
+                <a:extLst>
+                  <a:ext uri="{0D108BD9-81ED-4DB2-BD59-A6C34878D82A}">
+                    <a16:rowId xmlns:a16="http://schemas.microsoft.com/office/drawing/2014/main" val="1167765168"/>
+                  </a:ext>
+                </a:extLst>
+              </a:tr>
+              <a:tr h="296970">
+                <a:tc>
+                  <a:txBody>
+                    <a:bodyPr/>
+                    <a:lstStyle/>
+                    <a:p>
+                      <a:pPr algn="l" rtl="0" fontAlgn="ctr"/>
+                      <a:r>
+                        <a:rPr lang="ru-RU" sz="1800" b="0" i="0" kern="1200" dirty="0" smtClean="0">
+                          <a:solidFill>
+                            <a:schemeClr val="dk1"/>
+                          </a:solidFill>
+                          <a:effectLst/>
+                          <a:latin typeface="+mn-lt"/>
+                          <a:ea typeface="+mn-ea"/>
+                          <a:cs typeface="+mn-cs"/>
+                        </a:rPr>
+                        <a:t>ACF и PACF затухают медленно, есть сильная сезонность или нет явного паттерна</a:t>
+                      </a:r>
+                      <a:endParaRPr lang="en-US" sz="2000" b="0" i="1" u="none" strike="noStrike" dirty="0">
+                        <a:solidFill>
+                          <a:srgbClr val="000000"/>
+                        </a:solidFill>
+                        <a:effectLst/>
+                        <a:latin typeface="Georgia" panose="02040502050405020303" pitchFamily="18" charset="0"/>
+                      </a:endParaRPr>
+                    </a:p>
+                  </a:txBody>
+                  <a:tcPr marL="9525" marR="9525" marT="9525" marB="0" anchor="ctr"/>
+                </a:tc>
+                <a:tc>
+                  <a:txBody>
+                    <a:bodyPr/>
+                    <a:lstStyle/>
+                    <a:p>
+                      <a:pPr algn="l" rtl="0" fontAlgn="ctr"/>
+                      <a:r>
+                        <a:rPr lang="en-US" sz="2000" b="0" i="1" u="none" strike="noStrike" dirty="0" err="1" smtClean="0">
+                          <a:solidFill>
+                            <a:schemeClr val="dk1"/>
+                          </a:solidFill>
+                          <a:effectLst/>
+                          <a:latin typeface="+mn-lt"/>
+                        </a:rPr>
+                        <a:t>p,q</a:t>
+                      </a:r>
+                      <a:r>
+                        <a:rPr lang="en-US" sz="2000" b="0" i="1" u="none" strike="noStrike" dirty="0" smtClean="0">
+                          <a:solidFill>
+                            <a:schemeClr val="dk1"/>
+                          </a:solidFill>
+                          <a:effectLst/>
+                          <a:latin typeface="+mn-lt"/>
+                        </a:rPr>
+                        <a:t> </a:t>
+                      </a:r>
+                      <a:r>
+                        <a:rPr lang="ru-RU" sz="2000" b="0" i="1" u="none" strike="noStrike" dirty="0" smtClean="0">
+                          <a:solidFill>
+                            <a:schemeClr val="dk1"/>
+                          </a:solidFill>
+                          <a:effectLst/>
+                          <a:latin typeface="+mn-lt"/>
+                        </a:rPr>
+                        <a:t>большие</a:t>
+                      </a:r>
+                      <a:r>
+                        <a:rPr lang="ru-RU" sz="2000" b="0" i="1" u="none" strike="noStrike" baseline="0" dirty="0" smtClean="0">
+                          <a:solidFill>
+                            <a:schemeClr val="dk1"/>
+                          </a:solidFill>
+                          <a:effectLst/>
+                          <a:latin typeface="+mn-lt"/>
+                        </a:rPr>
+                        <a:t> значения</a:t>
+                      </a:r>
+                      <a:endParaRPr lang="en-US" sz="2000" b="0" i="1" u="none" strike="noStrike" dirty="0">
+                        <a:solidFill>
+                          <a:srgbClr val="000000"/>
+                        </a:solidFill>
+                        <a:effectLst/>
+                        <a:latin typeface="Georgia" panose="02040502050405020303" pitchFamily="18" charset="0"/>
+                      </a:endParaRPr>
+                    </a:p>
+                  </a:txBody>
+                  <a:tcPr marL="9525" marR="9525" marT="9525" marB="0" anchor="ctr"/>
+                </a:tc>
+                <a:tc>
+                  <a:txBody>
+                    <a:bodyPr/>
+                    <a:lstStyle/>
+                    <a:p>
+                      <a:pPr algn="l" rtl="0" fontAlgn="ctr"/>
+                      <a:r>
+                        <a:rPr lang="ru-RU" sz="2000" i="1" u="none" strike="noStrike" dirty="0" smtClean="0">
+                          <a:effectLst/>
+                        </a:rPr>
+                        <a:t>Лучше</a:t>
+                      </a:r>
+                      <a:r>
+                        <a:rPr lang="ru-RU" sz="2000" i="1" u="none" strike="noStrike" baseline="0" dirty="0" smtClean="0">
+                          <a:effectLst/>
+                        </a:rPr>
+                        <a:t> </a:t>
+                      </a:r>
+                      <a:r>
+                        <a:rPr lang="ru-RU" sz="2000" i="1" u="none" strike="noStrike" baseline="0" dirty="0">
+                          <a:effectLst/>
+                        </a:rPr>
+                        <a:t>свести ряд к стационарному!</a:t>
+                      </a:r>
+                      <a:endParaRPr lang="en-US" sz="2000" b="0" i="1" u="none" strike="noStrike" dirty="0">
+                        <a:solidFill>
+                          <a:srgbClr val="000000"/>
+                        </a:solidFill>
+                        <a:effectLst/>
+                        <a:latin typeface="Georgia" panose="02040502050405020303" pitchFamily="18" charset="0"/>
+                      </a:endParaRPr>
+                    </a:p>
+                  </a:txBody>
+                  <a:tcPr marL="9525" marR="9525" marT="9525" marB="0" anchor="ctr"/>
+                </a:tc>
+                <a:extLst>
+                  <a:ext uri="{0D108BD9-81ED-4DB2-BD59-A6C34878D82A}">
+                    <a16:rowId xmlns:a16="http://schemas.microsoft.com/office/drawing/2014/main" val="2261503096"/>
+                  </a:ext>
+                </a:extLst>
+              </a:tr>
+              <a:tr h="167236">
+                <a:tc>
+                  <a:txBody>
+                    <a:bodyPr/>
+                    <a:lstStyle/>
+                    <a:p>
+                      <a:pPr algn="l" rtl="0" fontAlgn="ctr"/>
+                      <a:r>
+                        <a:rPr lang="en-US" sz="2000" u="none" strike="noStrike" dirty="0" err="1">
+                          <a:effectLst/>
+                        </a:rPr>
+                        <a:t>Нет</a:t>
+                      </a:r>
+                      <a:r>
+                        <a:rPr lang="en-US" sz="2000" u="none" strike="noStrike" dirty="0">
+                          <a:effectLst/>
+                        </a:rPr>
+                        <a:t> </a:t>
+                      </a:r>
+                      <a:r>
+                        <a:rPr lang="en-US" sz="2000" u="none" strike="noStrike" dirty="0" err="1">
+                          <a:effectLst/>
+                        </a:rPr>
+                        <a:t>существенных</a:t>
+                      </a:r>
+                      <a:r>
+                        <a:rPr lang="en-US" sz="2000" u="none" strike="noStrike" dirty="0">
+                          <a:effectLst/>
+                        </a:rPr>
+                        <a:t> </a:t>
+                      </a:r>
+                      <a:r>
+                        <a:rPr lang="en-US" sz="2000" u="none" strike="noStrike" dirty="0" err="1">
+                          <a:effectLst/>
+                        </a:rPr>
+                        <a:t>корреляций</a:t>
+                      </a:r>
+                      <a:endParaRPr lang="en-US" sz="2000" b="0" i="0" u="none" strike="noStrike" dirty="0">
+                        <a:solidFill>
+                          <a:srgbClr val="000000"/>
+                        </a:solidFill>
+                        <a:effectLst/>
+                        <a:latin typeface="Georgia" panose="02040502050405020303" pitchFamily="18" charset="0"/>
+                      </a:endParaRPr>
+                    </a:p>
+                  </a:txBody>
+                  <a:tcPr marL="9525" marR="9525" marT="9525" marB="0" anchor="ctr"/>
+                </a:tc>
+                <a:tc>
+                  <a:txBody>
+                    <a:bodyPr/>
+                    <a:lstStyle/>
+                    <a:p>
+                      <a:pPr algn="l" rtl="0" fontAlgn="ctr"/>
+                      <a:r>
+                        <a:rPr lang="en-US" sz="2000" b="0" i="1" u="none" strike="noStrike" dirty="0" err="1" smtClean="0">
+                          <a:solidFill>
+                            <a:schemeClr val="dk1"/>
+                          </a:solidFill>
+                          <a:effectLst/>
+                          <a:latin typeface="+mn-lt"/>
+                        </a:rPr>
+                        <a:t>p,q</a:t>
+                      </a:r>
+                      <a:r>
+                        <a:rPr lang="en-US" sz="2000" b="0" i="1" u="none" strike="noStrike" dirty="0" smtClean="0">
+                          <a:solidFill>
+                            <a:schemeClr val="dk1"/>
+                          </a:solidFill>
+                          <a:effectLst/>
+                          <a:latin typeface="+mn-lt"/>
+                        </a:rPr>
+                        <a:t> = (0,0) </a:t>
+                      </a:r>
+                      <a:endParaRPr lang="en-US" sz="2000" b="0" i="0" u="none" strike="noStrike" dirty="0">
+                        <a:solidFill>
+                          <a:srgbClr val="000000"/>
+                        </a:solidFill>
+                        <a:effectLst/>
+                        <a:latin typeface="Georgia" panose="02040502050405020303" pitchFamily="18" charset="0"/>
+                      </a:endParaRPr>
+                    </a:p>
+                  </a:txBody>
+                  <a:tcPr marL="9525" marR="9525" marT="9525" marB="0" anchor="ctr"/>
+                </a:tc>
+                <a:tc>
+                  <a:txBody>
+                    <a:bodyPr/>
+                    <a:lstStyle/>
+                    <a:p>
+                      <a:pPr algn="l" rtl="0" fontAlgn="ctr"/>
+                      <a:r>
+                        <a:rPr lang="en-US" sz="2000" u="none" strike="noStrike" dirty="0" err="1">
+                          <a:effectLst/>
+                        </a:rPr>
+                        <a:t>Случайн</a:t>
+                      </a:r>
+                      <a:r>
+                        <a:rPr lang="ru-RU" sz="2000" u="none" strike="noStrike" dirty="0" err="1">
+                          <a:effectLst/>
+                        </a:rPr>
+                        <a:t>ый</a:t>
+                      </a:r>
+                      <a:r>
+                        <a:rPr lang="en-US" sz="2000" u="none" strike="noStrike" dirty="0">
+                          <a:effectLst/>
+                        </a:rPr>
+                        <a:t> </a:t>
+                      </a:r>
+                      <a:r>
+                        <a:rPr lang="ru-RU" sz="2000" u="none" strike="noStrike" dirty="0">
+                          <a:effectLst/>
+                        </a:rPr>
+                        <a:t>ряд</a:t>
+                      </a:r>
+                      <a:r>
+                        <a:rPr lang="en-US" sz="2000" u="none" strike="noStrike" dirty="0">
+                          <a:effectLst/>
+                        </a:rPr>
+                        <a:t>.</a:t>
+                      </a:r>
+                      <a:endParaRPr lang="en-US" sz="2000" b="0" i="0" u="none" strike="noStrike" dirty="0">
+                        <a:solidFill>
+                          <a:srgbClr val="000000"/>
+                        </a:solidFill>
+                        <a:effectLst/>
+                        <a:latin typeface="Georgia" panose="02040502050405020303" pitchFamily="18" charset="0"/>
+                      </a:endParaRPr>
+                    </a:p>
+                  </a:txBody>
+                  <a:tcPr marL="9525" marR="9525" marT="9525" marB="0" anchor="ctr"/>
+                </a:tc>
+                <a:extLst>
+                  <a:ext uri="{0D108BD9-81ED-4DB2-BD59-A6C34878D82A}">
+                    <a16:rowId xmlns:a16="http://schemas.microsoft.com/office/drawing/2014/main" val="433632095"/>
+                  </a:ext>
+                </a:extLst>
+              </a:tr>
+              <a:tr h="296970">
+                <a:tc>
+                  <a:txBody>
+                    <a:bodyPr/>
+                    <a:lstStyle/>
+                    <a:p>
+                      <a:pPr algn="l" rtl="0" fontAlgn="ctr"/>
+                      <a:r>
+                        <a:rPr lang="ru-RU" sz="2000" u="none" strike="noStrike" kern="1200" dirty="0" smtClean="0">
+                          <a:solidFill>
+                            <a:schemeClr val="dk1"/>
+                          </a:solidFill>
+                          <a:effectLst/>
+                          <a:latin typeface="+mn-lt"/>
+                          <a:ea typeface="+mn-ea"/>
+                          <a:cs typeface="+mn-cs"/>
+                        </a:rPr>
+                        <a:t>Резкие но редкие выбросы</a:t>
+                      </a:r>
+                      <a:endParaRPr lang="en-US" sz="2000" u="none" strike="noStrike" kern="1200" dirty="0">
+                        <a:solidFill>
+                          <a:schemeClr val="dk1"/>
+                        </a:solidFill>
+                        <a:effectLst/>
+                        <a:latin typeface="+mn-lt"/>
+                        <a:ea typeface="+mn-ea"/>
+                        <a:cs typeface="+mn-cs"/>
+                      </a:endParaRPr>
+                    </a:p>
+                  </a:txBody>
+                  <a:tcPr marL="9525" marR="9525" marT="9525" marB="0" anchor="ctr"/>
+                </a:tc>
+                <a:tc>
+                  <a:txBody>
+                    <a:bodyPr/>
+                    <a:lstStyle/>
+                    <a:p>
+                      <a:pPr marL="0" marR="0" indent="0" algn="l" defTabSz="914400" rtl="0" eaLnBrk="1" fontAlgn="ctr" latinLnBrk="0" hangingPunct="1">
+                        <a:lnSpc>
+                          <a:spcPct val="100000"/>
+                        </a:lnSpc>
+                        <a:spcBef>
+                          <a:spcPts val="0"/>
+                        </a:spcBef>
+                        <a:spcAft>
+                          <a:spcPts val="0"/>
+                        </a:spcAft>
+                        <a:buClrTx/>
+                        <a:buSzTx/>
+                        <a:buFontTx/>
+                        <a:buNone/>
+                        <a:tabLst/>
+                        <a:defRPr/>
+                      </a:pPr>
+                      <a:r>
+                        <a:rPr lang="ru-RU" sz="2000" b="0" i="0" kern="1200" dirty="0" smtClean="0">
+                          <a:solidFill>
+                            <a:schemeClr val="dk1"/>
+                          </a:solidFill>
+                          <a:effectLst/>
+                          <a:latin typeface="+mn-lt"/>
+                          <a:ea typeface="+mn-ea"/>
+                          <a:cs typeface="+mn-cs"/>
+                        </a:rPr>
+                        <a:t>Увеличить</a:t>
+                      </a:r>
+                      <a:r>
+                        <a:rPr lang="en-US" sz="2000" b="0" i="0" kern="1200" dirty="0" smtClean="0">
+                          <a:solidFill>
+                            <a:schemeClr val="dk1"/>
+                          </a:solidFill>
+                          <a:effectLst/>
+                          <a:latin typeface="+mn-lt"/>
+                          <a:ea typeface="+mn-ea"/>
+                          <a:cs typeface="+mn-cs"/>
+                        </a:rPr>
+                        <a:t> q</a:t>
+                      </a:r>
+                      <a:endParaRPr lang="en-US" sz="2000" b="0" i="0" u="none" strike="noStrike" dirty="0">
+                        <a:solidFill>
+                          <a:srgbClr val="000000"/>
+                        </a:solidFill>
+                        <a:effectLst/>
+                        <a:latin typeface="Georgia" panose="02040502050405020303" pitchFamily="18" charset="0"/>
+                      </a:endParaRPr>
+                    </a:p>
+                  </a:txBody>
+                  <a:tcPr marL="9525" marR="9525" marT="9525" marB="0" anchor="ctr"/>
+                </a:tc>
+                <a:tc>
+                  <a:txBody>
+                    <a:bodyPr/>
+                    <a:lstStyle/>
+                    <a:p>
+                      <a:pPr algn="l" rtl="0" fontAlgn="ctr"/>
+                      <a:r>
+                        <a:rPr lang="ru-RU" sz="1800" b="0" i="0" kern="1200" dirty="0" smtClean="0">
+                          <a:solidFill>
+                            <a:schemeClr val="dk1"/>
+                          </a:solidFill>
+                          <a:effectLst/>
+                          <a:latin typeface="+mn-lt"/>
+                          <a:ea typeface="+mn-ea"/>
+                          <a:cs typeface="+mn-cs"/>
+                        </a:rPr>
+                        <a:t>MA-часть фильтрует</a:t>
+                      </a:r>
+                      <a:r>
+                        <a:rPr lang="ru-RU" sz="1800" b="0" i="0" kern="1200" baseline="0" dirty="0" smtClean="0">
+                          <a:solidFill>
+                            <a:schemeClr val="dk1"/>
+                          </a:solidFill>
+                          <a:effectLst/>
+                          <a:latin typeface="+mn-lt"/>
+                          <a:ea typeface="+mn-ea"/>
+                          <a:cs typeface="+mn-cs"/>
+                        </a:rPr>
+                        <a:t> (</a:t>
+                      </a:r>
+                      <a:r>
+                        <a:rPr lang="ru-RU" sz="1800" b="0" i="0" kern="1200" dirty="0" smtClean="0">
+                          <a:solidFill>
+                            <a:schemeClr val="dk1"/>
+                          </a:solidFill>
+                          <a:effectLst/>
+                          <a:latin typeface="+mn-lt"/>
+                          <a:ea typeface="+mn-ea"/>
+                          <a:cs typeface="+mn-cs"/>
+                        </a:rPr>
+                        <a:t>гасит) одноразовые воздействия (нештатные</a:t>
+                      </a:r>
+                      <a:r>
+                        <a:rPr lang="ru-RU" sz="1800" b="0" i="0" kern="1200" baseline="0" dirty="0" smtClean="0">
+                          <a:solidFill>
+                            <a:schemeClr val="dk1"/>
+                          </a:solidFill>
+                          <a:effectLst/>
+                          <a:latin typeface="+mn-lt"/>
+                          <a:ea typeface="+mn-ea"/>
+                          <a:cs typeface="+mn-cs"/>
+                        </a:rPr>
+                        <a:t> ситуации</a:t>
+                      </a:r>
+                      <a:r>
+                        <a:rPr lang="ru-RU" sz="1800" b="0" i="0" kern="1200" dirty="0" smtClean="0">
+                          <a:solidFill>
+                            <a:schemeClr val="dk1"/>
+                          </a:solidFill>
+                          <a:effectLst/>
+                          <a:latin typeface="+mn-lt"/>
+                          <a:ea typeface="+mn-ea"/>
+                          <a:cs typeface="+mn-cs"/>
+                        </a:rPr>
+                        <a:t>)</a:t>
+                      </a:r>
+                      <a:endParaRPr lang="en-US" sz="2000" b="0" i="0" u="none" strike="noStrike" dirty="0">
+                        <a:solidFill>
+                          <a:srgbClr val="000000"/>
+                        </a:solidFill>
+                        <a:effectLst/>
+                        <a:latin typeface="Georgia" panose="02040502050405020303" pitchFamily="18" charset="0"/>
+                      </a:endParaRPr>
+                    </a:p>
+                  </a:txBody>
+                  <a:tcPr marL="9525" marR="9525" marT="9525" marB="0" anchor="ctr"/>
+                </a:tc>
+                <a:extLst>
+                  <a:ext uri="{0D108BD9-81ED-4DB2-BD59-A6C34878D82A}">
+                    <a16:rowId xmlns:a16="http://schemas.microsoft.com/office/drawing/2014/main" val="4094989113"/>
+                  </a:ext>
+                </a:extLst>
+              </a:tr>
+              <a:tr h="167236">
+                <a:tc>
+                  <a:txBody>
+                    <a:bodyPr/>
+                    <a:lstStyle/>
+                    <a:p>
+                      <a:pPr algn="l" rtl="0" fontAlgn="ctr"/>
+                      <a:r>
+                        <a:rPr lang="ru-RU" sz="1800" b="0" i="0" kern="1200" dirty="0" smtClean="0">
+                          <a:solidFill>
+                            <a:schemeClr val="dk1"/>
+                          </a:solidFill>
+                          <a:effectLst/>
+                          <a:latin typeface="+mn-lt"/>
+                          <a:ea typeface="+mn-ea"/>
+                          <a:cs typeface="+mn-cs"/>
+                        </a:rPr>
+                        <a:t>Ряд инертен, напр. температура, давление</a:t>
+                      </a:r>
+                      <a:endParaRPr lang="en-US" sz="2000" u="none" strike="noStrike" kern="1200" dirty="0">
+                        <a:solidFill>
+                          <a:schemeClr val="dk1"/>
+                        </a:solidFill>
+                        <a:effectLst/>
+                        <a:latin typeface="+mn-lt"/>
+                        <a:ea typeface="+mn-ea"/>
+                        <a:cs typeface="+mn-cs"/>
+                      </a:endParaRPr>
+                    </a:p>
+                  </a:txBody>
+                  <a:tcPr marL="9525" marR="9525" marT="9525" marB="0" anchor="ctr"/>
+                </a:tc>
+                <a:tc>
+                  <a:txBody>
+                    <a:bodyPr/>
+                    <a:lstStyle/>
+                    <a:p>
+                      <a:pPr marL="0" marR="0" indent="0" algn="l" defTabSz="914400" rtl="0" eaLnBrk="1" fontAlgn="ctr" latinLnBrk="0" hangingPunct="1">
+                        <a:lnSpc>
+                          <a:spcPct val="100000"/>
+                        </a:lnSpc>
+                        <a:spcBef>
+                          <a:spcPts val="0"/>
+                        </a:spcBef>
+                        <a:spcAft>
+                          <a:spcPts val="0"/>
+                        </a:spcAft>
+                        <a:buClrTx/>
+                        <a:buSzTx/>
+                        <a:buFontTx/>
+                        <a:buNone/>
+                        <a:tabLst/>
+                        <a:defRPr/>
+                      </a:pPr>
+                      <a:r>
+                        <a:rPr lang="ru-RU" sz="2000" b="0" i="0" kern="1200" dirty="0" smtClean="0">
+                          <a:solidFill>
+                            <a:schemeClr val="dk1"/>
+                          </a:solidFill>
+                          <a:effectLst/>
+                          <a:latin typeface="+mn-lt"/>
+                          <a:ea typeface="+mn-ea"/>
+                          <a:cs typeface="+mn-cs"/>
+                        </a:rPr>
+                        <a:t>Увеличить</a:t>
+                      </a:r>
+                      <a:r>
+                        <a:rPr lang="en-US" sz="2000" b="0" i="0" kern="1200" dirty="0" smtClean="0">
+                          <a:solidFill>
+                            <a:schemeClr val="dk1"/>
+                          </a:solidFill>
+                          <a:effectLst/>
+                          <a:latin typeface="+mn-lt"/>
+                          <a:ea typeface="+mn-ea"/>
+                          <a:cs typeface="+mn-cs"/>
+                        </a:rPr>
+                        <a:t> p</a:t>
+                      </a:r>
+                      <a:endParaRPr lang="en-US" sz="2000" b="0" i="0" u="none" strike="noStrike" dirty="0">
+                        <a:solidFill>
+                          <a:srgbClr val="000000"/>
+                        </a:solidFill>
+                        <a:effectLst/>
+                        <a:latin typeface="Georgia" panose="02040502050405020303" pitchFamily="18" charset="0"/>
+                      </a:endParaRPr>
+                    </a:p>
+                  </a:txBody>
+                  <a:tcPr marL="9525" marR="9525" marT="9525" marB="0" anchor="ctr"/>
+                </a:tc>
+                <a:tc>
+                  <a:txBody>
+                    <a:bodyPr/>
+                    <a:lstStyle/>
+                    <a:p>
+                      <a:pPr algn="l" rtl="0" fontAlgn="ctr"/>
+                      <a:r>
+                        <a:rPr lang="en-US" sz="1800" b="0" i="0" kern="1200" dirty="0" smtClean="0">
+                          <a:solidFill>
+                            <a:schemeClr val="dk1"/>
+                          </a:solidFill>
+                          <a:effectLst/>
+                          <a:latin typeface="+mn-lt"/>
+                          <a:ea typeface="+mn-ea"/>
+                          <a:cs typeface="+mn-cs"/>
+                        </a:rPr>
+                        <a:t>AR-</a:t>
+                      </a:r>
+                      <a:r>
+                        <a:rPr lang="ru-RU" sz="1800" b="0" i="0" kern="1200" dirty="0" smtClean="0">
+                          <a:solidFill>
+                            <a:schemeClr val="dk1"/>
+                          </a:solidFill>
+                          <a:effectLst/>
+                          <a:latin typeface="+mn-lt"/>
+                          <a:ea typeface="+mn-ea"/>
+                          <a:cs typeface="+mn-cs"/>
+                        </a:rPr>
+                        <a:t>часть учитывает "инерцию" системы (память)</a:t>
+                      </a:r>
+                      <a:endParaRPr lang="en-US" sz="2000" b="0" i="0" u="none" strike="noStrike" dirty="0">
+                        <a:solidFill>
+                          <a:srgbClr val="000000"/>
+                        </a:solidFill>
+                        <a:effectLst/>
+                        <a:latin typeface="Georgia" panose="02040502050405020303" pitchFamily="18" charset="0"/>
+                      </a:endParaRPr>
+                    </a:p>
+                  </a:txBody>
+                  <a:tcPr marL="9525" marR="9525" marT="9525" marB="0" anchor="ctr"/>
+                </a:tc>
+                <a:extLst>
+                  <a:ext uri="{0D108BD9-81ED-4DB2-BD59-A6C34878D82A}">
+                    <a16:rowId xmlns:a16="http://schemas.microsoft.com/office/drawing/2014/main" val="902518114"/>
+                  </a:ext>
+                </a:extLst>
+              </a:tr>
+              <a:tr h="167236">
+                <a:tc>
+                  <a:txBody>
+                    <a:bodyPr/>
+                    <a:lstStyle/>
+                    <a:p>
+                      <a:pPr algn="l" rtl="0" fontAlgn="ctr"/>
+                      <a:r>
+                        <a:rPr lang="ru-RU" sz="2000" u="none" strike="noStrike" kern="1200" dirty="0" smtClean="0">
+                          <a:solidFill>
+                            <a:schemeClr val="dk1"/>
+                          </a:solidFill>
+                          <a:effectLst/>
+                          <a:latin typeface="+mn-lt"/>
+                          <a:ea typeface="+mn-ea"/>
+                          <a:cs typeface="+mn-cs"/>
+                        </a:rPr>
+                        <a:t>Ряд зашумлен</a:t>
+                      </a:r>
+                      <a:endParaRPr lang="en-US" sz="2000" u="none" strike="noStrike" kern="1200" dirty="0">
+                        <a:solidFill>
+                          <a:schemeClr val="dk1"/>
+                        </a:solidFill>
+                        <a:effectLst/>
+                        <a:latin typeface="+mn-lt"/>
+                        <a:ea typeface="+mn-ea"/>
+                        <a:cs typeface="+mn-cs"/>
+                      </a:endParaRPr>
+                    </a:p>
+                  </a:txBody>
+                  <a:tcPr marL="9525" marR="9525" marT="9525" marB="0" anchor="ctr"/>
+                </a:tc>
+                <a:tc>
+                  <a:txBody>
+                    <a:bodyPr/>
+                    <a:lstStyle/>
+                    <a:p>
+                      <a:pPr marL="0" marR="0" indent="0" algn="l" defTabSz="914400" rtl="0" eaLnBrk="1" fontAlgn="ctr" latinLnBrk="0" hangingPunct="1">
+                        <a:lnSpc>
+                          <a:spcPct val="100000"/>
+                        </a:lnSpc>
+                        <a:spcBef>
+                          <a:spcPts val="0"/>
+                        </a:spcBef>
+                        <a:spcAft>
+                          <a:spcPts val="0"/>
+                        </a:spcAft>
+                        <a:buClrTx/>
+                        <a:buSzTx/>
+                        <a:buFontTx/>
+                        <a:buNone/>
+                        <a:tabLst/>
+                        <a:defRPr/>
+                      </a:pPr>
+                      <a:r>
+                        <a:rPr lang="ru-RU" sz="2000" b="0" i="0" kern="1200" dirty="0" smtClean="0">
+                          <a:solidFill>
+                            <a:schemeClr val="dk1"/>
+                          </a:solidFill>
+                          <a:effectLst/>
+                          <a:latin typeface="+mn-lt"/>
+                          <a:ea typeface="+mn-ea"/>
+                          <a:cs typeface="+mn-cs"/>
+                        </a:rPr>
+                        <a:t>Увеличить</a:t>
+                      </a:r>
+                      <a:r>
+                        <a:rPr lang="en-US" sz="2000" b="0" i="0" kern="1200" dirty="0" smtClean="0">
+                          <a:solidFill>
+                            <a:schemeClr val="dk1"/>
+                          </a:solidFill>
+                          <a:effectLst/>
+                          <a:latin typeface="+mn-lt"/>
+                          <a:ea typeface="+mn-ea"/>
+                          <a:cs typeface="+mn-cs"/>
+                        </a:rPr>
+                        <a:t> q</a:t>
+                      </a:r>
+                      <a:endParaRPr lang="en-US" sz="2000" b="0" i="0" u="none" strike="noStrike" dirty="0">
+                        <a:solidFill>
+                          <a:srgbClr val="000000"/>
+                        </a:solidFill>
+                        <a:effectLst/>
+                        <a:latin typeface="Georgia" panose="02040502050405020303" pitchFamily="18" charset="0"/>
+                      </a:endParaRPr>
+                    </a:p>
+                  </a:txBody>
+                  <a:tcPr marL="9525" marR="9525" marT="9525" marB="0" anchor="ctr"/>
+                </a:tc>
+                <a:tc>
+                  <a:txBody>
+                    <a:bodyPr/>
+                    <a:lstStyle/>
+                    <a:p>
+                      <a:pPr algn="l" rtl="0" fontAlgn="ctr"/>
+                      <a:r>
+                        <a:rPr lang="ru-RU" sz="2000" b="0" i="0" kern="1200" dirty="0" smtClean="0">
+                          <a:solidFill>
+                            <a:schemeClr val="dk1"/>
+                          </a:solidFill>
+                          <a:effectLst/>
+                          <a:latin typeface="+mn-lt"/>
+                          <a:ea typeface="+mn-ea"/>
+                          <a:cs typeface="+mn-cs"/>
+                        </a:rPr>
+                        <a:t>MA-часть фильтрует</a:t>
+                      </a:r>
+                      <a:r>
+                        <a:rPr lang="ru-RU" sz="2000" b="0" i="0" kern="1200" baseline="0" dirty="0" smtClean="0">
+                          <a:solidFill>
+                            <a:schemeClr val="dk1"/>
+                          </a:solidFill>
+                          <a:effectLst/>
+                          <a:latin typeface="+mn-lt"/>
+                          <a:ea typeface="+mn-ea"/>
+                          <a:cs typeface="+mn-cs"/>
+                        </a:rPr>
+                        <a:t> шумы</a:t>
+                      </a:r>
+                      <a:endParaRPr lang="en-US" sz="2000" b="0" i="0" u="none" strike="noStrike" dirty="0">
+                        <a:solidFill>
+                          <a:srgbClr val="000000"/>
+                        </a:solidFill>
+                        <a:effectLst/>
+                        <a:latin typeface="Georgia" panose="02040502050405020303" pitchFamily="18" charset="0"/>
+                      </a:endParaRPr>
+                    </a:p>
+                  </a:txBody>
+                  <a:tcPr marL="9525" marR="9525" marT="9525" marB="0" anchor="ctr"/>
+                </a:tc>
+                <a:extLst>
+                  <a:ext uri="{0D108BD9-81ED-4DB2-BD59-A6C34878D82A}">
+                    <a16:rowId xmlns:a16="http://schemas.microsoft.com/office/drawing/2014/main" val="3711080999"/>
+                  </a:ext>
+                </a:extLst>
+              </a:tr>
+            </a:tbl>
+          </a:graphicData>
+        </a:graphic>
+      </p:graphicFrame>
+      <mc:AlternateContent xmlns:mc="http://schemas.openxmlformats.org/markup-compatibility/2006">
+        <mc:Choice xmlns:a14="http://schemas.microsoft.com/office/drawing/2010/main" Requires="a14">
+          <p:sp>
+            <p:nvSpPr>
+              <p:cNvPr id="7" name="Прямоугольник 6"/>
+              <p:cNvSpPr/>
+              <p:nvPr/>
+            </p:nvSpPr>
+            <p:spPr>
+              <a:xfrm>
+                <a:off x="168428" y="5795683"/>
+                <a:ext cx="11383309" cy="1015663"/>
+              </a:xfrm>
+              <a:prstGeom prst="rect">
+                <a:avLst/>
+              </a:prstGeom>
+            </p:spPr>
+            <p:txBody>
+              <a:bodyPr wrap="square">
+                <a:spAutoFit/>
+              </a:bodyPr>
+              <a:lstStyle/>
+              <a:p>
+                <a:pPr marL="285750" indent="-285750" fontAlgn="base">
+                  <a:buFont typeface="Arial" panose="020B0604020202020204" pitchFamily="34" charset="0"/>
+                  <a:buChar char="•"/>
+                </a:pPr>
+                <a:r>
+                  <a:rPr lang="ru-RU" sz="2000" dirty="0" smtClean="0">
+                    <a:solidFill>
+                      <a:srgbClr val="1D1D20"/>
+                    </a:solidFill>
+                  </a:rPr>
+                  <a:t>Простые модели </a:t>
+                </a:r>
+                <a:r>
+                  <a:rPr lang="ru-RU" sz="2000" dirty="0">
+                    <a:solidFill>
+                      <a:srgbClr val="1D1D20"/>
+                    </a:solidFill>
+                  </a:rPr>
+                  <a:t>(</a:t>
+                </a:r>
+                <a14:m>
+                  <m:oMath xmlns:m="http://schemas.openxmlformats.org/officeDocument/2006/math">
+                    <m:r>
+                      <a:rPr lang="en-US" sz="2000" i="1" dirty="0" smtClean="0">
+                        <a:solidFill>
+                          <a:srgbClr val="1D1D20"/>
+                        </a:solidFill>
+                        <a:latin typeface="Cambria Math" panose="02040503050406030204" pitchFamily="18" charset="0"/>
+                      </a:rPr>
+                      <m:t>𝑝</m:t>
+                    </m:r>
+                    <m:r>
+                      <a:rPr lang="en-US" sz="2000" i="1" dirty="0" smtClean="0">
+                        <a:solidFill>
+                          <a:srgbClr val="1D1D20"/>
+                        </a:solidFill>
+                        <a:latin typeface="Cambria Math" panose="02040503050406030204" pitchFamily="18" charset="0"/>
+                      </a:rPr>
+                      <m:t>,</m:t>
+                    </m:r>
+                    <m:r>
+                      <a:rPr lang="en-US" sz="2000" i="1" dirty="0" smtClean="0">
+                        <a:solidFill>
+                          <a:srgbClr val="1D1D20"/>
+                        </a:solidFill>
+                        <a:latin typeface="Cambria Math" panose="02040503050406030204" pitchFamily="18" charset="0"/>
+                      </a:rPr>
+                      <m:t>𝑞</m:t>
+                    </m:r>
+                    <m:r>
+                      <a:rPr lang="en-US" sz="2000" i="1" dirty="0" smtClean="0">
+                        <a:solidFill>
+                          <a:srgbClr val="1D1D20"/>
+                        </a:solidFill>
+                        <a:latin typeface="Cambria Math" panose="02040503050406030204" pitchFamily="18" charset="0"/>
+                      </a:rPr>
+                      <m:t>≤(2,2)</m:t>
+                    </m:r>
+                  </m:oMath>
+                </a14:m>
+                <a:r>
+                  <a:rPr lang="ru-RU" sz="2000" dirty="0" smtClean="0">
+                    <a:solidFill>
+                      <a:srgbClr val="1D1D20"/>
+                    </a:solidFill>
+                  </a:rPr>
+                  <a:t>) </a:t>
+                </a:r>
+                <a:r>
+                  <a:rPr lang="ru-RU" sz="2000" dirty="0">
+                    <a:solidFill>
+                      <a:srgbClr val="1D1D20"/>
+                    </a:solidFill>
+                  </a:rPr>
+                  <a:t>часто дают лучшую точность и меньше </a:t>
+                </a:r>
+                <a:r>
+                  <a:rPr lang="ru-RU" sz="2000" dirty="0" smtClean="0">
+                    <a:solidFill>
+                      <a:srgbClr val="1D1D20"/>
+                    </a:solidFill>
+                  </a:rPr>
+                  <a:t>переобучаются</a:t>
+                </a:r>
+                <a:r>
+                  <a:rPr lang="en-US" sz="2000" dirty="0" smtClean="0">
+                    <a:solidFill>
+                      <a:srgbClr val="1D1D20"/>
+                    </a:solidFill>
+                  </a:rPr>
+                  <a:t> </a:t>
+                </a:r>
+                <a:r>
+                  <a:rPr lang="ru-RU" sz="2000" dirty="0" smtClean="0">
+                    <a:solidFill>
+                      <a:srgbClr val="1D1D20"/>
+                    </a:solidFill>
+                  </a:rPr>
+                  <a:t>на небольших данных и краткосрочных прогнозах, также такие модели легче интерпретировать</a:t>
+                </a:r>
+              </a:p>
+              <a:p>
+                <a:pPr marL="285750" indent="-285750" fontAlgn="base">
+                  <a:buFont typeface="Arial" panose="020B0604020202020204" pitchFamily="34" charset="0"/>
+                  <a:buChar char="•"/>
+                </a:pPr>
+                <a:r>
+                  <a:rPr lang="ru-RU" sz="2000" dirty="0" smtClean="0">
+                    <a:solidFill>
+                      <a:srgbClr val="1D1D20"/>
+                    </a:solidFill>
+                  </a:rPr>
+                  <a:t>Чем меньше горизонт прогнозирования, тем меньше требования к стационарности ВР</a:t>
+                </a:r>
+                <a:endParaRPr lang="ru-RU" sz="2000" dirty="0">
+                  <a:solidFill>
+                    <a:srgbClr val="1D1D20"/>
+                  </a:solidFill>
+                </a:endParaRPr>
+              </a:p>
+            </p:txBody>
+          </p:sp>
+        </mc:Choice>
+        <mc:Fallback>
+          <p:sp>
+            <p:nvSpPr>
+              <p:cNvPr id="7" name="Прямоугольник 6"/>
+              <p:cNvSpPr>
+                <a:spLocks noRot="1" noChangeAspect="1" noMove="1" noResize="1" noEditPoints="1" noAdjustHandles="1" noChangeArrowheads="1" noChangeShapeType="1" noTextEdit="1"/>
+              </p:cNvSpPr>
+              <p:nvPr/>
+            </p:nvSpPr>
+            <p:spPr>
+              <a:xfrm>
+                <a:off x="168428" y="5795683"/>
+                <a:ext cx="11383309" cy="1015663"/>
+              </a:xfrm>
+              <a:prstGeom prst="rect">
+                <a:avLst/>
+              </a:prstGeom>
+              <a:blipFill>
+                <a:blip r:embed="rId2"/>
+                <a:stretch>
+                  <a:fillRect l="-482" t="-3614" r="-268" b="-10241"/>
+                </a:stretch>
+              </a:blipFill>
+            </p:spPr>
+            <p:txBody>
+              <a:bodyPr/>
+              <a:lstStyle/>
+              <a:p>
+                <a:r>
+                  <a:rPr lang="ru-RU">
+                    <a:noFill/>
+                  </a:rPr>
+                  <a:t> </a:t>
+                </a:r>
+              </a:p>
+            </p:txBody>
+          </p:sp>
+        </mc:Fallback>
+      </mc:AlternateContent>
+      <p:pic>
+        <p:nvPicPr>
+          <p:cNvPr id="9" name="Рисунок 8"/>
+          <p:cNvPicPr>
+            <a:picLocks noChangeAspect="1"/>
+          </p:cNvPicPr>
+          <p:nvPr/>
+        </p:nvPicPr>
+        <p:blipFill>
+          <a:blip r:embed="rId3"/>
+          <a:stretch>
+            <a:fillRect/>
+          </a:stretch>
+        </p:blipFill>
+        <p:spPr>
+          <a:xfrm>
+            <a:off x="6610350" y="6967896"/>
+            <a:ext cx="5319712" cy="1275991"/>
+          </a:xfrm>
+          <a:prstGeom prst="rect">
+            <a:avLst/>
+          </a:prstGeom>
+        </p:spPr>
+      </p:pic>
+      <p:sp>
+        <p:nvSpPr>
+          <p:cNvPr id="10" name="Прямоугольник 9"/>
+          <p:cNvSpPr/>
+          <p:nvPr/>
+        </p:nvSpPr>
+        <p:spPr>
+          <a:xfrm>
+            <a:off x="1143000" y="7173010"/>
+            <a:ext cx="6096000" cy="646331"/>
+          </a:xfrm>
+          <a:prstGeom prst="rect">
+            <a:avLst/>
+          </a:prstGeom>
+        </p:spPr>
+        <p:txBody>
+          <a:bodyPr>
+            <a:spAutoFit/>
+          </a:bodyPr>
+          <a:lstStyle/>
+          <a:p>
+            <a:r>
+              <a:rPr lang="ru-RU" dirty="0" smtClean="0"/>
+              <a:t>https://xiaorui.site/Forecasting-and-Time-Series-Methods/Lecture/2_AR_MA.html</a:t>
+            </a:r>
+            <a:endParaRPr lang="ru-RU" dirty="0"/>
+          </a:p>
+        </p:txBody>
+      </p:sp>
+    </p:spTree>
+    <p:extLst>
+      <p:ext uri="{BB962C8B-B14F-4D97-AF65-F5344CB8AC3E}">
+        <p14:creationId xmlns:p14="http://schemas.microsoft.com/office/powerpoint/2010/main" val="1818749740"/>
+      </p:ext>
+    </p:extLst>
+  </p:cSld>
+  <p:clrMapOvr>
+    <a:masterClrMapping/>
+  </p:clrMapOvr>
+  <p:timing>
+    <p:tnLst>
+      <p:par>
+        <p:cTn id="1" dur="indefinite" restart="never" nodeType="tmRoot"/>
+      </p:par>
+    </p:tnLst>
+  </p:timing>
+</p:sld>
+</file>
+
+<file path=ppt/slides/slide11.xml><?xml version="1.0" encoding="utf-8"?>
+<p:sld xmlns:a="http://schemas.openxmlformats.org/drawingml/2006/main" xmlns:r="http://schemas.openxmlformats.org/officeDocument/2006/relationships" xmlns:p="http://schemas.openxmlformats.org/presentationml/2006/main">
+  <p:cSld>
+    <p:spTree>
+      <p:nvGrpSpPr>
+        <p:cNvPr id="1" name=""/>
+        <p:cNvGrpSpPr/>
+        <p:nvPr/>
+      </p:nvGrpSpPr>
+      <p:grpSpPr>
+        <a:xfrm>
+          <a:off x="0" y="0"/>
+          <a:ext cx="0" cy="0"/>
+          <a:chOff x="0" y="0"/>
+          <a:chExt cx="0" cy="0"/>
+        </a:xfrm>
+      </p:grpSpPr>
+      <p:sp>
+        <p:nvSpPr>
+          <p:cNvPr id="2" name="Заголовок 1">
+            <a:extLst>
+              <a:ext uri="{FF2B5EF4-FFF2-40B4-BE49-F238E27FC236}">
+                <a16:creationId xmlns:a16="http://schemas.microsoft.com/office/drawing/2014/main" id="{7CB29E92-B795-4F44-A577-A4EBC753A5A5}"/>
+              </a:ext>
+            </a:extLst>
+          </p:cNvPr>
+          <p:cNvSpPr>
+            <a:spLocks noGrp="1"/>
+          </p:cNvSpPr>
+          <p:nvPr>
+            <p:ph type="title"/>
+          </p:nvPr>
+        </p:nvSpPr>
+        <p:spPr>
+          <a:xfrm>
+            <a:off x="294341" y="147911"/>
+            <a:ext cx="10515600" cy="612028"/>
+          </a:xfrm>
+        </p:spPr>
+        <p:txBody>
+          <a:bodyPr>
+            <a:normAutofit fontScale="90000"/>
+          </a:bodyPr>
+          <a:lstStyle/>
+          <a:p>
+            <a:pPr algn="l" rtl="0"/>
+            <a:r>
+              <a:rPr lang="en-US" b="1" dirty="0" err="1" smtClean="0"/>
+              <a:t>Выбор</a:t>
+            </a:r>
+            <a:r>
+              <a:rPr lang="en-US" b="1" dirty="0" smtClean="0"/>
+              <a:t> </a:t>
+            </a:r>
+            <a:r>
+              <a:rPr lang="ru-RU" b="1" dirty="0" smtClean="0"/>
+              <a:t>начальных значений</a:t>
+            </a:r>
+            <a:r>
+              <a:rPr lang="en-US" b="1" dirty="0" smtClean="0"/>
+              <a:t> </a:t>
+            </a:r>
+            <a:r>
+              <a:rPr lang="ru-RU" b="1" dirty="0"/>
+              <a:t>порядка</a:t>
+            </a:r>
+            <a:r>
+              <a:rPr lang="en-US" b="1" dirty="0"/>
+              <a:t> ARMA</a:t>
+            </a:r>
+            <a:endParaRPr lang="en-US" dirty="0"/>
+          </a:p>
+        </p:txBody>
+      </p:sp>
+      <p:sp>
+        <p:nvSpPr>
+          <p:cNvPr id="3" name="Объект 2">
+            <a:extLst>
+              <a:ext uri="{FF2B5EF4-FFF2-40B4-BE49-F238E27FC236}">
+                <a16:creationId xmlns:a16="http://schemas.microsoft.com/office/drawing/2014/main" id="{40ACB7F2-07F5-4100-AF8D-CFA14F65E0BA}"/>
+              </a:ext>
+            </a:extLst>
+          </p:cNvPr>
+          <p:cNvSpPr>
+            <a:spLocks noGrp="1"/>
+          </p:cNvSpPr>
+          <p:nvPr>
+            <p:ph idx="1"/>
+          </p:nvPr>
+        </p:nvSpPr>
+        <p:spPr>
+          <a:xfrm>
+            <a:off x="246528" y="678330"/>
+            <a:ext cx="11932241" cy="5853952"/>
+          </a:xfrm>
+        </p:spPr>
+        <p:txBody>
+          <a:bodyPr>
+            <a:normAutofit/>
+          </a:bodyPr>
+          <a:lstStyle/>
+          <a:p>
+            <a:pPr algn="l" rtl="0"/>
+            <a:endParaRPr lang="en-US" sz="2400" dirty="0"/>
+          </a:p>
+        </p:txBody>
+      </p:sp>
+      <p:sp>
+        <p:nvSpPr>
+          <p:cNvPr id="5" name="Прямоугольник 4"/>
+          <p:cNvSpPr/>
+          <p:nvPr/>
+        </p:nvSpPr>
+        <p:spPr>
+          <a:xfrm>
+            <a:off x="156882" y="6316837"/>
+            <a:ext cx="11932241" cy="430887"/>
+          </a:xfrm>
+          <a:prstGeom prst="rect">
+            <a:avLst/>
+          </a:prstGeom>
+        </p:spPr>
+        <p:txBody>
+          <a:bodyPr wrap="none">
+            <a:spAutoFit/>
+          </a:bodyPr>
+          <a:lstStyle/>
+          <a:p>
+            <a:r>
+              <a:rPr lang="ru-RU" sz="2200" dirty="0" smtClean="0"/>
+              <a:t>Модели записываются в виде </a:t>
+            </a:r>
+            <a:r>
+              <a:rPr lang="en-US" sz="2200" dirty="0" smtClean="0"/>
+              <a:t>ARMA(</a:t>
+            </a:r>
+            <a:r>
+              <a:rPr lang="en-US" sz="2200" dirty="0" err="1" smtClean="0"/>
+              <a:t>p,q</a:t>
+            </a:r>
+            <a:r>
+              <a:rPr lang="en-US" sz="2200" dirty="0" smtClean="0"/>
+              <a:t>)</a:t>
+            </a:r>
+            <a:r>
+              <a:rPr lang="ru-RU" sz="2200" dirty="0" smtClean="0"/>
+              <a:t> – что значит модель </a:t>
+            </a:r>
+            <a:r>
+              <a:rPr lang="en-US" sz="2200" dirty="0" smtClean="0"/>
+              <a:t>p-</a:t>
+            </a:r>
+            <a:r>
+              <a:rPr lang="ru-RU" sz="2200" dirty="0" smtClean="0"/>
+              <a:t>порядка по </a:t>
+            </a:r>
+            <a:r>
+              <a:rPr lang="en-US" sz="2200" dirty="0" smtClean="0"/>
+              <a:t>AR </a:t>
+            </a:r>
+            <a:r>
+              <a:rPr lang="ru-RU" sz="2200" dirty="0" smtClean="0"/>
+              <a:t>и </a:t>
+            </a:r>
+            <a:r>
+              <a:rPr lang="en-US" sz="2200" dirty="0" smtClean="0"/>
+              <a:t>q-</a:t>
+            </a:r>
+            <a:r>
+              <a:rPr lang="ru-RU" sz="2200" dirty="0" smtClean="0"/>
+              <a:t>порядка по </a:t>
+            </a:r>
+            <a:r>
+              <a:rPr lang="en-US" sz="2200" dirty="0" smtClean="0"/>
+              <a:t>MA</a:t>
+            </a:r>
+            <a:endParaRPr lang="ru-RU" sz="2200" dirty="0"/>
+          </a:p>
+        </p:txBody>
+      </p:sp>
+      <p:pic>
+        <p:nvPicPr>
+          <p:cNvPr id="3076" name="Picture 4" descr="AR(1) process with $\phi_1=0.9$."/>
+          <p:cNvPicPr>
+            <a:picLocks noChangeAspect="1" noChangeArrowheads="1"/>
+          </p:cNvPicPr>
+          <p:nvPr/>
+        </p:nvPicPr>
+        <p:blipFill>
+          <a:blip r:embed="rId2">
+            <a:extLst>
+              <a:ext uri="{28A0092B-C50C-407E-A947-70E740481C1C}">
+                <a14:useLocalDpi xmlns:a14="http://schemas.microsoft.com/office/drawing/2010/main" val="0"/>
+              </a:ext>
+            </a:extLst>
+          </a:blip>
+          <a:srcRect/>
+          <a:stretch>
+            <a:fillRect/>
+          </a:stretch>
+        </p:blipFill>
+        <p:spPr bwMode="auto">
+          <a:xfrm>
+            <a:off x="156882" y="678330"/>
+            <a:ext cx="6302375" cy="4501697"/>
+          </a:xfrm>
+          <a:prstGeom prst="rect">
+            <a:avLst/>
+          </a:prstGeom>
+          <a:noFill/>
+          <a:extLst>
+            <a:ext uri="{909E8E84-426E-40DD-AFC4-6F175D3DCCD1}">
+              <a14:hiddenFill xmlns:a14="http://schemas.microsoft.com/office/drawing/2010/main">
+                <a:solidFill>
+                  <a:srgbClr val="FFFFFF"/>
+                </a:solidFill>
+              </a14:hiddenFill>
+            </a:ext>
+          </a:extLst>
+        </p:spPr>
+      </p:pic>
+      <p:sp>
+        <p:nvSpPr>
+          <p:cNvPr id="7" name="Прямоугольник 6"/>
+          <p:cNvSpPr/>
+          <p:nvPr/>
+        </p:nvSpPr>
+        <p:spPr>
+          <a:xfrm>
+            <a:off x="294341" y="6029114"/>
+            <a:ext cx="4801827" cy="369332"/>
+          </a:xfrm>
+          <a:prstGeom prst="rect">
+            <a:avLst/>
+          </a:prstGeom>
+        </p:spPr>
+        <p:txBody>
+          <a:bodyPr wrap="none">
+            <a:spAutoFit/>
+          </a:bodyPr>
+          <a:lstStyle/>
+          <a:p>
+            <a:r>
+              <a:rPr lang="ru-RU" dirty="0" smtClean="0"/>
+              <a:t>https://openforecast.org/adam/BJApproach.html</a:t>
+            </a:r>
+            <a:endParaRPr lang="ru-RU" dirty="0"/>
+          </a:p>
+        </p:txBody>
+      </p:sp>
+      <p:pic>
+        <p:nvPicPr>
+          <p:cNvPr id="3078" name="Picture 6" descr="AR(2) process with $\phi_1=0.9$ and $\phi_2=-0.4$."/>
+          <p:cNvPicPr>
+            <a:picLocks noChangeAspect="1" noChangeArrowheads="1"/>
+          </p:cNvPicPr>
+          <p:nvPr/>
+        </p:nvPicPr>
+        <p:blipFill>
+          <a:blip r:embed="rId3" cstate="print">
+            <a:extLst>
+              <a:ext uri="{28A0092B-C50C-407E-A947-70E740481C1C}">
+                <a14:useLocalDpi xmlns:a14="http://schemas.microsoft.com/office/drawing/2010/main" val="0"/>
+              </a:ext>
+            </a:extLst>
+          </a:blip>
+          <a:srcRect/>
+          <a:stretch>
+            <a:fillRect/>
+          </a:stretch>
+        </p:blipFill>
+        <p:spPr bwMode="auto">
+          <a:xfrm>
+            <a:off x="6548903" y="1047662"/>
+            <a:ext cx="5159375" cy="3685268"/>
+          </a:xfrm>
+          <a:prstGeom prst="rect">
+            <a:avLst/>
+          </a:prstGeom>
+          <a:noFill/>
+          <a:extLst>
+            <a:ext uri="{909E8E84-426E-40DD-AFC4-6F175D3DCCD1}">
+              <a14:hiddenFill xmlns:a14="http://schemas.microsoft.com/office/drawing/2010/main">
+                <a:solidFill>
+                  <a:srgbClr val="FFFFFF"/>
+                </a:solidFill>
+              </a14:hiddenFill>
+            </a:ext>
+          </a:extLst>
+        </p:spPr>
+      </p:pic>
+    </p:spTree>
+    <p:extLst>
+      <p:ext uri="{BB962C8B-B14F-4D97-AF65-F5344CB8AC3E}">
+        <p14:creationId xmlns:p14="http://schemas.microsoft.com/office/powerpoint/2010/main" val="3407481017"/>
+      </p:ext>
+    </p:extLst>
+  </p:cSld>
+  <p:clrMapOvr>
+    <a:masterClrMapping/>
+  </p:clrMapOvr>
+  <p:timing>
+    <p:tnLst>
+      <p:par>
+        <p:cTn id="1" dur="indefinite" restart="never" nodeType="tmRoot"/>
+      </p:par>
+    </p:tnLst>
+  </p:timing>
+</p:sld>
+</file>
+
+<file path=ppt/slides/slide12.xml><?xml version="1.0" encoding="utf-8"?>
+<p:sld xmlns:a="http://schemas.openxmlformats.org/drawingml/2006/main" xmlns:r="http://schemas.openxmlformats.org/officeDocument/2006/relationships" xmlns:p="http://schemas.openxmlformats.org/presentationml/2006/main">
+  <p:cSld>
+    <p:spTree>
+      <p:nvGrpSpPr>
+        <p:cNvPr id="1" name=""/>
+        <p:cNvGrpSpPr/>
+        <p:nvPr/>
+      </p:nvGrpSpPr>
+      <p:grpSpPr>
+        <a:xfrm>
+          <a:off x="0" y="0"/>
+          <a:ext cx="0" cy="0"/>
+          <a:chOff x="0" y="0"/>
+          <a:chExt cx="0" cy="0"/>
+        </a:xfrm>
+      </p:grpSpPr>
+      <p:sp>
+        <p:nvSpPr>
+          <p:cNvPr id="2" name="Заголовок 1">
+            <a:extLst>
+              <a:ext uri="{FF2B5EF4-FFF2-40B4-BE49-F238E27FC236}">
+                <a16:creationId xmlns:a16="http://schemas.microsoft.com/office/drawing/2014/main" id="{7CB29E92-B795-4F44-A577-A4EBC753A5A5}"/>
+              </a:ext>
+            </a:extLst>
+          </p:cNvPr>
+          <p:cNvSpPr>
+            <a:spLocks noGrp="1"/>
+          </p:cNvSpPr>
+          <p:nvPr>
+            <p:ph type="title"/>
+          </p:nvPr>
+        </p:nvSpPr>
+        <p:spPr>
+          <a:xfrm>
+            <a:off x="294341" y="147911"/>
+            <a:ext cx="10515600" cy="612028"/>
+          </a:xfrm>
+        </p:spPr>
+        <p:txBody>
+          <a:bodyPr>
+            <a:normAutofit fontScale="90000"/>
+          </a:bodyPr>
+          <a:lstStyle/>
+          <a:p>
+            <a:pPr algn="l" rtl="0"/>
+            <a:r>
+              <a:rPr lang="en-US" b="1" dirty="0" err="1" smtClean="0"/>
+              <a:t>Выбор</a:t>
+            </a:r>
+            <a:r>
+              <a:rPr lang="en-US" b="1" dirty="0" smtClean="0"/>
+              <a:t> </a:t>
+            </a:r>
+            <a:r>
+              <a:rPr lang="ru-RU" b="1" dirty="0" smtClean="0"/>
+              <a:t>начальных значений</a:t>
+            </a:r>
+            <a:r>
+              <a:rPr lang="en-US" b="1" dirty="0" smtClean="0"/>
+              <a:t> </a:t>
+            </a:r>
+            <a:r>
+              <a:rPr lang="ru-RU" b="1" dirty="0"/>
+              <a:t>порядка</a:t>
+            </a:r>
+            <a:r>
+              <a:rPr lang="en-US" b="1" dirty="0"/>
+              <a:t> ARMA</a:t>
+            </a:r>
+            <a:endParaRPr lang="en-US" dirty="0"/>
+          </a:p>
+        </p:txBody>
+      </p:sp>
+      <p:sp>
+        <p:nvSpPr>
+          <p:cNvPr id="3" name="Объект 2">
+            <a:extLst>
+              <a:ext uri="{FF2B5EF4-FFF2-40B4-BE49-F238E27FC236}">
+                <a16:creationId xmlns:a16="http://schemas.microsoft.com/office/drawing/2014/main" id="{40ACB7F2-07F5-4100-AF8D-CFA14F65E0BA}"/>
+              </a:ext>
+            </a:extLst>
+          </p:cNvPr>
+          <p:cNvSpPr>
+            <a:spLocks noGrp="1"/>
+          </p:cNvSpPr>
+          <p:nvPr>
+            <p:ph idx="1"/>
+          </p:nvPr>
+        </p:nvSpPr>
+        <p:spPr>
+          <a:xfrm>
+            <a:off x="246528" y="678330"/>
+            <a:ext cx="11932241" cy="5853952"/>
+          </a:xfrm>
+        </p:spPr>
+        <p:txBody>
+          <a:bodyPr>
+            <a:normAutofit/>
+          </a:bodyPr>
+          <a:lstStyle/>
+          <a:p>
+            <a:pPr algn="l" rtl="0"/>
+            <a:endParaRPr lang="en-US" sz="2400" dirty="0"/>
+          </a:p>
+        </p:txBody>
+      </p:sp>
+      <p:sp>
+        <p:nvSpPr>
+          <p:cNvPr id="5" name="Прямоугольник 4"/>
+          <p:cNvSpPr/>
+          <p:nvPr/>
+        </p:nvSpPr>
+        <p:spPr>
+          <a:xfrm>
+            <a:off x="156882" y="6316837"/>
+            <a:ext cx="11932241" cy="430887"/>
+          </a:xfrm>
+          <a:prstGeom prst="rect">
+            <a:avLst/>
+          </a:prstGeom>
+        </p:spPr>
+        <p:txBody>
+          <a:bodyPr wrap="none">
+            <a:spAutoFit/>
+          </a:bodyPr>
+          <a:lstStyle/>
+          <a:p>
+            <a:r>
+              <a:rPr lang="ru-RU" sz="2200" dirty="0" smtClean="0"/>
+              <a:t>Модели записываются в виде </a:t>
+            </a:r>
+            <a:r>
+              <a:rPr lang="en-US" sz="2200" dirty="0" smtClean="0"/>
+              <a:t>ARMA(</a:t>
+            </a:r>
+            <a:r>
+              <a:rPr lang="en-US" sz="2200" dirty="0" err="1" smtClean="0"/>
+              <a:t>p,q</a:t>
+            </a:r>
+            <a:r>
+              <a:rPr lang="en-US" sz="2200" dirty="0" smtClean="0"/>
+              <a:t>)</a:t>
+            </a:r>
+            <a:r>
+              <a:rPr lang="ru-RU" sz="2200" dirty="0" smtClean="0"/>
+              <a:t> – что значит модель </a:t>
+            </a:r>
+            <a:r>
+              <a:rPr lang="en-US" sz="2200" dirty="0" smtClean="0"/>
+              <a:t>p-</a:t>
+            </a:r>
+            <a:r>
+              <a:rPr lang="ru-RU" sz="2200" dirty="0" smtClean="0"/>
+              <a:t>порядка по </a:t>
+            </a:r>
+            <a:r>
+              <a:rPr lang="en-US" sz="2200" dirty="0" smtClean="0"/>
+              <a:t>AR </a:t>
+            </a:r>
+            <a:r>
+              <a:rPr lang="ru-RU" sz="2200" dirty="0" smtClean="0"/>
+              <a:t>и </a:t>
+            </a:r>
+            <a:r>
+              <a:rPr lang="en-US" sz="2200" dirty="0" smtClean="0"/>
+              <a:t>q-</a:t>
+            </a:r>
+            <a:r>
+              <a:rPr lang="ru-RU" sz="2200" dirty="0" smtClean="0"/>
+              <a:t>порядка по </a:t>
+            </a:r>
+            <a:r>
+              <a:rPr lang="en-US" sz="2200" dirty="0" smtClean="0"/>
+              <a:t>MA</a:t>
+            </a:r>
+            <a:endParaRPr lang="ru-RU" sz="2200" dirty="0"/>
+          </a:p>
+        </p:txBody>
+      </p:sp>
+      <p:sp>
+        <p:nvSpPr>
+          <p:cNvPr id="7" name="Прямоугольник 6"/>
+          <p:cNvSpPr/>
+          <p:nvPr/>
+        </p:nvSpPr>
+        <p:spPr>
+          <a:xfrm>
+            <a:off x="294341" y="6029114"/>
+            <a:ext cx="4801827" cy="369332"/>
+          </a:xfrm>
+          <a:prstGeom prst="rect">
+            <a:avLst/>
+          </a:prstGeom>
+        </p:spPr>
+        <p:txBody>
+          <a:bodyPr wrap="none">
+            <a:spAutoFit/>
+          </a:bodyPr>
+          <a:lstStyle/>
+          <a:p>
+            <a:r>
+              <a:rPr lang="ru-RU" dirty="0" smtClean="0"/>
+              <a:t>https://openforecast.org/adam/BJApproach.html</a:t>
+            </a:r>
+            <a:endParaRPr lang="ru-RU" dirty="0"/>
+          </a:p>
+        </p:txBody>
+      </p:sp>
+      <p:pic>
+        <p:nvPicPr>
+          <p:cNvPr id="6146" name="Picture 2" descr="MA(2) process with $\theta_1=-0.9$ and $\theta_2=0.8$."/>
+          <p:cNvPicPr>
+            <a:picLocks noChangeAspect="1" noChangeArrowheads="1"/>
+          </p:cNvPicPr>
+          <p:nvPr/>
+        </p:nvPicPr>
+        <p:blipFill>
+          <a:blip r:embed="rId2" cstate="print">
+            <a:extLst>
+              <a:ext uri="{28A0092B-C50C-407E-A947-70E740481C1C}">
+                <a14:useLocalDpi xmlns:a14="http://schemas.microsoft.com/office/drawing/2010/main" val="0"/>
+              </a:ext>
+            </a:extLst>
+          </a:blip>
+          <a:srcRect/>
+          <a:stretch>
+            <a:fillRect/>
+          </a:stretch>
+        </p:blipFill>
+        <p:spPr bwMode="auto">
+          <a:xfrm>
+            <a:off x="246528" y="1069222"/>
+            <a:ext cx="5438775" cy="3884840"/>
+          </a:xfrm>
+          <a:prstGeom prst="rect">
+            <a:avLst/>
+          </a:prstGeom>
+          <a:noFill/>
+          <a:extLst>
+            <a:ext uri="{909E8E84-426E-40DD-AFC4-6F175D3DCCD1}">
+              <a14:hiddenFill xmlns:a14="http://schemas.microsoft.com/office/drawing/2010/main">
+                <a:solidFill>
+                  <a:srgbClr val="FFFFFF"/>
+                </a:solidFill>
+              </a14:hiddenFill>
+            </a:ext>
+          </a:extLst>
+        </p:spPr>
+      </p:pic>
+      <p:pic>
+        <p:nvPicPr>
+          <p:cNvPr id="6148" name="Picture 4" descr="ARMA(2,2) process with $\phi_1=0.9, \phi_2=-0.4$, $\theta_1=-0.9$ and $\theta_2=0.8$."/>
+          <p:cNvPicPr>
+            <a:picLocks noChangeAspect="1" noChangeArrowheads="1"/>
+          </p:cNvPicPr>
+          <p:nvPr/>
+        </p:nvPicPr>
+        <p:blipFill>
+          <a:blip r:embed="rId3">
+            <a:extLst>
+              <a:ext uri="{28A0092B-C50C-407E-A947-70E740481C1C}">
+                <a14:useLocalDpi xmlns:a14="http://schemas.microsoft.com/office/drawing/2010/main" val="0"/>
+              </a:ext>
+            </a:extLst>
+          </a:blip>
+          <a:srcRect/>
+          <a:stretch>
+            <a:fillRect/>
+          </a:stretch>
+        </p:blipFill>
+        <p:spPr bwMode="auto">
+          <a:xfrm>
+            <a:off x="5878820" y="1069222"/>
+            <a:ext cx="6106432" cy="4361738"/>
+          </a:xfrm>
+          <a:prstGeom prst="rect">
+            <a:avLst/>
+          </a:prstGeom>
+          <a:noFill/>
+          <a:extLst>
+            <a:ext uri="{909E8E84-426E-40DD-AFC4-6F175D3DCCD1}">
+              <a14:hiddenFill xmlns:a14="http://schemas.microsoft.com/office/drawing/2010/main">
+                <a:solidFill>
+                  <a:srgbClr val="FFFFFF"/>
+                </a:solidFill>
+              </a14:hiddenFill>
+            </a:ext>
+          </a:extLst>
+        </p:spPr>
+      </p:pic>
+    </p:spTree>
+    <p:extLst>
+      <p:ext uri="{BB962C8B-B14F-4D97-AF65-F5344CB8AC3E}">
+        <p14:creationId xmlns:p14="http://schemas.microsoft.com/office/powerpoint/2010/main" val="367061683"/>
+      </p:ext>
+    </p:extLst>
+  </p:cSld>
+  <p:clrMapOvr>
+    <a:masterClrMapping/>
+  </p:clrMapOvr>
+  <p:timing>
+    <p:tnLst>
+      <p:par>
+        <p:cTn id="1" dur="indefinite" restart="never" nodeType="tmRoot"/>
+      </p:par>
+    </p:tnLst>
+  </p:timing>
+</p:sld>
+</file>
+
+<file path=ppt/slides/slide13.xml><?xml version="1.0" encoding="utf-8"?>
+<p:sld xmlns:a="http://schemas.openxmlformats.org/drawingml/2006/main" xmlns:r="http://schemas.openxmlformats.org/officeDocument/2006/relationships" xmlns:p="http://schemas.openxmlformats.org/presentationml/2006/main">
+  <p:cSld>
+    <p:spTree>
+      <p:nvGrpSpPr>
+        <p:cNvPr id="1" name=""/>
+        <p:cNvGrpSpPr/>
+        <p:nvPr/>
+      </p:nvGrpSpPr>
+      <p:grpSpPr>
+        <a:xfrm>
+          <a:off x="0" y="0"/>
+          <a:ext cx="0" cy="0"/>
+          <a:chOff x="0" y="0"/>
+          <a:chExt cx="0" cy="0"/>
+        </a:xfrm>
+      </p:grpSpPr>
+      <p:sp>
+        <p:nvSpPr>
+          <p:cNvPr id="2" name="Заголовок 1"/>
+          <p:cNvSpPr>
+            <a:spLocks noGrp="1"/>
+          </p:cNvSpPr>
+          <p:nvPr>
+            <p:ph type="title"/>
+          </p:nvPr>
+        </p:nvSpPr>
+        <p:spPr/>
+        <p:txBody>
+          <a:bodyPr/>
+          <a:lstStyle/>
+          <a:p>
+            <a:r>
+              <a:rPr lang="ru-RU" dirty="0"/>
+              <a:t>Пример ряда </a:t>
+            </a:r>
+            <a:r>
+              <a:rPr lang="en-US" dirty="0"/>
+              <a:t>ARMA(1,2)</a:t>
+            </a:r>
+            <a:endParaRPr lang="ru-RU" dirty="0"/>
+          </a:p>
+        </p:txBody>
+      </p:sp>
+      <p:sp>
+        <p:nvSpPr>
+          <p:cNvPr id="3" name="Объект 2"/>
+          <p:cNvSpPr>
+            <a:spLocks noGrp="1"/>
+          </p:cNvSpPr>
+          <p:nvPr>
+            <p:ph idx="1"/>
+          </p:nvPr>
+        </p:nvSpPr>
+        <p:spPr/>
+        <p:txBody>
+          <a:bodyPr/>
+          <a:lstStyle/>
+          <a:p>
+            <a:endParaRPr lang="ru-RU" dirty="0"/>
+          </a:p>
+        </p:txBody>
+      </p:sp>
+      <p:pic>
+        <p:nvPicPr>
+          <p:cNvPr id="1026" name="Picture 2" descr="graph"/>
+          <p:cNvPicPr>
+            <a:picLocks noChangeAspect="1" noChangeArrowheads="1"/>
+          </p:cNvPicPr>
+          <p:nvPr/>
+        </p:nvPicPr>
+        <p:blipFill>
+          <a:blip r:embed="rId2">
+            <a:extLst>
+              <a:ext uri="{28A0092B-C50C-407E-A947-70E740481C1C}">
+                <a14:useLocalDpi xmlns:a14="http://schemas.microsoft.com/office/drawing/2010/main" val="0"/>
+              </a:ext>
+            </a:extLst>
+          </a:blip>
+          <a:srcRect/>
+          <a:stretch>
+            <a:fillRect/>
+          </a:stretch>
+        </p:blipFill>
+        <p:spPr bwMode="auto">
+          <a:xfrm>
+            <a:off x="556098" y="1593135"/>
+            <a:ext cx="5640421" cy="5127657"/>
+          </a:xfrm>
+          <a:prstGeom prst="rect">
+            <a:avLst/>
+          </a:prstGeom>
+          <a:noFill/>
+          <a:extLst>
+            <a:ext uri="{909E8E84-426E-40DD-AFC4-6F175D3DCCD1}">
+              <a14:hiddenFill xmlns:a14="http://schemas.microsoft.com/office/drawing/2010/main">
+                <a:solidFill>
+                  <a:srgbClr val="FFFFFF"/>
+                </a:solidFill>
+              </a14:hiddenFill>
+            </a:ext>
+          </a:extLst>
+        </p:spPr>
+      </p:pic>
+      <p:pic>
+        <p:nvPicPr>
+          <p:cNvPr id="1028" name="Picture 4" descr="graph"/>
+          <p:cNvPicPr>
+            <a:picLocks noChangeAspect="1" noChangeArrowheads="1"/>
+          </p:cNvPicPr>
+          <p:nvPr/>
+        </p:nvPicPr>
+        <p:blipFill>
+          <a:blip r:embed="rId3">
+            <a:extLst>
+              <a:ext uri="{28A0092B-C50C-407E-A947-70E740481C1C}">
+                <a14:useLocalDpi xmlns:a14="http://schemas.microsoft.com/office/drawing/2010/main" val="0"/>
+              </a:ext>
+            </a:extLst>
+          </a:blip>
+          <a:srcRect/>
+          <a:stretch>
+            <a:fillRect/>
+          </a:stretch>
+        </p:blipFill>
+        <p:spPr bwMode="auto">
+          <a:xfrm>
+            <a:off x="6334580" y="1439694"/>
+            <a:ext cx="5301322" cy="5176421"/>
+          </a:xfrm>
+          <a:prstGeom prst="rect">
+            <a:avLst/>
+          </a:prstGeom>
+          <a:noFill/>
+          <a:extLst>
+            <a:ext uri="{909E8E84-426E-40DD-AFC4-6F175D3DCCD1}">
+              <a14:hiddenFill xmlns:a14="http://schemas.microsoft.com/office/drawing/2010/main">
+                <a:solidFill>
+                  <a:srgbClr val="FFFFFF"/>
+                </a:solidFill>
+              </a14:hiddenFill>
+            </a:ext>
+          </a:extLst>
+        </p:spPr>
+      </p:pic>
+    </p:spTree>
+    <p:extLst>
+      <p:ext uri="{BB962C8B-B14F-4D97-AF65-F5344CB8AC3E}">
+        <p14:creationId xmlns:p14="http://schemas.microsoft.com/office/powerpoint/2010/main" val="1094946367"/>
+      </p:ext>
+    </p:extLst>
+  </p:cSld>
+  <p:clrMapOvr>
+    <a:masterClrMapping/>
+  </p:clrMapOvr>
+  <p:timing>
+    <p:tnLst>
+      <p:par>
+        <p:cTn id="1" dur="indefinite" restart="never" nodeType="tmRoot"/>
+      </p:par>
+    </p:tnLst>
+  </p:timing>
+</p:sld>
+</file>
+
+<file path=ppt/slides/slide14.xml><?xml version="1.0" encoding="utf-8"?>
+<p:sld xmlns:a="http://schemas.openxmlformats.org/drawingml/2006/main" xmlns:r="http://schemas.openxmlformats.org/officeDocument/2006/relationships" xmlns:p="http://schemas.openxmlformats.org/presentationml/2006/main">
+  <p:cSld>
+    <p:spTree>
+      <p:nvGrpSpPr>
+        <p:cNvPr id="1" name=""/>
+        <p:cNvGrpSpPr/>
+        <p:nvPr/>
+      </p:nvGrpSpPr>
+      <p:grpSpPr>
+        <a:xfrm>
+          <a:off x="0" y="0"/>
+          <a:ext cx="0" cy="0"/>
+          <a:chOff x="0" y="0"/>
+          <a:chExt cx="0" cy="0"/>
+        </a:xfrm>
+      </p:grpSpPr>
+      <p:sp>
+        <p:nvSpPr>
+          <p:cNvPr id="2" name="Заголовок 1">
+            <a:extLst>
+              <a:ext uri="{FF2B5EF4-FFF2-40B4-BE49-F238E27FC236}">
+                <a16:creationId xmlns:a16="http://schemas.microsoft.com/office/drawing/2014/main" id="{7CB29E92-B795-4F44-A577-A4EBC753A5A5}"/>
+              </a:ext>
+            </a:extLst>
+          </p:cNvPr>
+          <p:cNvSpPr>
+            <a:spLocks noGrp="1"/>
+          </p:cNvSpPr>
+          <p:nvPr>
+            <p:ph type="title"/>
+          </p:nvPr>
+        </p:nvSpPr>
+        <p:spPr>
+          <a:xfrm>
+            <a:off x="838200" y="365126"/>
+            <a:ext cx="10515600" cy="612028"/>
+          </a:xfrm>
+        </p:spPr>
+        <p:txBody>
+          <a:bodyPr>
+            <a:normAutofit fontScale="90000"/>
+          </a:bodyPr>
+          <a:lstStyle/>
+          <a:p>
+            <a:r>
+              <a:rPr lang="ru-RU" b="1" dirty="0" err="1"/>
+              <a:t>Дообучение</a:t>
+            </a:r>
+            <a:r>
+              <a:rPr lang="ru-RU" b="1" dirty="0"/>
+              <a:t> </a:t>
+            </a:r>
+            <a:r>
+              <a:rPr lang="en-US" b="1" dirty="0"/>
+              <a:t>ARMA </a:t>
+            </a:r>
+            <a:r>
+              <a:rPr lang="ru-RU" b="1" dirty="0"/>
+              <a:t>коэффициентов</a:t>
+            </a:r>
+            <a:endParaRPr lang="en-US" dirty="0"/>
+          </a:p>
+        </p:txBody>
+      </p:sp>
+      <mc:AlternateContent xmlns:mc="http://schemas.openxmlformats.org/markup-compatibility/2006">
+        <mc:Choice xmlns:a14="http://schemas.microsoft.com/office/drawing/2010/main" Requires="a14">
+          <p:sp>
+            <p:nvSpPr>
+              <p:cNvPr id="3" name="Объект 2">
+                <a:extLst>
+                  <a:ext uri="{FF2B5EF4-FFF2-40B4-BE49-F238E27FC236}">
+                    <a16:creationId xmlns:a16="http://schemas.microsoft.com/office/drawing/2014/main" id="{40ACB7F2-07F5-4100-AF8D-CFA14F65E0BA}"/>
+                  </a:ext>
+                </a:extLst>
+              </p:cNvPr>
+              <p:cNvSpPr>
+                <a:spLocks noGrp="1"/>
+              </p:cNvSpPr>
+              <p:nvPr>
+                <p:ph idx="1"/>
+              </p:nvPr>
+            </p:nvSpPr>
+            <p:spPr>
+              <a:xfrm>
+                <a:off x="246528" y="905436"/>
+                <a:ext cx="11564472" cy="5876364"/>
+              </a:xfrm>
+            </p:spPr>
+            <p:txBody>
+              <a:bodyPr>
+                <a:normAutofit/>
+              </a:bodyPr>
+              <a:lstStyle/>
+              <a:p>
+                <a:r>
+                  <a:rPr lang="ru-RU" sz="2200" dirty="0"/>
+                  <a:t>После изначального выбора </a:t>
+                </a:r>
+                <a:r>
+                  <a:rPr lang="en-US" sz="2200" dirty="0"/>
+                  <a:t>ARAM </a:t>
+                </a:r>
+                <a:r>
+                  <a:rPr lang="ru-RU" sz="2200" dirty="0"/>
+                  <a:t>коэффициентов следует </a:t>
+                </a:r>
+                <a:r>
+                  <a:rPr lang="ru-RU" sz="2200" dirty="0" err="1"/>
+                  <a:t>дообучить</a:t>
+                </a:r>
+                <a:r>
+                  <a:rPr lang="ru-RU" sz="2200" dirty="0"/>
+                  <a:t> модель</a:t>
+                </a:r>
+                <a:r>
+                  <a:rPr lang="en-US" sz="2200" dirty="0"/>
+                  <a:t> </a:t>
+                </a:r>
+                <a:r>
+                  <a:rPr lang="ru-RU" sz="2200" dirty="0"/>
+                  <a:t>(т.е. взять несколько моделей и сравнить их).</a:t>
+                </a:r>
+              </a:p>
+              <a:p>
+                <a:r>
+                  <a:rPr lang="ru-RU" sz="2200" dirty="0" smtClean="0"/>
+                  <a:t>Для сравнения моделей на тренировочной выборке часто используют информационный критерий</a:t>
+                </a:r>
+                <a:endParaRPr lang="en-US" sz="2200" dirty="0"/>
+              </a:p>
+              <a:p>
+                <a:pPr marL="0" indent="0" algn="ctr">
+                  <a:buNone/>
+                </a:pPr>
+                <a14:m>
+                  <m:oMath xmlns:m="http://schemas.openxmlformats.org/officeDocument/2006/math">
+                    <m:r>
+                      <a:rPr lang="en-US" sz="2200" i="1">
+                        <a:latin typeface="Cambria Math" panose="02040503050406030204" pitchFamily="18" charset="0"/>
+                      </a:rPr>
+                      <m:t>𝐴𝐼𝐶</m:t>
+                    </m:r>
+                    <m:r>
+                      <a:rPr lang="en-US" sz="2200" i="1">
+                        <a:latin typeface="Cambria Math" panose="02040503050406030204" pitchFamily="18" charset="0"/>
+                      </a:rPr>
+                      <m:t>(</m:t>
+                    </m:r>
+                    <m:r>
+                      <a:rPr lang="en-US" sz="2200" i="1">
+                        <a:latin typeface="Cambria Math" panose="02040503050406030204" pitchFamily="18" charset="0"/>
+                      </a:rPr>
+                      <m:t>𝑘</m:t>
+                    </m:r>
+                    <m:r>
+                      <a:rPr lang="en-US" sz="2200" i="1">
+                        <a:latin typeface="Cambria Math" panose="02040503050406030204" pitchFamily="18" charset="0"/>
+                      </a:rPr>
+                      <m:t>)=</m:t>
+                    </m:r>
+                    <m:r>
+                      <a:rPr lang="en-US" sz="2200" i="1">
+                        <a:latin typeface="Cambria Math" panose="02040503050406030204" pitchFamily="18" charset="0"/>
+                      </a:rPr>
+                      <m:t>𝑙𝑛</m:t>
+                    </m:r>
+                    <m:sSup>
+                      <m:sSupPr>
+                        <m:ctrlPr>
+                          <a:rPr lang="en-US" sz="2200" i="1">
+                            <a:latin typeface="Cambria Math" panose="02040503050406030204" pitchFamily="18" charset="0"/>
+                          </a:rPr>
+                        </m:ctrlPr>
+                      </m:sSupPr>
+                      <m:e>
+                        <m:acc>
+                          <m:accPr>
+                            <m:chr m:val="̂"/>
+                            <m:ctrlPr>
+                              <a:rPr lang="en-US" sz="2200" i="1">
+                                <a:latin typeface="Cambria Math" panose="02040503050406030204" pitchFamily="18" charset="0"/>
+                              </a:rPr>
+                            </m:ctrlPr>
+                          </m:accPr>
+                          <m:e>
+                            <m:r>
+                              <a:rPr lang="en-US" sz="2200" i="1">
+                                <a:latin typeface="Cambria Math" panose="02040503050406030204" pitchFamily="18" charset="0"/>
+                              </a:rPr>
+                              <m:t>𝜎</m:t>
+                            </m:r>
+                          </m:e>
+                        </m:acc>
+                      </m:e>
+                      <m:sup>
+                        <m:r>
+                          <a:rPr lang="en-US" sz="2200" i="1">
+                            <a:latin typeface="Cambria Math" panose="02040503050406030204" pitchFamily="18" charset="0"/>
+                          </a:rPr>
+                          <m:t>2</m:t>
+                        </m:r>
+                      </m:sup>
+                    </m:sSup>
+                    <m:r>
+                      <a:rPr lang="en-US" sz="2200" i="1">
+                        <a:latin typeface="Cambria Math" panose="02040503050406030204" pitchFamily="18" charset="0"/>
+                      </a:rPr>
+                      <m:t>+2</m:t>
+                    </m:r>
+                    <m:f>
+                      <m:fPr>
+                        <m:ctrlPr>
+                          <a:rPr lang="en-US" sz="2200" i="1">
+                            <a:latin typeface="Cambria Math" panose="02040503050406030204" pitchFamily="18" charset="0"/>
+                          </a:rPr>
+                        </m:ctrlPr>
+                      </m:fPr>
+                      <m:num>
+                        <m:r>
+                          <a:rPr lang="en-US" sz="2200" i="1">
+                            <a:latin typeface="Cambria Math" panose="02040503050406030204" pitchFamily="18" charset="0"/>
+                          </a:rPr>
+                          <m:t>𝑘</m:t>
+                        </m:r>
+                      </m:num>
+                      <m:den>
+                        <m:r>
+                          <a:rPr lang="en-US" sz="2200" i="1">
+                            <a:latin typeface="Cambria Math" panose="02040503050406030204" pitchFamily="18" charset="0"/>
+                          </a:rPr>
+                          <m:t>𝑁</m:t>
+                        </m:r>
+                      </m:den>
+                    </m:f>
+                    <m:r>
+                      <a:rPr lang="en-US" sz="2200" i="1">
+                        <a:latin typeface="Cambria Math" panose="02040503050406030204" pitchFamily="18" charset="0"/>
+                      </a:rPr>
+                      <m:t>;</m:t>
+                    </m:r>
+                  </m:oMath>
+                </a14:m>
+                <a:r>
+                  <a:rPr lang="en-US" sz="2200" dirty="0"/>
+                  <a:t> </a:t>
+                </a:r>
+                <a:r>
+                  <a:rPr lang="ru-RU" sz="2200" dirty="0"/>
+                  <a:t>Информационный критерий </a:t>
+                </a:r>
+                <a:r>
+                  <a:rPr lang="ru-RU" sz="2200" dirty="0" err="1"/>
+                  <a:t>Акайке</a:t>
+                </a:r>
+                <a:endParaRPr lang="en-US" sz="2200" dirty="0"/>
+              </a:p>
+              <a:p>
+                <a:r>
+                  <a:rPr lang="ru-RU" sz="2200" dirty="0"/>
+                  <a:t>где</a:t>
+                </a:r>
+                <a:r>
+                  <a:rPr lang="en-US" sz="2200" dirty="0"/>
+                  <a:t> </a:t>
+                </a:r>
+              </a:p>
+              <a:p>
+                <a14:m>
+                  <m:oMath xmlns:m="http://schemas.openxmlformats.org/officeDocument/2006/math">
+                    <m:sSup>
+                      <m:sSupPr>
+                        <m:ctrlPr>
+                          <a:rPr lang="en-US" sz="2200" i="1">
+                            <a:latin typeface="Cambria Math" panose="02040503050406030204" pitchFamily="18" charset="0"/>
+                          </a:rPr>
+                        </m:ctrlPr>
+                      </m:sSupPr>
+                      <m:e>
+                        <m:acc>
+                          <m:accPr>
+                            <m:chr m:val="̂"/>
+                            <m:ctrlPr>
+                              <a:rPr lang="en-US" sz="2200" i="1">
+                                <a:latin typeface="Cambria Math" panose="02040503050406030204" pitchFamily="18" charset="0"/>
+                              </a:rPr>
+                            </m:ctrlPr>
+                          </m:accPr>
+                          <m:e>
+                            <m:r>
+                              <a:rPr lang="en-US" sz="2200" i="1">
+                                <a:latin typeface="Cambria Math" panose="02040503050406030204" pitchFamily="18" charset="0"/>
+                              </a:rPr>
+                              <m:t>𝜎</m:t>
+                            </m:r>
+                          </m:e>
+                        </m:acc>
+                      </m:e>
+                      <m:sup>
+                        <m:r>
+                          <a:rPr lang="en-US" sz="2200" i="1">
+                            <a:latin typeface="Cambria Math" panose="02040503050406030204" pitchFamily="18" charset="0"/>
+                          </a:rPr>
+                          <m:t>2</m:t>
+                        </m:r>
+                      </m:sup>
+                    </m:sSup>
+                    <m:r>
+                      <a:rPr lang="en-US" sz="2200" i="1">
+                        <a:latin typeface="Cambria Math" panose="02040503050406030204" pitchFamily="18" charset="0"/>
+                      </a:rPr>
+                      <m:t>=</m:t>
+                    </m:r>
+                    <m:f>
+                      <m:fPr>
+                        <m:ctrlPr>
+                          <a:rPr lang="en-US" sz="2200" i="1">
+                            <a:latin typeface="Cambria Math" panose="02040503050406030204" pitchFamily="18" charset="0"/>
+                          </a:rPr>
+                        </m:ctrlPr>
+                      </m:fPr>
+                      <m:num>
+                        <m:r>
+                          <a:rPr lang="en-US" sz="2200" i="1">
+                            <a:latin typeface="Cambria Math" panose="02040503050406030204" pitchFamily="18" charset="0"/>
+                          </a:rPr>
+                          <m:t>𝑅𝑆𝑆</m:t>
+                        </m:r>
+                      </m:num>
+                      <m:den>
+                        <m:d>
+                          <m:dPr>
+                            <m:ctrlPr>
+                              <a:rPr lang="en-US" sz="2200" i="1">
+                                <a:latin typeface="Cambria Math" panose="02040503050406030204" pitchFamily="18" charset="0"/>
+                              </a:rPr>
+                            </m:ctrlPr>
+                          </m:dPr>
+                          <m:e>
+                            <m:r>
+                              <a:rPr lang="en-US" sz="2200" i="1">
+                                <a:latin typeface="Cambria Math" panose="02040503050406030204" pitchFamily="18" charset="0"/>
+                              </a:rPr>
+                              <m:t>𝑁</m:t>
+                            </m:r>
+                            <m:r>
+                              <a:rPr lang="en-US" sz="2200" i="1">
+                                <a:latin typeface="Cambria Math" panose="02040503050406030204" pitchFamily="18" charset="0"/>
+                              </a:rPr>
+                              <m:t>−</m:t>
+                            </m:r>
+                            <m:r>
+                              <a:rPr lang="en-US" sz="2200" i="1">
+                                <a:latin typeface="Cambria Math" panose="02040503050406030204" pitchFamily="18" charset="0"/>
+                              </a:rPr>
+                              <m:t>𝑘</m:t>
+                            </m:r>
+                          </m:e>
+                        </m:d>
+                      </m:den>
+                    </m:f>
+                  </m:oMath>
+                </a14:m>
+                <a:r>
+                  <a:rPr lang="en-US" sz="2200" dirty="0"/>
+                  <a:t>  </a:t>
+                </a:r>
+                <a:r>
+                  <a:rPr lang="ru-RU" sz="2200" dirty="0"/>
+                  <a:t>оценка правдоподобия модели</a:t>
+                </a:r>
+                <a:r>
+                  <a:rPr lang="en-US" sz="2200" dirty="0"/>
+                  <a:t>; </a:t>
+                </a:r>
+                <a:endParaRPr lang="ru-RU" sz="2200" dirty="0"/>
+              </a:p>
+              <a:p>
+                <a:pPr lvl="1"/>
+                <a:r>
+                  <a:rPr lang="ru-RU" sz="2200" dirty="0"/>
+                  <a:t>На самом деле формула справедлива только если остаток – белый шум</a:t>
+                </a:r>
+                <a:r>
+                  <a:rPr lang="en-US" sz="2200" dirty="0"/>
+                  <a:t>, </a:t>
+                </a:r>
+                <a:endParaRPr lang="ru-RU" sz="2200" dirty="0"/>
+              </a:p>
+              <a:p>
+                <a:pPr lvl="1"/>
+                <a:r>
+                  <a:rPr lang="ru-RU" sz="2200" i="1" dirty="0"/>
+                  <a:t>Для других случаев </a:t>
+                </a:r>
+                <a:r>
+                  <a:rPr lang="ru-RU" sz="2200" i="1" dirty="0" err="1"/>
+                  <a:t>формуы</a:t>
+                </a:r>
+                <a:r>
+                  <a:rPr lang="ru-RU" sz="2200" i="1" dirty="0"/>
+                  <a:t> будут иметь другой вид!</a:t>
+                </a:r>
+              </a:p>
+              <a:p>
+                <a:pPr lvl="2"/>
+                <a:r>
+                  <a:rPr lang="ru-RU" sz="2200" i="1" dirty="0"/>
+                  <a:t>Общий вид: </a:t>
+                </a:r>
+                <a14:m>
+                  <m:oMath xmlns:m="http://schemas.openxmlformats.org/officeDocument/2006/math">
+                    <m:r>
+                      <a:rPr lang="en-US" sz="2200" i="1" dirty="0" smtClean="0">
+                        <a:latin typeface="Cambria Math" panose="02040503050406030204" pitchFamily="18" charset="0"/>
+                      </a:rPr>
+                      <m:t>𝐴𝐼𝐶</m:t>
+                    </m:r>
+                    <m:r>
+                      <a:rPr lang="en-US" sz="2200" i="1" dirty="0" smtClean="0">
+                        <a:latin typeface="Cambria Math" panose="02040503050406030204" pitchFamily="18" charset="0"/>
+                      </a:rPr>
+                      <m:t>(</m:t>
+                    </m:r>
+                    <m:r>
+                      <a:rPr lang="en-US" sz="2200" i="1" dirty="0" smtClean="0">
+                        <a:latin typeface="Cambria Math" panose="02040503050406030204" pitchFamily="18" charset="0"/>
+                      </a:rPr>
+                      <m:t>𝑘</m:t>
+                    </m:r>
+                    <m:r>
+                      <a:rPr lang="en-US" sz="2200" i="1" dirty="0" smtClean="0">
+                        <a:latin typeface="Cambria Math" panose="02040503050406030204" pitchFamily="18" charset="0"/>
+                      </a:rPr>
+                      <m:t>) = 2</m:t>
+                    </m:r>
+                    <m:r>
+                      <a:rPr lang="en-US" sz="2200" i="1" dirty="0" smtClean="0">
+                        <a:latin typeface="Cambria Math" panose="02040503050406030204" pitchFamily="18" charset="0"/>
+                      </a:rPr>
+                      <m:t>𝑘</m:t>
+                    </m:r>
+                    <m:r>
+                      <a:rPr lang="en-US" sz="2200" i="1" dirty="0" smtClean="0">
+                        <a:latin typeface="Cambria Math" panose="02040503050406030204" pitchFamily="18" charset="0"/>
+                      </a:rPr>
+                      <m:t>/</m:t>
+                    </m:r>
+                    <m:r>
+                      <a:rPr lang="en-US" sz="2200" i="1" dirty="0" smtClean="0">
+                        <a:latin typeface="Cambria Math" panose="02040503050406030204" pitchFamily="18" charset="0"/>
+                      </a:rPr>
+                      <m:t>𝑁</m:t>
+                    </m:r>
+                    <m:r>
+                      <a:rPr lang="en-US" sz="2200" i="1" dirty="0" smtClean="0">
+                        <a:latin typeface="Cambria Math" panose="02040503050406030204" pitchFamily="18" charset="0"/>
+                      </a:rPr>
+                      <m:t> – 2</m:t>
+                    </m:r>
+                    <m:r>
+                      <a:rPr lang="en-US" sz="2200" i="1" dirty="0" smtClean="0">
+                        <a:latin typeface="Cambria Math" panose="02040503050406030204" pitchFamily="18" charset="0"/>
+                      </a:rPr>
+                      <m:t>𝑙</m:t>
+                    </m:r>
+                    <m:r>
+                      <a:rPr lang="en-US" sz="2200" i="1" dirty="0" smtClean="0">
+                        <a:latin typeface="Cambria Math" panose="02040503050406030204" pitchFamily="18" charset="0"/>
+                      </a:rPr>
+                      <m:t>/</m:t>
+                    </m:r>
+                    <m:r>
+                      <a:rPr lang="en-US" sz="2200" i="1" dirty="0" smtClean="0">
+                        <a:latin typeface="Cambria Math" panose="02040503050406030204" pitchFamily="18" charset="0"/>
+                      </a:rPr>
+                      <m:t>𝑁</m:t>
+                    </m:r>
+                  </m:oMath>
+                </a14:m>
+                <a:r>
+                  <a:rPr lang="en-US" sz="2200" i="1" dirty="0"/>
+                  <a:t>, </a:t>
+                </a:r>
+                <a:r>
+                  <a:rPr lang="ru-RU" sz="2200" i="1" dirty="0"/>
+                  <a:t>где </a:t>
+                </a:r>
+                <a14:m>
+                  <m:oMath xmlns:m="http://schemas.openxmlformats.org/officeDocument/2006/math">
+                    <m:r>
+                      <a:rPr lang="en-US" sz="2200" i="1" dirty="0" smtClean="0">
+                        <a:latin typeface="Cambria Math" panose="02040503050406030204" pitchFamily="18" charset="0"/>
+                      </a:rPr>
+                      <m:t>𝑙</m:t>
+                    </m:r>
+                    <m:r>
+                      <a:rPr lang="en-US" sz="2200" b="0" i="1" dirty="0" smtClean="0">
+                        <a:latin typeface="Cambria Math" panose="02040503050406030204" pitchFamily="18" charset="0"/>
+                      </a:rPr>
+                      <m:t> −</m:t>
+                    </m:r>
+                  </m:oMath>
+                </a14:m>
+                <a:r>
+                  <a:rPr lang="ru-RU" sz="2200" b="0" i="0" dirty="0"/>
+                  <a:t>логогфим функции правдоподобия.</a:t>
+                </a:r>
+                <a:endParaRPr lang="ru-RU" sz="2200" i="1" dirty="0"/>
+              </a:p>
+              <a:p>
+                <a:pPr lvl="1"/>
+                <a14:m>
+                  <m:oMath xmlns:m="http://schemas.openxmlformats.org/officeDocument/2006/math">
+                    <m:r>
+                      <a:rPr lang="en-US" sz="2200" i="1">
+                        <a:latin typeface="Cambria Math" panose="02040503050406030204" pitchFamily="18" charset="0"/>
+                      </a:rPr>
+                      <m:t>𝑅𝑆𝑆</m:t>
+                    </m:r>
+                  </m:oMath>
+                </a14:m>
+                <a:r>
+                  <a:rPr lang="en-US" sz="2200" dirty="0"/>
+                  <a:t> </a:t>
+                </a:r>
+                <a:r>
+                  <a:rPr lang="ru-RU" sz="2200" dirty="0"/>
+                  <a:t>– корень суммы квадратов ошибки, </a:t>
+                </a:r>
+                <a14:m>
+                  <m:oMath xmlns:m="http://schemas.openxmlformats.org/officeDocument/2006/math">
+                    <m:r>
+                      <a:rPr lang="en-US" sz="2200" b="0" i="1" smtClean="0">
+                        <a:latin typeface="Cambria Math" panose="02040503050406030204" pitchFamily="18" charset="0"/>
+                      </a:rPr>
+                      <m:t>𝑅𝑆𝑆</m:t>
+                    </m:r>
+                    <m:r>
+                      <a:rPr lang="en-US" sz="2200" b="0" i="1" smtClean="0">
+                        <a:latin typeface="Cambria Math" panose="02040503050406030204" pitchFamily="18" charset="0"/>
+                      </a:rPr>
+                      <m:t>=</m:t>
+                    </m:r>
+                    <m:nary>
+                      <m:naryPr>
+                        <m:chr m:val="∑"/>
+                        <m:ctrlPr>
+                          <a:rPr lang="en-US" sz="2200" b="0" i="1" smtClean="0">
+                            <a:latin typeface="Cambria Math" panose="02040503050406030204" pitchFamily="18" charset="0"/>
+                          </a:rPr>
+                        </m:ctrlPr>
+                      </m:naryPr>
+                      <m:sub>
+                        <m:r>
+                          <a:rPr lang="en-US" sz="2200" b="0" i="1" smtClean="0">
+                            <a:latin typeface="Cambria Math" panose="02040503050406030204" pitchFamily="18" charset="0"/>
+                          </a:rPr>
+                          <m:t>𝑛</m:t>
+                        </m:r>
+                        <m:r>
+                          <a:rPr lang="en-US" sz="2200" b="0" i="1" smtClean="0">
+                            <a:latin typeface="Cambria Math" panose="02040503050406030204" pitchFamily="18" charset="0"/>
+                          </a:rPr>
+                          <m:t>=0</m:t>
+                        </m:r>
+                      </m:sub>
+                      <m:sup>
+                        <m:r>
+                          <a:rPr lang="en-US" sz="2200" b="0" i="1" smtClean="0">
+                            <a:latin typeface="Cambria Math" panose="02040503050406030204" pitchFamily="18" charset="0"/>
+                          </a:rPr>
+                          <m:t>𝑁</m:t>
+                        </m:r>
+                        <m:r>
+                          <a:rPr lang="en-US" sz="2200" b="0" i="1" smtClean="0">
+                            <a:latin typeface="Cambria Math" panose="02040503050406030204" pitchFamily="18" charset="0"/>
+                          </a:rPr>
+                          <m:t>−1</m:t>
+                        </m:r>
+                      </m:sup>
+                      <m:e>
+                        <m:sSup>
+                          <m:sSupPr>
+                            <m:ctrlPr>
+                              <a:rPr lang="en-US" sz="2200" b="0" i="1" smtClean="0">
+                                <a:latin typeface="Cambria Math" panose="02040503050406030204" pitchFamily="18" charset="0"/>
+                              </a:rPr>
+                            </m:ctrlPr>
+                          </m:sSupPr>
+                          <m:e>
+                            <m:d>
+                              <m:dPr>
+                                <m:ctrlPr>
+                                  <a:rPr lang="en-US" sz="2200" b="0" i="1" smtClean="0">
+                                    <a:latin typeface="Cambria Math" panose="02040503050406030204" pitchFamily="18" charset="0"/>
+                                  </a:rPr>
+                                </m:ctrlPr>
+                              </m:dPr>
+                              <m:e>
+                                <m:sSub>
+                                  <m:sSubPr>
+                                    <m:ctrlPr>
+                                      <a:rPr lang="en-US" sz="2200" b="0" i="1" smtClean="0">
+                                        <a:latin typeface="Cambria Math" panose="02040503050406030204" pitchFamily="18" charset="0"/>
+                                      </a:rPr>
+                                    </m:ctrlPr>
+                                  </m:sSubPr>
+                                  <m:e>
+                                    <m:r>
+                                      <a:rPr lang="en-US" sz="2200" b="0" i="1" smtClean="0">
+                                        <a:latin typeface="Cambria Math" panose="02040503050406030204" pitchFamily="18" charset="0"/>
+                                      </a:rPr>
+                                      <m:t>𝑦</m:t>
+                                    </m:r>
+                                  </m:e>
+                                  <m:sub>
+                                    <m:r>
+                                      <a:rPr lang="en-US" sz="2200" b="0" i="1" smtClean="0">
+                                        <a:latin typeface="Cambria Math" panose="02040503050406030204" pitchFamily="18" charset="0"/>
+                                      </a:rPr>
+                                      <m:t>𝑛</m:t>
+                                    </m:r>
+                                  </m:sub>
+                                </m:sSub>
+                                <m:r>
+                                  <a:rPr lang="en-US" sz="2200" b="0" i="1" smtClean="0">
+                                    <a:latin typeface="Cambria Math" panose="02040503050406030204" pitchFamily="18" charset="0"/>
+                                  </a:rPr>
+                                  <m:t>−</m:t>
+                                </m:r>
+                                <m:sSub>
+                                  <m:sSubPr>
+                                    <m:ctrlPr>
+                                      <a:rPr lang="en-US" sz="2200" b="0" i="1" smtClean="0">
+                                        <a:latin typeface="Cambria Math" panose="02040503050406030204" pitchFamily="18" charset="0"/>
+                                      </a:rPr>
+                                    </m:ctrlPr>
+                                  </m:sSubPr>
+                                  <m:e>
+                                    <m:acc>
+                                      <m:accPr>
+                                        <m:chr m:val="̂"/>
+                                        <m:ctrlPr>
+                                          <a:rPr lang="en-US" sz="2200" b="0" i="1" smtClean="0">
+                                            <a:latin typeface="Cambria Math" panose="02040503050406030204" pitchFamily="18" charset="0"/>
+                                          </a:rPr>
+                                        </m:ctrlPr>
+                                      </m:accPr>
+                                      <m:e>
+                                        <m:r>
+                                          <a:rPr lang="en-US" sz="2200" b="0" i="1" smtClean="0">
+                                            <a:latin typeface="Cambria Math" panose="02040503050406030204" pitchFamily="18" charset="0"/>
+                                          </a:rPr>
+                                          <m:t>𝑦</m:t>
+                                        </m:r>
+                                      </m:e>
+                                    </m:acc>
+                                  </m:e>
+                                  <m:sub>
+                                    <m:r>
+                                      <a:rPr lang="en-US" sz="2200" b="0" i="1" smtClean="0">
+                                        <a:latin typeface="Cambria Math" panose="02040503050406030204" pitchFamily="18" charset="0"/>
+                                      </a:rPr>
+                                      <m:t>𝑛</m:t>
+                                    </m:r>
+                                  </m:sub>
+                                </m:sSub>
+                              </m:e>
+                            </m:d>
+                          </m:e>
+                          <m:sup>
+                            <m:r>
+                              <a:rPr lang="en-US" sz="2200" b="0" i="1" smtClean="0">
+                                <a:latin typeface="Cambria Math" panose="02040503050406030204" pitchFamily="18" charset="0"/>
+                              </a:rPr>
+                              <m:t>2</m:t>
+                            </m:r>
+                          </m:sup>
+                        </m:sSup>
+                        <m:r>
+                          <a:rPr lang="en-US" sz="2200" b="0" i="1" smtClean="0">
+                            <a:latin typeface="Cambria Math" panose="02040503050406030204" pitchFamily="18" charset="0"/>
+                          </a:rPr>
+                          <m:t> </m:t>
+                        </m:r>
+                      </m:e>
+                    </m:nary>
+                  </m:oMath>
+                </a14:m>
+                <a:r>
+                  <a:rPr lang="en-US" sz="2200" dirty="0"/>
+                  <a:t>. </a:t>
+                </a:r>
+                <a:endParaRPr lang="ru-RU" sz="2200" dirty="0"/>
+              </a:p>
+              <a:p>
+                <a:r>
+                  <a:rPr lang="en-US" sz="2200" dirty="0"/>
+                  <a:t>k </a:t>
+                </a:r>
+                <a:r>
+                  <a:rPr lang="ru-RU" sz="2200" dirty="0"/>
+                  <a:t>число параметров, например для </a:t>
+                </a:r>
+                <a:r>
+                  <a:rPr lang="en-US" sz="2200" dirty="0"/>
+                  <a:t> ARMA </a:t>
+                </a:r>
+                <a14:m>
+                  <m:oMath xmlns:m="http://schemas.openxmlformats.org/officeDocument/2006/math">
+                    <m:r>
+                      <a:rPr lang="en-US" sz="2200" i="1" smtClean="0">
+                        <a:latin typeface="Cambria Math" panose="02040503050406030204" pitchFamily="18" charset="0"/>
+                      </a:rPr>
+                      <m:t>𝑘</m:t>
+                    </m:r>
+                    <m:r>
+                      <a:rPr lang="en-US" sz="2200" i="1" smtClean="0">
+                        <a:latin typeface="Cambria Math" panose="02040503050406030204" pitchFamily="18" charset="0"/>
+                      </a:rPr>
+                      <m:t>=</m:t>
+                    </m:r>
+                    <m:r>
+                      <a:rPr lang="en-US" sz="2200" i="1" smtClean="0">
+                        <a:latin typeface="Cambria Math" panose="02040503050406030204" pitchFamily="18" charset="0"/>
+                      </a:rPr>
+                      <m:t>𝑝</m:t>
+                    </m:r>
+                    <m:r>
+                      <a:rPr lang="en-US" sz="2200" i="1" smtClean="0">
+                        <a:latin typeface="Cambria Math" panose="02040503050406030204" pitchFamily="18" charset="0"/>
+                      </a:rPr>
+                      <m:t>+</m:t>
+                    </m:r>
+                    <m:r>
+                      <a:rPr lang="en-US" sz="2200" i="1" smtClean="0">
+                        <a:latin typeface="Cambria Math" panose="02040503050406030204" pitchFamily="18" charset="0"/>
+                      </a:rPr>
+                      <m:t>𝑞</m:t>
+                    </m:r>
+                  </m:oMath>
+                </a14:m>
+                <a:r>
+                  <a:rPr lang="en-US" sz="2200" dirty="0"/>
+                  <a:t> </a:t>
+                </a:r>
+                <a:br>
+                  <a:rPr lang="en-US" sz="2200" dirty="0"/>
+                </a:br>
+                <a:r>
+                  <a:rPr lang="ru-RU" sz="2200" dirty="0"/>
+                  <a:t>или с константой </a:t>
+                </a:r>
+                <a14:m>
+                  <m:oMath xmlns:m="http://schemas.openxmlformats.org/officeDocument/2006/math">
+                    <m:r>
+                      <a:rPr lang="en-US" sz="2200" i="1">
+                        <a:latin typeface="Cambria Math" panose="02040503050406030204" pitchFamily="18" charset="0"/>
+                      </a:rPr>
+                      <m:t>𝑘</m:t>
+                    </m:r>
+                    <m:r>
+                      <a:rPr lang="en-US" sz="2200" i="1">
+                        <a:latin typeface="Cambria Math" panose="02040503050406030204" pitchFamily="18" charset="0"/>
+                      </a:rPr>
+                      <m:t>=</m:t>
+                    </m:r>
+                    <m:r>
+                      <a:rPr lang="en-US" sz="2200" i="1">
+                        <a:latin typeface="Cambria Math" panose="02040503050406030204" pitchFamily="18" charset="0"/>
+                      </a:rPr>
+                      <m:t>𝑝</m:t>
+                    </m:r>
+                    <m:r>
+                      <a:rPr lang="en-US" sz="2200" i="1">
+                        <a:latin typeface="Cambria Math" panose="02040503050406030204" pitchFamily="18" charset="0"/>
+                      </a:rPr>
+                      <m:t>+</m:t>
+                    </m:r>
+                    <m:r>
+                      <a:rPr lang="en-US" sz="2200" i="1">
+                        <a:latin typeface="Cambria Math" panose="02040503050406030204" pitchFamily="18" charset="0"/>
+                      </a:rPr>
+                      <m:t>𝑞</m:t>
+                    </m:r>
+                    <m:r>
+                      <a:rPr lang="en-US" sz="2200" i="1">
+                        <a:latin typeface="Cambria Math" panose="02040503050406030204" pitchFamily="18" charset="0"/>
+                      </a:rPr>
+                      <m:t>+1</m:t>
+                    </m:r>
+                  </m:oMath>
+                </a14:m>
+                <a:r>
+                  <a:rPr lang="en-US" sz="2200" dirty="0"/>
+                  <a:t>; </a:t>
+                </a:r>
+              </a:p>
+              <a:p>
+                <a:pPr lvl="1"/>
+                <a:r>
+                  <a:rPr lang="ru-RU" sz="2200" dirty="0"/>
+                  <a:t>Могут быть и другие выражения для </a:t>
+                </a:r>
+                <a14:m>
+                  <m:oMath xmlns:m="http://schemas.openxmlformats.org/officeDocument/2006/math">
+                    <m:r>
+                      <a:rPr lang="en-US" sz="2200" i="1" dirty="0" smtClean="0">
+                        <a:latin typeface="Cambria Math" panose="02040503050406030204" pitchFamily="18" charset="0"/>
+                      </a:rPr>
+                      <m:t>𝑘</m:t>
+                    </m:r>
+                  </m:oMath>
+                </a14:m>
+                <a:r>
+                  <a:rPr lang="ru-RU" sz="2200" dirty="0"/>
+                  <a:t> в зависимости о числа параметров в модели.</a:t>
+                </a:r>
+                <a:endParaRPr lang="en-US" sz="2200" dirty="0"/>
+              </a:p>
+            </p:txBody>
+          </p:sp>
+        </mc:Choice>
+        <mc:Fallback>
+          <p:sp>
+            <p:nvSpPr>
+              <p:cNvPr id="3" name="Объект 2">
+                <a:extLst>
+                  <a:ext uri="{FF2B5EF4-FFF2-40B4-BE49-F238E27FC236}">
+                    <a16:creationId xmlns:a16="http://schemas.microsoft.com/office/drawing/2014/main" id="{40ACB7F2-07F5-4100-AF8D-CFA14F65E0BA}"/>
+                  </a:ext>
+                </a:extLst>
+              </p:cNvPr>
+              <p:cNvSpPr>
+                <a:spLocks noGrp="1" noRot="1" noChangeAspect="1" noMove="1" noResize="1" noEditPoints="1" noAdjustHandles="1" noChangeArrowheads="1" noChangeShapeType="1" noTextEdit="1"/>
+              </p:cNvSpPr>
+              <p:nvPr>
+                <p:ph idx="1"/>
+              </p:nvPr>
+            </p:nvSpPr>
+            <p:spPr>
+              <a:xfrm>
+                <a:off x="246528" y="905436"/>
+                <a:ext cx="11564472" cy="5876364"/>
+              </a:xfrm>
+              <a:blipFill>
+                <a:blip r:embed="rId2"/>
+                <a:stretch>
+                  <a:fillRect l="-580" t="-1349"/>
+                </a:stretch>
+              </a:blipFill>
+            </p:spPr>
+            <p:txBody>
+              <a:bodyPr/>
+              <a:lstStyle/>
+              <a:p>
+                <a:r>
+                  <a:rPr lang="ru-RU">
+                    <a:noFill/>
+                  </a:rPr>
+                  <a:t> </a:t>
+                </a:r>
+              </a:p>
+            </p:txBody>
+          </p:sp>
+        </mc:Fallback>
+      </mc:AlternateContent>
+      <p:sp>
+        <p:nvSpPr>
+          <p:cNvPr id="4" name="Rectangle 1">
+            <a:extLst>
+              <a:ext uri="{FF2B5EF4-FFF2-40B4-BE49-F238E27FC236}">
+                <a16:creationId xmlns:a16="http://schemas.microsoft.com/office/drawing/2014/main" id="{1A3DAA71-2A2C-4B3E-8B0A-660871E8E4BC}"/>
+              </a:ext>
+            </a:extLst>
+          </p:cNvPr>
+          <p:cNvSpPr>
+            <a:spLocks noChangeArrowheads="1"/>
+          </p:cNvSpPr>
+          <p:nvPr/>
+        </p:nvSpPr>
+        <p:spPr bwMode="auto">
+          <a:xfrm>
+            <a:off x="0" y="90100"/>
+            <a:ext cx="184731" cy="276999"/>
+          </a:xfrm>
+          <a:prstGeom prst="rect">
+            <a:avLst/>
+          </a:prstGeom>
+          <a:solidFill>
+            <a:srgbClr val="FFFFFF"/>
+          </a:solidFill>
+          <a:ln>
+            <a:noFill/>
+          </a:ln>
+          <a:effectLst/>
+          <a:extLst>
+            <a:ext uri="{91240B29-F687-4F45-9708-019B960494DF}">
+              <a14:hiddenLine xmlns:a14="http://schemas.microsoft.com/office/drawing/2010/main" w="9525">
+                <a:solidFill>
+                  <a:schemeClr val="tx1"/>
+                </a:solidFill>
+                <a:miter lim="800000"/>
+                <a:headEnd/>
+                <a:tailEnd/>
+              </a14:hiddenLine>
+            </a:ext>
+            <a:ext uri="{AF507438-7753-43E0-B8FC-AC1667EBCBE1}">
+              <a14:hiddenEffects xmlns:a14="http://schemas.microsoft.com/office/drawing/2010/main">
+                <a:effectLst>
+                  <a:outerShdw dist="35921" dir="2700000" algn="ctr" rotWithShape="0">
+                    <a:schemeClr val="bg2"/>
+                  </a:outerShdw>
+                </a:effectLst>
+              </a14:hiddenEffects>
+            </a:ext>
+          </a:extLst>
+        </p:spPr>
+        <p:txBody>
+          <a:bodyPr vert="horz" wrap="none" lIns="91440" tIns="0" rIns="91440" bIns="0" numCol="1" anchor="ctr" anchorCtr="0" compatLnSpc="1">
+            <a:prstTxWarp prst="textNoShape">
+              <a:avLst/>
+            </a:prstTxWarp>
+            <a:spAutoFit/>
+          </a:bodyPr>
+          <a:lstStyle>
+            <a:lvl1pPr eaLnBrk="0" fontAlgn="base" hangingPunct="0">
+              <a:spcBef>
+                <a:spcPct val="0"/>
+              </a:spcBef>
+              <a:spcAft>
+                <a:spcPct val="0"/>
+              </a:spcAft>
+              <a:defRPr>
+                <a:solidFill>
+                  <a:schemeClr val="tx1"/>
+                </a:solidFill>
+                <a:latin typeface="Arial" panose="020B0604020202020204" pitchFamily="34" charset="0"/>
+              </a:defRPr>
+            </a:lvl1pPr>
+            <a:lvl2pPr eaLnBrk="0" fontAlgn="base" hangingPunct="0">
+              <a:spcBef>
+                <a:spcPct val="0"/>
+              </a:spcBef>
+              <a:spcAft>
+                <a:spcPct val="0"/>
+              </a:spcAft>
+              <a:defRPr>
+                <a:solidFill>
+                  <a:schemeClr val="tx1"/>
+                </a:solidFill>
+                <a:latin typeface="Arial" panose="020B0604020202020204" pitchFamily="34" charset="0"/>
+              </a:defRPr>
+            </a:lvl2pPr>
+            <a:lvl3pPr eaLnBrk="0" fontAlgn="base" hangingPunct="0">
+              <a:spcBef>
+                <a:spcPct val="0"/>
+              </a:spcBef>
+              <a:spcAft>
+                <a:spcPct val="0"/>
+              </a:spcAft>
+              <a:defRPr>
+                <a:solidFill>
+                  <a:schemeClr val="tx1"/>
+                </a:solidFill>
+                <a:latin typeface="Arial" panose="020B0604020202020204" pitchFamily="34" charset="0"/>
+              </a:defRPr>
+            </a:lvl3pPr>
+            <a:lvl4pPr eaLnBrk="0" fontAlgn="base" hangingPunct="0">
+              <a:spcBef>
+                <a:spcPct val="0"/>
+              </a:spcBef>
+              <a:spcAft>
+                <a:spcPct val="0"/>
+              </a:spcAft>
+              <a:defRPr>
+                <a:solidFill>
+                  <a:schemeClr val="tx1"/>
+                </a:solidFill>
+                <a:latin typeface="Arial" panose="020B0604020202020204" pitchFamily="34" charset="0"/>
+              </a:defRPr>
+            </a:lvl4pPr>
+            <a:lvl5pPr eaLnBrk="0" fontAlgn="base" hangingPunct="0">
+              <a:spcBef>
+                <a:spcPct val="0"/>
+              </a:spcBef>
+              <a:spcAft>
+                <a:spcPct val="0"/>
+              </a:spcAft>
+              <a:defRPr>
+                <a:solidFill>
+                  <a:schemeClr val="tx1"/>
+                </a:solidFill>
+                <a:latin typeface="Arial" panose="020B0604020202020204" pitchFamily="34" charset="0"/>
+              </a:defRPr>
+            </a:lvl5pPr>
+            <a:lvl6pPr eaLnBrk="0" fontAlgn="base" hangingPunct="0">
+              <a:spcBef>
+                <a:spcPct val="0"/>
+              </a:spcBef>
+              <a:spcAft>
+                <a:spcPct val="0"/>
+              </a:spcAft>
+              <a:defRPr>
+                <a:solidFill>
+                  <a:schemeClr val="tx1"/>
+                </a:solidFill>
+                <a:latin typeface="Arial" panose="020B0604020202020204" pitchFamily="34" charset="0"/>
+              </a:defRPr>
+            </a:lvl6pPr>
+            <a:lvl7pPr eaLnBrk="0" fontAlgn="base" hangingPunct="0">
+              <a:spcBef>
+                <a:spcPct val="0"/>
+              </a:spcBef>
+              <a:spcAft>
+                <a:spcPct val="0"/>
+              </a:spcAft>
+              <a:defRPr>
+                <a:solidFill>
+                  <a:schemeClr val="tx1"/>
+                </a:solidFill>
+                <a:latin typeface="Arial" panose="020B0604020202020204" pitchFamily="34" charset="0"/>
+              </a:defRPr>
+            </a:lvl7pPr>
+            <a:lvl8pPr eaLnBrk="0" fontAlgn="base" hangingPunct="0">
+              <a:spcBef>
+                <a:spcPct val="0"/>
+              </a:spcBef>
+              <a:spcAft>
+                <a:spcPct val="0"/>
+              </a:spcAft>
+              <a:defRPr>
+                <a:solidFill>
+                  <a:schemeClr val="tx1"/>
+                </a:solidFill>
+                <a:latin typeface="Arial" panose="020B0604020202020204" pitchFamily="34" charset="0"/>
+              </a:defRPr>
+            </a:lvl8pPr>
+            <a:lvl9pPr eaLnBrk="0" fontAlgn="base" hangingPunct="0">
+              <a:spcBef>
+                <a:spcPct val="0"/>
+              </a:spcBef>
+              <a:spcAft>
+                <a:spcPct val="0"/>
+              </a:spcAft>
+              <a:defRPr>
+                <a:solidFill>
+                  <a:schemeClr val="tx1"/>
+                </a:solidFill>
+                <a:latin typeface="Arial" panose="020B0604020202020204" pitchFamily="34" charset="0"/>
+              </a:defRPr>
+            </a:lvl9pPr>
+          </a:lstStyle>
+          <a:p>
+            <a:pPr marL="0" marR="0" lvl="0" indent="0" algn="l" defTabSz="914400" rtl="0" eaLnBrk="0" fontAlgn="base" latinLnBrk="0" hangingPunct="0">
+              <a:lnSpc>
+                <a:spcPct val="100000"/>
+              </a:lnSpc>
+              <a:spcBef>
+                <a:spcPct val="0"/>
+              </a:spcBef>
+              <a:spcAft>
+                <a:spcPct val="0"/>
+              </a:spcAft>
+              <a:buClrTx/>
+              <a:buSzTx/>
+              <a:buFontTx/>
+              <a:buNone/>
+              <a:tabLst/>
+            </a:pPr>
+            <a:endParaRPr kumimoji="0" lang="en-US" altLang="en-US" sz="1800" b="0" i="0" u="none" strike="noStrike" cap="none" normalizeH="0" baseline="0" dirty="0">
+              <a:ln>
+                <a:noFill/>
+              </a:ln>
+              <a:solidFill>
+                <a:schemeClr val="tx1"/>
+              </a:solidFill>
+              <a:effectLst/>
+              <a:latin typeface="Arial" panose="020B0604020202020204" pitchFamily="34" charset="0"/>
+            </a:endParaRPr>
+          </a:p>
+        </p:txBody>
+      </p:sp>
+    </p:spTree>
+    <p:extLst>
+      <p:ext uri="{BB962C8B-B14F-4D97-AF65-F5344CB8AC3E}">
+        <p14:creationId xmlns:p14="http://schemas.microsoft.com/office/powerpoint/2010/main" val="524678265"/>
+      </p:ext>
+    </p:extLst>
+  </p:cSld>
+  <p:clrMapOvr>
+    <a:masterClrMapping/>
+  </p:clrMapOvr>
+  <p:timing>
+    <p:tnLst>
+      <p:par>
+        <p:cTn id="1" dur="indefinite" restart="never" nodeType="tmRoot"/>
+      </p:par>
+    </p:tnLst>
+  </p:timing>
+</p:sld>
+</file>
+
+<file path=ppt/slides/slide15.xml><?xml version="1.0" encoding="utf-8"?>
+<p:sld xmlns:a="http://schemas.openxmlformats.org/drawingml/2006/main" xmlns:r="http://schemas.openxmlformats.org/officeDocument/2006/relationships" xmlns:p="http://schemas.openxmlformats.org/presentationml/2006/main">
+  <p:cSld>
+    <p:spTree>
+      <p:nvGrpSpPr>
+        <p:cNvPr id="1" name=""/>
+        <p:cNvGrpSpPr/>
+        <p:nvPr/>
+      </p:nvGrpSpPr>
+      <p:grpSpPr>
+        <a:xfrm>
+          <a:off x="0" y="0"/>
+          <a:ext cx="0" cy="0"/>
+          <a:chOff x="0" y="0"/>
+          <a:chExt cx="0" cy="0"/>
+        </a:xfrm>
+      </p:grpSpPr>
+      <p:sp>
+        <p:nvSpPr>
+          <p:cNvPr id="2" name="Заголовок 1">
+            <a:extLst>
+              <a:ext uri="{FF2B5EF4-FFF2-40B4-BE49-F238E27FC236}">
+                <a16:creationId xmlns:a16="http://schemas.microsoft.com/office/drawing/2014/main" id="{7CB29E92-B795-4F44-A577-A4EBC753A5A5}"/>
+              </a:ext>
+            </a:extLst>
+          </p:cNvPr>
+          <p:cNvSpPr>
+            <a:spLocks noGrp="1"/>
+          </p:cNvSpPr>
+          <p:nvPr>
+            <p:ph type="title"/>
+          </p:nvPr>
+        </p:nvSpPr>
+        <p:spPr>
+          <a:xfrm>
+            <a:off x="838200" y="365126"/>
+            <a:ext cx="10515600" cy="612028"/>
+          </a:xfrm>
+        </p:spPr>
+        <p:txBody>
+          <a:bodyPr>
+            <a:normAutofit fontScale="90000"/>
+          </a:bodyPr>
+          <a:lstStyle/>
+          <a:p>
+            <a:r>
+              <a:rPr lang="ru-RU" b="1" dirty="0" err="1"/>
+              <a:t>Дообучение</a:t>
+            </a:r>
+            <a:r>
+              <a:rPr lang="ru-RU" b="1" dirty="0"/>
+              <a:t> </a:t>
+            </a:r>
+            <a:r>
+              <a:rPr lang="en-US" b="1" dirty="0"/>
+              <a:t>ARMA </a:t>
+            </a:r>
+            <a:r>
+              <a:rPr lang="ru-RU" b="1" dirty="0"/>
+              <a:t>коэффициентов</a:t>
+            </a:r>
+            <a:endParaRPr lang="en-US" dirty="0"/>
+          </a:p>
+        </p:txBody>
+      </p:sp>
+      <mc:AlternateContent xmlns:mc="http://schemas.openxmlformats.org/markup-compatibility/2006" xmlns:a14="http://schemas.microsoft.com/office/drawing/2010/main">
+        <mc:Choice Requires="a14">
+          <p:sp>
+            <p:nvSpPr>
+              <p:cNvPr id="3" name="Объект 2">
+                <a:extLst>
+                  <a:ext uri="{FF2B5EF4-FFF2-40B4-BE49-F238E27FC236}">
+                    <a16:creationId xmlns:a16="http://schemas.microsoft.com/office/drawing/2014/main" id="{40ACB7F2-07F5-4100-AF8D-CFA14F65E0BA}"/>
+                  </a:ext>
+                </a:extLst>
+              </p:cNvPr>
+              <p:cNvSpPr>
+                <a:spLocks noGrp="1"/>
+              </p:cNvSpPr>
+              <p:nvPr>
+                <p:ph idx="1"/>
+              </p:nvPr>
+            </p:nvSpPr>
+            <p:spPr>
+              <a:xfrm>
+                <a:off x="246528" y="905436"/>
+                <a:ext cx="11564472" cy="5876364"/>
+              </a:xfrm>
+            </p:spPr>
+            <p:txBody>
+              <a:bodyPr>
+                <a:normAutofit/>
+              </a:bodyPr>
+              <a:lstStyle/>
+              <a:p>
+                <a:pPr marL="228600" lvl="1">
+                  <a:spcBef>
+                    <a:spcPts val="1000"/>
+                  </a:spcBef>
+                </a:pPr>
+                <a:r>
+                  <a:rPr lang="ru-RU" sz="2800" dirty="0"/>
+                  <a:t>Разные критерии штрафуют по разному.</a:t>
+                </a:r>
+                <a:endParaRPr lang="en-US" sz="2800" dirty="0"/>
+              </a:p>
+              <a:p>
+                <a:r>
+                  <a:rPr lang="ru-RU" dirty="0"/>
+                  <a:t>Есть несколько популярных критериев:</a:t>
+                </a:r>
+                <a:endParaRPr lang="en-US" dirty="0"/>
+              </a:p>
+              <a:p>
+                <a14:m>
+                  <m:oMath xmlns:m="http://schemas.openxmlformats.org/officeDocument/2006/math">
+                    <m:r>
+                      <a:rPr lang="en-US" i="1">
+                        <a:latin typeface="Cambria Math" panose="02040503050406030204" pitchFamily="18" charset="0"/>
+                      </a:rPr>
+                      <m:t>𝐴𝐼𝐶</m:t>
+                    </m:r>
+                    <m:r>
+                      <a:rPr lang="en-US" i="1">
+                        <a:latin typeface="Cambria Math" panose="02040503050406030204" pitchFamily="18" charset="0"/>
+                      </a:rPr>
+                      <m:t>(</m:t>
+                    </m:r>
+                    <m:r>
+                      <a:rPr lang="en-US" i="1">
+                        <a:latin typeface="Cambria Math" panose="02040503050406030204" pitchFamily="18" charset="0"/>
+                      </a:rPr>
+                      <m:t>𝑘</m:t>
+                    </m:r>
+                    <m:r>
+                      <a:rPr lang="en-US" i="1">
+                        <a:latin typeface="Cambria Math" panose="02040503050406030204" pitchFamily="18" charset="0"/>
+                      </a:rPr>
+                      <m:t>)=</m:t>
+                    </m:r>
+                    <m:r>
+                      <a:rPr lang="en-US" i="1">
+                        <a:latin typeface="Cambria Math" panose="02040503050406030204" pitchFamily="18" charset="0"/>
+                      </a:rPr>
+                      <m:t>𝑙𝑛</m:t>
+                    </m:r>
+                    <m:sSup>
+                      <m:sSupPr>
+                        <m:ctrlPr>
+                          <a:rPr lang="en-US" i="1">
+                            <a:latin typeface="Cambria Math" panose="02040503050406030204" pitchFamily="18" charset="0"/>
+                          </a:rPr>
+                        </m:ctrlPr>
+                      </m:sSupPr>
+                      <m:e>
+                        <m:acc>
+                          <m:accPr>
+                            <m:chr m:val="̂"/>
+                            <m:ctrlPr>
+                              <a:rPr lang="en-US" i="1">
+                                <a:latin typeface="Cambria Math" panose="02040503050406030204" pitchFamily="18" charset="0"/>
+                              </a:rPr>
+                            </m:ctrlPr>
+                          </m:accPr>
+                          <m:e>
+                            <m:r>
+                              <a:rPr lang="en-US" i="1">
+                                <a:latin typeface="Cambria Math" panose="02040503050406030204" pitchFamily="18" charset="0"/>
+                              </a:rPr>
+                              <m:t>𝜎</m:t>
+                            </m:r>
+                          </m:e>
+                        </m:acc>
+                      </m:e>
+                      <m:sup>
+                        <m:r>
+                          <a:rPr lang="en-US" i="1">
+                            <a:latin typeface="Cambria Math" panose="02040503050406030204" pitchFamily="18" charset="0"/>
+                          </a:rPr>
+                          <m:t>2</m:t>
+                        </m:r>
+                      </m:sup>
+                    </m:sSup>
+                    <m:r>
+                      <a:rPr lang="en-US" i="1">
+                        <a:latin typeface="Cambria Math" panose="02040503050406030204" pitchFamily="18" charset="0"/>
+                      </a:rPr>
+                      <m:t>+2</m:t>
+                    </m:r>
+                    <m:f>
+                      <m:fPr>
+                        <m:ctrlPr>
+                          <a:rPr lang="en-US" i="1">
+                            <a:latin typeface="Cambria Math" panose="02040503050406030204" pitchFamily="18" charset="0"/>
+                          </a:rPr>
+                        </m:ctrlPr>
+                      </m:fPr>
+                      <m:num>
+                        <m:r>
+                          <a:rPr lang="en-US" i="1">
+                            <a:latin typeface="Cambria Math" panose="02040503050406030204" pitchFamily="18" charset="0"/>
+                          </a:rPr>
+                          <m:t>𝑘</m:t>
+                        </m:r>
+                      </m:num>
+                      <m:den>
+                        <m:r>
+                          <a:rPr lang="en-US" i="1">
+                            <a:latin typeface="Cambria Math" panose="02040503050406030204" pitchFamily="18" charset="0"/>
+                          </a:rPr>
+                          <m:t>𝑁</m:t>
+                        </m:r>
+                      </m:den>
+                    </m:f>
+                    <m:r>
+                      <a:rPr lang="en-US" i="1">
+                        <a:latin typeface="Cambria Math" panose="02040503050406030204" pitchFamily="18" charset="0"/>
+                      </a:rPr>
+                      <m:t>;</m:t>
+                    </m:r>
+                  </m:oMath>
+                </a14:m>
+                <a:r>
+                  <a:rPr lang="en-US" dirty="0"/>
+                  <a:t> </a:t>
+                </a:r>
+                <a:r>
+                  <a:rPr lang="ru-RU" dirty="0"/>
+                  <a:t>Информационный критерий </a:t>
+                </a:r>
+                <a:r>
+                  <a:rPr lang="ru-RU" dirty="0" err="1"/>
+                  <a:t>Акайке</a:t>
+                </a:r>
+                <a:endParaRPr lang="ru-RU" dirty="0"/>
+              </a:p>
+              <a:p>
+                <a:pPr lvl="1"/>
+                <a:r>
+                  <a:rPr lang="ru-RU" dirty="0"/>
+                  <a:t>Для </a:t>
+                </a:r>
+                <a:r>
+                  <a:rPr lang="en-US" dirty="0"/>
+                  <a:t>ARMA </a:t>
+                </a:r>
+                <a:r>
+                  <a:rPr lang="ru-RU" dirty="0"/>
+                  <a:t>процесса может несколько завышать число параметров.</a:t>
+                </a:r>
+                <a:endParaRPr lang="en-US" dirty="0"/>
+              </a:p>
+              <a:p>
+                <a14:m>
+                  <m:oMath xmlns:m="http://schemas.openxmlformats.org/officeDocument/2006/math">
+                    <m:r>
+                      <a:rPr lang="en-US" i="1">
+                        <a:latin typeface="Cambria Math" panose="02040503050406030204" pitchFamily="18" charset="0"/>
+                      </a:rPr>
+                      <m:t>𝐵𝐼𝐶</m:t>
+                    </m:r>
+                    <m:r>
+                      <a:rPr lang="en-US" i="1">
+                        <a:latin typeface="Cambria Math" panose="02040503050406030204" pitchFamily="18" charset="0"/>
+                      </a:rPr>
+                      <m:t>(</m:t>
+                    </m:r>
+                    <m:r>
+                      <a:rPr lang="en-US" i="1">
+                        <a:latin typeface="Cambria Math" panose="02040503050406030204" pitchFamily="18" charset="0"/>
+                      </a:rPr>
+                      <m:t>𝑘</m:t>
+                    </m:r>
+                    <m:r>
+                      <a:rPr lang="en-US" i="1">
+                        <a:latin typeface="Cambria Math" panose="02040503050406030204" pitchFamily="18" charset="0"/>
+                      </a:rPr>
+                      <m:t>)=</m:t>
+                    </m:r>
+                    <m:r>
+                      <a:rPr lang="en-US" i="1">
+                        <a:latin typeface="Cambria Math" panose="02040503050406030204" pitchFamily="18" charset="0"/>
+                      </a:rPr>
+                      <m:t>𝑙𝑛</m:t>
+                    </m:r>
+                    <m:sSup>
+                      <m:sSupPr>
+                        <m:ctrlPr>
+                          <a:rPr lang="en-US" i="1">
+                            <a:latin typeface="Cambria Math" panose="02040503050406030204" pitchFamily="18" charset="0"/>
+                          </a:rPr>
+                        </m:ctrlPr>
+                      </m:sSupPr>
+                      <m:e>
+                        <m:acc>
+                          <m:accPr>
+                            <m:chr m:val="̂"/>
+                            <m:ctrlPr>
+                              <a:rPr lang="en-US" i="1">
+                                <a:latin typeface="Cambria Math" panose="02040503050406030204" pitchFamily="18" charset="0"/>
+                              </a:rPr>
+                            </m:ctrlPr>
+                          </m:accPr>
+                          <m:e>
+                            <m:r>
+                              <a:rPr lang="en-US" i="1">
+                                <a:latin typeface="Cambria Math" panose="02040503050406030204" pitchFamily="18" charset="0"/>
+                              </a:rPr>
+                              <m:t>𝜎</m:t>
+                            </m:r>
+                          </m:e>
+                        </m:acc>
+                      </m:e>
+                      <m:sup>
+                        <m:r>
+                          <a:rPr lang="en-US" i="1">
+                            <a:latin typeface="Cambria Math" panose="02040503050406030204" pitchFamily="18" charset="0"/>
+                          </a:rPr>
+                          <m:t>2</m:t>
+                        </m:r>
+                      </m:sup>
+                    </m:sSup>
+                    <m:r>
+                      <a:rPr lang="en-US" i="1">
+                        <a:latin typeface="Cambria Math" panose="02040503050406030204" pitchFamily="18" charset="0"/>
+                      </a:rPr>
+                      <m:t>+</m:t>
+                    </m:r>
+                    <m:f>
+                      <m:fPr>
+                        <m:ctrlPr>
+                          <a:rPr lang="en-US" i="1">
+                            <a:latin typeface="Cambria Math" panose="02040503050406030204" pitchFamily="18" charset="0"/>
+                          </a:rPr>
+                        </m:ctrlPr>
+                      </m:fPr>
+                      <m:num>
+                        <m:r>
+                          <a:rPr lang="en-US" i="1">
+                            <a:latin typeface="Cambria Math" panose="02040503050406030204" pitchFamily="18" charset="0"/>
+                          </a:rPr>
+                          <m:t>𝑘</m:t>
+                        </m:r>
+                      </m:num>
+                      <m:den>
+                        <m:r>
+                          <a:rPr lang="en-US" i="1">
+                            <a:latin typeface="Cambria Math" panose="02040503050406030204" pitchFamily="18" charset="0"/>
+                          </a:rPr>
+                          <m:t>𝑁</m:t>
+                        </m:r>
+                      </m:den>
+                    </m:f>
+                    <m:r>
+                      <a:rPr lang="en-US" i="1">
+                        <a:latin typeface="Cambria Math" panose="02040503050406030204" pitchFamily="18" charset="0"/>
+                      </a:rPr>
+                      <m:t>𝑙𝑛𝑁</m:t>
+                    </m:r>
+                    <m:r>
+                      <a:rPr lang="en-US" i="1">
+                        <a:latin typeface="Cambria Math" panose="02040503050406030204" pitchFamily="18" charset="0"/>
+                      </a:rPr>
+                      <m:t>;</m:t>
+                    </m:r>
+                  </m:oMath>
+                </a14:m>
+                <a:r>
+                  <a:rPr lang="en-US" dirty="0"/>
+                  <a:t> </a:t>
+                </a:r>
+                <a:r>
+                  <a:rPr lang="ru-RU" dirty="0"/>
+                  <a:t>Байесовский Информационный критерий</a:t>
+                </a:r>
+              </a:p>
+              <a:p>
+                <a:pPr lvl="1"/>
+                <a:r>
+                  <a:rPr lang="ru-RU" dirty="0"/>
+                  <a:t>Штрафует сильнее, чем </a:t>
+                </a:r>
+                <a14:m>
+                  <m:oMath xmlns:m="http://schemas.openxmlformats.org/officeDocument/2006/math">
+                    <m:r>
+                      <a:rPr lang="en-US" i="1">
+                        <a:latin typeface="Cambria Math" panose="02040503050406030204" pitchFamily="18" charset="0"/>
+                      </a:rPr>
+                      <m:t>𝐴𝐼𝐶</m:t>
+                    </m:r>
+                  </m:oMath>
+                </a14:m>
+                <a:r>
+                  <a:rPr lang="ru-RU" dirty="0"/>
+                  <a:t> (оценка снизу), но работает для больших выборок.</a:t>
+                </a:r>
+                <a:endParaRPr lang="en-US" dirty="0"/>
+              </a:p>
+              <a:p>
+                <a14:m>
+                  <m:oMath xmlns:m="http://schemas.openxmlformats.org/officeDocument/2006/math">
+                    <m:r>
+                      <a:rPr lang="en-US" i="1">
+                        <a:latin typeface="Cambria Math" panose="02040503050406030204" pitchFamily="18" charset="0"/>
+                      </a:rPr>
+                      <m:t>𝐴𝐼𝐶𝑐</m:t>
+                    </m:r>
+                    <m:r>
+                      <a:rPr lang="en-US" i="1">
+                        <a:latin typeface="Cambria Math" panose="02040503050406030204" pitchFamily="18" charset="0"/>
+                      </a:rPr>
+                      <m:t>=</m:t>
+                    </m:r>
+                    <m:r>
+                      <a:rPr lang="en-US" i="1">
+                        <a:latin typeface="Cambria Math" panose="02040503050406030204" pitchFamily="18" charset="0"/>
+                      </a:rPr>
+                      <m:t>𝐴𝐼𝐶</m:t>
+                    </m:r>
+                    <m:r>
+                      <a:rPr lang="en-US" i="1">
+                        <a:latin typeface="Cambria Math" panose="02040503050406030204" pitchFamily="18" charset="0"/>
+                      </a:rPr>
+                      <m:t>+</m:t>
+                    </m:r>
+                    <m:f>
+                      <m:fPr>
+                        <m:ctrlPr>
+                          <a:rPr lang="en-US" i="1">
+                            <a:latin typeface="Cambria Math" panose="02040503050406030204" pitchFamily="18" charset="0"/>
+                          </a:rPr>
+                        </m:ctrlPr>
+                      </m:fPr>
+                      <m:num>
+                        <m:r>
+                          <a:rPr lang="en-US" i="1">
+                            <a:latin typeface="Cambria Math" panose="02040503050406030204" pitchFamily="18" charset="0"/>
+                          </a:rPr>
+                          <m:t>2</m:t>
+                        </m:r>
+                        <m:r>
+                          <a:rPr lang="en-US" i="1">
+                            <a:latin typeface="Cambria Math" panose="02040503050406030204" pitchFamily="18" charset="0"/>
+                          </a:rPr>
+                          <m:t>𝑘</m:t>
+                        </m:r>
+                        <m:r>
+                          <a:rPr lang="en-US" i="1">
+                            <a:latin typeface="Cambria Math" panose="02040503050406030204" pitchFamily="18" charset="0"/>
+                          </a:rPr>
+                          <m:t>(</m:t>
+                        </m:r>
+                        <m:r>
+                          <a:rPr lang="en-US" i="1">
+                            <a:latin typeface="Cambria Math" panose="02040503050406030204" pitchFamily="18" charset="0"/>
+                          </a:rPr>
+                          <m:t>𝑘</m:t>
+                        </m:r>
+                        <m:r>
+                          <a:rPr lang="en-US" i="1">
+                            <a:latin typeface="Cambria Math" panose="02040503050406030204" pitchFamily="18" charset="0"/>
+                          </a:rPr>
+                          <m:t>+1)</m:t>
+                        </m:r>
+                      </m:num>
+                      <m:den>
+                        <m:r>
+                          <a:rPr lang="en-US" i="1">
+                            <a:latin typeface="Cambria Math" panose="02040503050406030204" pitchFamily="18" charset="0"/>
+                          </a:rPr>
+                          <m:t>𝑁</m:t>
+                        </m:r>
+                        <m:r>
+                          <a:rPr lang="en-US" i="1">
+                            <a:latin typeface="Cambria Math" panose="02040503050406030204" pitchFamily="18" charset="0"/>
+                          </a:rPr>
+                          <m:t>−(</m:t>
+                        </m:r>
+                        <m:r>
+                          <a:rPr lang="en-US" i="1">
+                            <a:latin typeface="Cambria Math" panose="02040503050406030204" pitchFamily="18" charset="0"/>
+                          </a:rPr>
+                          <m:t>𝑘</m:t>
+                        </m:r>
+                        <m:r>
+                          <a:rPr lang="en-US" i="1">
+                            <a:latin typeface="Cambria Math" panose="02040503050406030204" pitchFamily="18" charset="0"/>
+                          </a:rPr>
+                          <m:t>+1)</m:t>
+                        </m:r>
+                      </m:den>
+                    </m:f>
+                    <m:r>
+                      <a:rPr lang="en-US" i="1">
+                        <a:latin typeface="Cambria Math" panose="02040503050406030204" pitchFamily="18" charset="0"/>
+                      </a:rPr>
+                      <m:t>,</m:t>
+                    </m:r>
+                  </m:oMath>
+                </a14:m>
+                <a:r>
+                  <a:rPr lang="en-US" dirty="0"/>
+                  <a:t> </a:t>
+                </a:r>
+                <a:r>
+                  <a:rPr lang="ru-RU" dirty="0"/>
+                  <a:t>модифицированный Информационный критерий </a:t>
+                </a:r>
+                <a:r>
+                  <a:rPr lang="ru-RU" dirty="0" err="1"/>
+                  <a:t>Акайке</a:t>
+                </a:r>
+                <a:endParaRPr lang="ru-RU" dirty="0"/>
+              </a:p>
+              <a:p>
+                <a:pPr lvl="1"/>
+                <a:r>
+                  <a:rPr lang="ru-RU" dirty="0"/>
+                  <a:t>Рекомендуется при небольших выборках.</a:t>
+                </a:r>
+              </a:p>
+              <a:p>
+                <a:r>
+                  <a:rPr lang="ru-RU" sz="2000" dirty="0"/>
+                  <a:t>Большая выборка или нет определяется по </a:t>
+                </a:r>
+                <a:r>
+                  <a:rPr lang="ru-RU" sz="2000" dirty="0" err="1"/>
+                  <a:t>теор</a:t>
+                </a:r>
+                <a:r>
+                  <a:rPr lang="ru-RU" sz="2000" dirty="0"/>
+                  <a:t>. Котельникова.</a:t>
+                </a:r>
+              </a:p>
+              <a:p>
+                <a:pPr lvl="1"/>
+                <a:r>
+                  <a:rPr lang="ru-RU" sz="1800" dirty="0"/>
+                  <a:t>Можно искусственно сделать выборку большой, но от этого она больше информации содержать не будет. </a:t>
+                </a:r>
+              </a:p>
+              <a:p>
+                <a:pPr lvl="1"/>
+                <a:r>
+                  <a:rPr lang="ru-RU" sz="1800" dirty="0"/>
+                  <a:t>Можно </a:t>
+                </a:r>
+                <a:r>
+                  <a:rPr lang="ru-RU" sz="1800" dirty="0" err="1"/>
+                  <a:t>децимировать</a:t>
+                </a:r>
+                <a:r>
+                  <a:rPr lang="ru-RU" sz="1800" dirty="0"/>
+                  <a:t> выборку, но только если </a:t>
+                </a:r>
+                <a:r>
+                  <a:rPr lang="ru-RU" sz="1800" dirty="0" err="1"/>
+                  <a:t>теор</a:t>
+                </a:r>
+                <a:r>
+                  <a:rPr lang="ru-RU" sz="1800" dirty="0"/>
+                  <a:t>. Котельникова позволяет</a:t>
+                </a:r>
+                <a:endParaRPr lang="en-US" sz="1800" dirty="0"/>
+              </a:p>
+            </p:txBody>
+          </p:sp>
+        </mc:Choice>
+        <mc:Fallback xmlns="">
+          <p:sp>
+            <p:nvSpPr>
+              <p:cNvPr id="3" name="Объект 2">
+                <a:extLst>
+                  <a:ext uri="{FF2B5EF4-FFF2-40B4-BE49-F238E27FC236}">
+                    <a16:creationId xmlns:a16="http://schemas.microsoft.com/office/drawing/2014/main" id="{40ACB7F2-07F5-4100-AF8D-CFA14F65E0BA}"/>
+                  </a:ext>
+                </a:extLst>
+              </p:cNvPr>
+              <p:cNvSpPr>
+                <a:spLocks noGrp="1" noRot="1" noChangeAspect="1" noMove="1" noResize="1" noEditPoints="1" noAdjustHandles="1" noChangeArrowheads="1" noChangeShapeType="1" noTextEdit="1"/>
+              </p:cNvSpPr>
+              <p:nvPr>
+                <p:ph idx="1"/>
+              </p:nvPr>
+            </p:nvSpPr>
+            <p:spPr>
+              <a:xfrm>
+                <a:off x="246528" y="905436"/>
+                <a:ext cx="11564472" cy="5876364"/>
+              </a:xfrm>
+              <a:blipFill>
+                <a:blip r:embed="rId2"/>
+                <a:stretch>
+                  <a:fillRect l="-948" t="-1763" r="-1106"/>
+                </a:stretch>
+              </a:blipFill>
+            </p:spPr>
+            <p:txBody>
+              <a:bodyPr/>
+              <a:lstStyle/>
+              <a:p>
+                <a:r>
+                  <a:rPr lang="ru-RU">
+                    <a:noFill/>
+                  </a:rPr>
+                  <a:t> </a:t>
+                </a:r>
+              </a:p>
+            </p:txBody>
+          </p:sp>
+        </mc:Fallback>
+      </mc:AlternateContent>
+      <p:sp>
+        <p:nvSpPr>
+          <p:cNvPr id="4" name="Rectangle 1">
+            <a:extLst>
+              <a:ext uri="{FF2B5EF4-FFF2-40B4-BE49-F238E27FC236}">
+                <a16:creationId xmlns:a16="http://schemas.microsoft.com/office/drawing/2014/main" id="{1A3DAA71-2A2C-4B3E-8B0A-660871E8E4BC}"/>
+              </a:ext>
+            </a:extLst>
+          </p:cNvPr>
+          <p:cNvSpPr>
+            <a:spLocks noChangeArrowheads="1"/>
+          </p:cNvSpPr>
+          <p:nvPr/>
+        </p:nvSpPr>
+        <p:spPr bwMode="auto">
+          <a:xfrm>
+            <a:off x="0" y="90100"/>
+            <a:ext cx="184731" cy="276999"/>
+          </a:xfrm>
+          <a:prstGeom prst="rect">
+            <a:avLst/>
+          </a:prstGeom>
+          <a:solidFill>
+            <a:srgbClr val="FFFFFF"/>
+          </a:solidFill>
+          <a:ln>
+            <a:noFill/>
+          </a:ln>
+          <a:effectLst/>
+          <a:extLst>
+            <a:ext uri="{91240B29-F687-4F45-9708-019B960494DF}">
+              <a14:hiddenLine xmlns:a14="http://schemas.microsoft.com/office/drawing/2010/main" w="9525">
+                <a:solidFill>
+                  <a:schemeClr val="tx1"/>
+                </a:solidFill>
+                <a:miter lim="800000"/>
+                <a:headEnd/>
+                <a:tailEnd/>
+              </a14:hiddenLine>
+            </a:ext>
+            <a:ext uri="{AF507438-7753-43E0-B8FC-AC1667EBCBE1}">
+              <a14:hiddenEffects xmlns:a14="http://schemas.microsoft.com/office/drawing/2010/main">
+                <a:effectLst>
+                  <a:outerShdw dist="35921" dir="2700000" algn="ctr" rotWithShape="0">
+                    <a:schemeClr val="bg2"/>
+                  </a:outerShdw>
+                </a:effectLst>
+              </a14:hiddenEffects>
+            </a:ext>
+          </a:extLst>
+        </p:spPr>
+        <p:txBody>
+          <a:bodyPr vert="horz" wrap="none" lIns="91440" tIns="0" rIns="91440" bIns="0" numCol="1" anchor="ctr" anchorCtr="0" compatLnSpc="1">
+            <a:prstTxWarp prst="textNoShape">
+              <a:avLst/>
+            </a:prstTxWarp>
+            <a:spAutoFit/>
+          </a:bodyPr>
+          <a:lstStyle>
+            <a:lvl1pPr eaLnBrk="0" fontAlgn="base" hangingPunct="0">
+              <a:spcBef>
+                <a:spcPct val="0"/>
+              </a:spcBef>
+              <a:spcAft>
+                <a:spcPct val="0"/>
+              </a:spcAft>
+              <a:defRPr>
+                <a:solidFill>
+                  <a:schemeClr val="tx1"/>
+                </a:solidFill>
+                <a:latin typeface="Arial" panose="020B0604020202020204" pitchFamily="34" charset="0"/>
+              </a:defRPr>
+            </a:lvl1pPr>
+            <a:lvl2pPr eaLnBrk="0" fontAlgn="base" hangingPunct="0">
+              <a:spcBef>
+                <a:spcPct val="0"/>
+              </a:spcBef>
+              <a:spcAft>
+                <a:spcPct val="0"/>
+              </a:spcAft>
+              <a:defRPr>
+                <a:solidFill>
+                  <a:schemeClr val="tx1"/>
+                </a:solidFill>
+                <a:latin typeface="Arial" panose="020B0604020202020204" pitchFamily="34" charset="0"/>
+              </a:defRPr>
+            </a:lvl2pPr>
+            <a:lvl3pPr eaLnBrk="0" fontAlgn="base" hangingPunct="0">
+              <a:spcBef>
+                <a:spcPct val="0"/>
+              </a:spcBef>
+              <a:spcAft>
+                <a:spcPct val="0"/>
+              </a:spcAft>
+              <a:defRPr>
+                <a:solidFill>
+                  <a:schemeClr val="tx1"/>
+                </a:solidFill>
+                <a:latin typeface="Arial" panose="020B0604020202020204" pitchFamily="34" charset="0"/>
+              </a:defRPr>
+            </a:lvl3pPr>
+            <a:lvl4pPr eaLnBrk="0" fontAlgn="base" hangingPunct="0">
+              <a:spcBef>
+                <a:spcPct val="0"/>
+              </a:spcBef>
+              <a:spcAft>
+                <a:spcPct val="0"/>
+              </a:spcAft>
+              <a:defRPr>
+                <a:solidFill>
+                  <a:schemeClr val="tx1"/>
+                </a:solidFill>
+                <a:latin typeface="Arial" panose="020B0604020202020204" pitchFamily="34" charset="0"/>
+              </a:defRPr>
+            </a:lvl4pPr>
+            <a:lvl5pPr eaLnBrk="0" fontAlgn="base" hangingPunct="0">
+              <a:spcBef>
+                <a:spcPct val="0"/>
+              </a:spcBef>
+              <a:spcAft>
+                <a:spcPct val="0"/>
+              </a:spcAft>
+              <a:defRPr>
+                <a:solidFill>
+                  <a:schemeClr val="tx1"/>
+                </a:solidFill>
+                <a:latin typeface="Arial" panose="020B0604020202020204" pitchFamily="34" charset="0"/>
+              </a:defRPr>
+            </a:lvl5pPr>
+            <a:lvl6pPr eaLnBrk="0" fontAlgn="base" hangingPunct="0">
+              <a:spcBef>
+                <a:spcPct val="0"/>
+              </a:spcBef>
+              <a:spcAft>
+                <a:spcPct val="0"/>
+              </a:spcAft>
+              <a:defRPr>
+                <a:solidFill>
+                  <a:schemeClr val="tx1"/>
+                </a:solidFill>
+                <a:latin typeface="Arial" panose="020B0604020202020204" pitchFamily="34" charset="0"/>
+              </a:defRPr>
+            </a:lvl6pPr>
+            <a:lvl7pPr eaLnBrk="0" fontAlgn="base" hangingPunct="0">
+              <a:spcBef>
+                <a:spcPct val="0"/>
+              </a:spcBef>
+              <a:spcAft>
+                <a:spcPct val="0"/>
+              </a:spcAft>
+              <a:defRPr>
+                <a:solidFill>
+                  <a:schemeClr val="tx1"/>
+                </a:solidFill>
+                <a:latin typeface="Arial" panose="020B0604020202020204" pitchFamily="34" charset="0"/>
+              </a:defRPr>
+            </a:lvl7pPr>
+            <a:lvl8pPr eaLnBrk="0" fontAlgn="base" hangingPunct="0">
+              <a:spcBef>
+                <a:spcPct val="0"/>
+              </a:spcBef>
+              <a:spcAft>
+                <a:spcPct val="0"/>
+              </a:spcAft>
+              <a:defRPr>
+                <a:solidFill>
+                  <a:schemeClr val="tx1"/>
+                </a:solidFill>
+                <a:latin typeface="Arial" panose="020B0604020202020204" pitchFamily="34" charset="0"/>
+              </a:defRPr>
+            </a:lvl8pPr>
+            <a:lvl9pPr eaLnBrk="0" fontAlgn="base" hangingPunct="0">
+              <a:spcBef>
+                <a:spcPct val="0"/>
+              </a:spcBef>
+              <a:spcAft>
+                <a:spcPct val="0"/>
+              </a:spcAft>
+              <a:defRPr>
+                <a:solidFill>
+                  <a:schemeClr val="tx1"/>
+                </a:solidFill>
+                <a:latin typeface="Arial" panose="020B0604020202020204" pitchFamily="34" charset="0"/>
+              </a:defRPr>
+            </a:lvl9pPr>
+          </a:lstStyle>
+          <a:p>
+            <a:pPr marL="0" marR="0" lvl="0" indent="0" algn="l" defTabSz="914400" rtl="0" eaLnBrk="0" fontAlgn="base" latinLnBrk="0" hangingPunct="0">
+              <a:lnSpc>
+                <a:spcPct val="100000"/>
+              </a:lnSpc>
+              <a:spcBef>
+                <a:spcPct val="0"/>
+              </a:spcBef>
+              <a:spcAft>
+                <a:spcPct val="0"/>
+              </a:spcAft>
+              <a:buClrTx/>
+              <a:buSzTx/>
+              <a:buFontTx/>
+              <a:buNone/>
+              <a:tabLst/>
+            </a:pPr>
+            <a:endParaRPr kumimoji="0" lang="en-US" altLang="en-US" sz="1800" b="0" i="0" u="none" strike="noStrike" cap="none" normalizeH="0" baseline="0" dirty="0">
+              <a:ln>
+                <a:noFill/>
+              </a:ln>
+              <a:solidFill>
+                <a:schemeClr val="tx1"/>
+              </a:solidFill>
+              <a:effectLst/>
+              <a:latin typeface="Arial" panose="020B0604020202020204" pitchFamily="34" charset="0"/>
+            </a:endParaRPr>
+          </a:p>
+        </p:txBody>
+      </p:sp>
+    </p:spTree>
+    <p:extLst>
+      <p:ext uri="{BB962C8B-B14F-4D97-AF65-F5344CB8AC3E}">
+        <p14:creationId xmlns:p14="http://schemas.microsoft.com/office/powerpoint/2010/main" val="114107240"/>
+      </p:ext>
+    </p:extLst>
+  </p:cSld>
+  <p:clrMapOvr>
+    <a:masterClrMapping/>
+  </p:clrMapOvr>
+  <p:timing>
+    <p:tnLst>
+      <p:par>
+        <p:cTn id="1" dur="indefinite" restart="never" nodeType="tmRoot"/>
+      </p:par>
+    </p:tnLst>
+  </p:timing>
+</p:sld>
+</file>
+
+<file path=ppt/slides/slide16.xml><?xml version="1.0" encoding="utf-8"?>
+<p:sld xmlns:a="http://schemas.openxmlformats.org/drawingml/2006/main" xmlns:r="http://schemas.openxmlformats.org/officeDocument/2006/relationships" xmlns:p="http://schemas.openxmlformats.org/presentationml/2006/main">
+  <p:cSld>
+    <p:spTree>
+      <p:nvGrpSpPr>
+        <p:cNvPr id="1" name=""/>
+        <p:cNvGrpSpPr/>
+        <p:nvPr/>
+      </p:nvGrpSpPr>
+      <p:grpSpPr>
+        <a:xfrm>
+          <a:off x="0" y="0"/>
+          <a:ext cx="0" cy="0"/>
+          <a:chOff x="0" y="0"/>
+          <a:chExt cx="0" cy="0"/>
+        </a:xfrm>
+      </p:grpSpPr>
+      <p:sp>
+        <p:nvSpPr>
+          <p:cNvPr id="2" name="Заголовок 1"/>
+          <p:cNvSpPr>
+            <a:spLocks noGrp="1"/>
+          </p:cNvSpPr>
+          <p:nvPr>
+            <p:ph type="title"/>
+          </p:nvPr>
+        </p:nvSpPr>
+        <p:spPr>
+          <a:xfrm>
+            <a:off x="238125" y="136525"/>
+            <a:ext cx="10515600" cy="1325563"/>
+          </a:xfrm>
+        </p:spPr>
+        <p:txBody>
+          <a:bodyPr/>
+          <a:lstStyle/>
+          <a:p>
+            <a:r>
+              <a:rPr lang="ru-RU" dirty="0"/>
+              <a:t>Алгоритм </a:t>
+            </a:r>
+            <a:r>
+              <a:rPr lang="en-US" dirty="0"/>
+              <a:t>ARMA </a:t>
+            </a:r>
+            <a:r>
+              <a:rPr lang="ru-RU" dirty="0"/>
+              <a:t>модели</a:t>
+            </a:r>
+          </a:p>
+        </p:txBody>
+      </p:sp>
+      <p:sp>
+        <p:nvSpPr>
+          <p:cNvPr id="3" name="Объект 2"/>
+          <p:cNvSpPr>
+            <a:spLocks noGrp="1"/>
+          </p:cNvSpPr>
+          <p:nvPr>
+            <p:ph idx="1"/>
+          </p:nvPr>
+        </p:nvSpPr>
+        <p:spPr>
+          <a:xfrm>
+            <a:off x="322634" y="1284051"/>
+            <a:ext cx="11200582" cy="5196648"/>
+          </a:xfrm>
+        </p:spPr>
+        <p:txBody>
+          <a:bodyPr>
+            <a:normAutofit/>
+          </a:bodyPr>
+          <a:lstStyle/>
+          <a:p>
+            <a:pPr marL="514350" indent="-514350">
+              <a:buFont typeface="+mj-lt"/>
+              <a:buAutoNum type="arabicPeriod"/>
+            </a:pPr>
+            <a:r>
+              <a:rPr lang="ru-RU" sz="2400" u="sng" dirty="0"/>
+              <a:t>Модель работает для слабо-стационарного ряда (без </a:t>
+            </a:r>
+            <a:r>
+              <a:rPr lang="ru-RU" sz="2400" u="sng" dirty="0" smtClean="0"/>
+              <a:t>явного тренда и сезонности</a:t>
+            </a:r>
+            <a:r>
+              <a:rPr lang="ru-RU" sz="2400" u="sng" dirty="0" smtClean="0"/>
+              <a:t>)</a:t>
+            </a:r>
+          </a:p>
+          <a:p>
+            <a:pPr marL="971550" lvl="1" indent="-514350">
+              <a:buFont typeface="+mj-lt"/>
+              <a:buAutoNum type="arabicPeriod"/>
+            </a:pPr>
+            <a:r>
+              <a:rPr lang="ru-RU" sz="2000" u="sng" dirty="0" smtClean="0"/>
+              <a:t>Если есть тренд и сезонность их надо убрать.</a:t>
+            </a:r>
+          </a:p>
+          <a:p>
+            <a:pPr marL="1428750" lvl="2" indent="-514350">
+              <a:buFont typeface="+mj-lt"/>
+              <a:buAutoNum type="arabicPeriod"/>
+            </a:pPr>
+            <a:r>
+              <a:rPr lang="ru-RU" sz="2200" u="sng" dirty="0" smtClean="0"/>
+              <a:t>Можно не убирать, но тогда порядки модели будут очень большие</a:t>
+            </a:r>
+            <a:endParaRPr lang="ru-RU" sz="2200" u="sng" dirty="0"/>
+          </a:p>
+          <a:p>
+            <a:pPr marL="514350" indent="-514350">
+              <a:buFont typeface="+mj-lt"/>
+              <a:buAutoNum type="arabicPeriod"/>
+            </a:pPr>
+            <a:r>
+              <a:rPr lang="ru-RU" sz="2400" u="sng" dirty="0"/>
+              <a:t>Чем менее стационарен ряд, тем меньше горизонт точного прогнозирования.</a:t>
+            </a:r>
+          </a:p>
+          <a:p>
+            <a:pPr lvl="1"/>
+            <a:r>
+              <a:rPr lang="ru-RU" u="sng" dirty="0"/>
+              <a:t> тем ниже обобщающая способность.</a:t>
+            </a:r>
+          </a:p>
+          <a:p>
+            <a:pPr marL="514350" indent="-514350">
+              <a:buFont typeface="+mj-lt"/>
+              <a:buAutoNum type="arabicPeriod"/>
+            </a:pPr>
+            <a:r>
+              <a:rPr lang="ru-RU" sz="2400" u="sng" dirty="0"/>
+              <a:t>Выбор тренировочной и </a:t>
+            </a:r>
+            <a:r>
+              <a:rPr lang="ru-RU" sz="2400" u="sng" dirty="0" err="1"/>
+              <a:t>валидационной</a:t>
+            </a:r>
+            <a:r>
+              <a:rPr lang="ru-RU" sz="2400" u="sng" dirty="0"/>
+              <a:t> выборки.</a:t>
+            </a:r>
+          </a:p>
+          <a:p>
+            <a:pPr marL="514350" indent="-514350">
+              <a:buFont typeface="+mj-lt"/>
+              <a:buAutoNum type="arabicPeriod"/>
+            </a:pPr>
+            <a:r>
+              <a:rPr lang="ru-RU" sz="2400" u="sng" dirty="0"/>
+              <a:t>Выбор изначальных параметров модели по АКФ и ЧАКФ. </a:t>
+            </a:r>
+          </a:p>
+          <a:p>
+            <a:pPr marL="514350" indent="-514350">
+              <a:buFont typeface="+mj-lt"/>
+              <a:buAutoNum type="arabicPeriod"/>
+            </a:pPr>
+            <a:r>
+              <a:rPr lang="ru-RU" sz="2400" u="sng" dirty="0"/>
+              <a:t>Варьирование параметров моделей с целью минимизации </a:t>
+            </a:r>
+            <a:r>
+              <a:rPr lang="en-US" sz="2400" u="sng" dirty="0"/>
+              <a:t>BIC </a:t>
+            </a:r>
+            <a:r>
+              <a:rPr lang="ru-RU" sz="2400" u="sng" dirty="0"/>
+              <a:t>или</a:t>
+            </a:r>
+            <a:r>
+              <a:rPr lang="en-US" sz="2400" u="sng" dirty="0"/>
+              <a:t> </a:t>
+            </a:r>
+            <a:r>
+              <a:rPr lang="en-US" sz="2400" u="sng" dirty="0" err="1"/>
+              <a:t>AICc</a:t>
+            </a:r>
+            <a:r>
+              <a:rPr lang="en-US" sz="2400" u="sng" dirty="0"/>
+              <a:t> </a:t>
+            </a:r>
+            <a:r>
+              <a:rPr lang="ru-RU" sz="2400" u="sng" dirty="0" smtClean="0"/>
+              <a:t>критериев на тренировочной выборке.</a:t>
+            </a:r>
+            <a:endParaRPr lang="en-US" sz="2400" u="sng" dirty="0"/>
+          </a:p>
+          <a:p>
+            <a:pPr marL="514350" indent="-514350">
+              <a:buFont typeface="+mj-lt"/>
+              <a:buAutoNum type="arabicPeriod"/>
+            </a:pPr>
+            <a:r>
+              <a:rPr lang="ru-RU" sz="2400" u="sng" dirty="0"/>
+              <a:t>Проверка остатков для модели </a:t>
+            </a:r>
+            <a:r>
+              <a:rPr lang="en-US" sz="2400" u="sng" dirty="0"/>
+              <a:t>(</a:t>
+            </a:r>
+            <a:r>
+              <a:rPr lang="ru-RU" sz="2400" u="sng" dirty="0"/>
+              <a:t>на предмет стационарного БГШ</a:t>
+            </a:r>
+            <a:r>
+              <a:rPr lang="en-US" sz="2400" u="sng" dirty="0"/>
+              <a:t>)</a:t>
+            </a:r>
+            <a:r>
+              <a:rPr lang="ru-RU" sz="2400" u="sng" dirty="0"/>
+              <a:t>.</a:t>
+            </a:r>
+            <a:endParaRPr lang="en-US" sz="2400" u="sng" dirty="0"/>
+          </a:p>
+          <a:p>
+            <a:pPr marL="514350" indent="-514350">
+              <a:buFont typeface="+mj-lt"/>
+              <a:buAutoNum type="arabicPeriod"/>
+            </a:pPr>
+            <a:r>
+              <a:rPr lang="ru-RU" sz="2400" u="sng" dirty="0" smtClean="0"/>
+              <a:t>Кросс-</a:t>
+            </a:r>
+            <a:r>
+              <a:rPr lang="ru-RU" sz="2400" u="sng" dirty="0" err="1" smtClean="0"/>
+              <a:t>Валидация</a:t>
+            </a:r>
+            <a:r>
+              <a:rPr lang="ru-RU" sz="2400" u="sng" dirty="0"/>
+              <a:t>, проверка точности по известным метрикам</a:t>
+            </a:r>
+            <a:r>
+              <a:rPr lang="ru-RU" u="sng" dirty="0"/>
+              <a:t>.</a:t>
+            </a:r>
+          </a:p>
+        </p:txBody>
+      </p:sp>
+    </p:spTree>
+    <p:extLst>
+      <p:ext uri="{BB962C8B-B14F-4D97-AF65-F5344CB8AC3E}">
+        <p14:creationId xmlns:p14="http://schemas.microsoft.com/office/powerpoint/2010/main" val="2216408205"/>
+      </p:ext>
+    </p:extLst>
+  </p:cSld>
+  <p:clrMapOvr>
+    <a:masterClrMapping/>
+  </p:clrMapOvr>
+  <p:timing>
+    <p:tnLst>
+      <p:par>
+        <p:cTn id="1" dur="indefinite" restart="never" nodeType="tmRoot"/>
+      </p:par>
+    </p:tnLst>
+  </p:timing>
+</p:sld>
+</file>
+
+<file path=ppt/slides/slide17.xml><?xml version="1.0" encoding="utf-8"?>
+<p:sld xmlns:a="http://schemas.openxmlformats.org/drawingml/2006/main" xmlns:r="http://schemas.openxmlformats.org/officeDocument/2006/relationships" xmlns:p="http://schemas.openxmlformats.org/presentationml/2006/main">
+  <p:cSld>
+    <p:spTree>
+      <p:nvGrpSpPr>
+        <p:cNvPr id="1" name=""/>
+        <p:cNvGrpSpPr/>
+        <p:nvPr/>
+      </p:nvGrpSpPr>
+      <p:grpSpPr>
+        <a:xfrm>
+          <a:off x="0" y="0"/>
+          <a:ext cx="0" cy="0"/>
+          <a:chOff x="0" y="0"/>
+          <a:chExt cx="0" cy="0"/>
+        </a:xfrm>
+      </p:grpSpPr>
+      <p:sp>
+        <p:nvSpPr>
+          <p:cNvPr id="2" name="Заголовок 1"/>
+          <p:cNvSpPr>
+            <a:spLocks noGrp="1"/>
+          </p:cNvSpPr>
+          <p:nvPr>
+            <p:ph type="title"/>
+          </p:nvPr>
+        </p:nvSpPr>
+        <p:spPr>
+          <a:xfrm>
+            <a:off x="238125" y="136525"/>
+            <a:ext cx="10515600" cy="777875"/>
+          </a:xfrm>
+        </p:spPr>
+        <p:txBody>
+          <a:bodyPr/>
+          <a:lstStyle/>
+          <a:p>
+            <a:r>
+              <a:rPr lang="ru-RU" dirty="0"/>
+              <a:t>Алгоритм </a:t>
+            </a:r>
+            <a:r>
+              <a:rPr lang="en-US" dirty="0" err="1" smtClean="0"/>
+              <a:t>Auto</a:t>
+            </a:r>
+            <a:r>
+              <a:rPr lang="en-US" dirty="0" err="1" smtClean="0"/>
+              <a:t>ARMA</a:t>
+            </a:r>
+            <a:endParaRPr lang="ru-RU" dirty="0"/>
+          </a:p>
+        </p:txBody>
+      </p:sp>
+      <mc:AlternateContent xmlns:mc="http://schemas.openxmlformats.org/markup-compatibility/2006">
+        <mc:Choice xmlns:a14="http://schemas.microsoft.com/office/drawing/2010/main" Requires="a14">
+          <p:sp>
+            <p:nvSpPr>
+              <p:cNvPr id="4" name="Объект 3"/>
+              <p:cNvSpPr>
+                <a:spLocks noGrp="1"/>
+              </p:cNvSpPr>
+              <p:nvPr>
+                <p:ph idx="1"/>
+              </p:nvPr>
+            </p:nvSpPr>
+            <p:spPr>
+              <a:xfrm>
+                <a:off x="238125" y="914399"/>
+                <a:ext cx="11534775" cy="5553075"/>
+              </a:xfrm>
+            </p:spPr>
+            <p:txBody>
+              <a:bodyPr>
+                <a:normAutofit/>
+              </a:bodyPr>
+              <a:lstStyle/>
+              <a:p>
+                <a:pPr marL="0" indent="0">
+                  <a:buNone/>
+                </a:pPr>
+                <a:r>
+                  <a:rPr lang="ru-RU" sz="2200" dirty="0" smtClean="0"/>
+                  <a:t>Процесс подбора </a:t>
+                </a:r>
+                <a:r>
+                  <a:rPr lang="ru-RU" sz="2200" dirty="0" err="1" smtClean="0"/>
+                  <a:t>гиперпараметров</a:t>
+                </a:r>
+                <a:r>
+                  <a:rPr lang="ru-RU" sz="2200" dirty="0" smtClean="0"/>
+                  <a:t> модели </a:t>
+                </a:r>
+                <a:r>
+                  <a:rPr lang="en-US" sz="2200" dirty="0" smtClean="0"/>
+                  <a:t>P, Q </a:t>
+                </a:r>
+                <a:r>
+                  <a:rPr lang="ru-RU" sz="2200" dirty="0" smtClean="0"/>
+                  <a:t>можно </a:t>
+                </a:r>
+                <a:r>
+                  <a:rPr lang="ru-RU" sz="2200" dirty="0" err="1" smtClean="0"/>
+                  <a:t>алгоримитризировать</a:t>
+                </a:r>
+                <a:r>
+                  <a:rPr lang="ru-RU" sz="2200" dirty="0" smtClean="0"/>
+                  <a:t>.</a:t>
+                </a:r>
+              </a:p>
+              <a:p>
+                <a:pPr marL="0" indent="0">
+                  <a:buNone/>
+                </a:pPr>
+                <a:r>
+                  <a:rPr lang="ru-RU" sz="2200" dirty="0" smtClean="0"/>
+                  <a:t>Наиболее простой алгоритм </a:t>
+                </a:r>
+                <a:r>
+                  <a:rPr lang="ru-RU" sz="2200" dirty="0"/>
+                  <a:t>поиска </a:t>
+                </a:r>
+                <a:r>
+                  <a:rPr lang="en-US" sz="2200" dirty="0"/>
+                  <a:t>Hyndman-</a:t>
+                </a:r>
+                <a:r>
+                  <a:rPr lang="en-US" sz="2200" dirty="0" err="1"/>
+                  <a:t>Khandakar</a:t>
+                </a:r>
+                <a:r>
+                  <a:rPr lang="en-US" sz="2200" dirty="0"/>
+                  <a:t> algorithm </a:t>
+                </a:r>
+                <a:endParaRPr lang="ru-RU" sz="2200" dirty="0"/>
+              </a:p>
+              <a:p>
+                <a:pPr marL="457200" indent="-457200">
+                  <a:buFont typeface="+mj-lt"/>
+                  <a:buAutoNum type="arabicPeriod"/>
+                </a:pPr>
+                <a:r>
+                  <a:rPr lang="ru-RU" sz="2200" dirty="0" smtClean="0"/>
+                  <a:t>Задаются начальные значения </a:t>
+                </a:r>
+                <a:r>
+                  <a:rPr lang="en-US" sz="2200" dirty="0" smtClean="0"/>
+                  <a:t>P, Q</a:t>
+                </a:r>
+              </a:p>
+              <a:p>
+                <a:pPr marL="457200" indent="-457200">
+                  <a:buFont typeface="+mj-lt"/>
+                  <a:buAutoNum type="arabicPeriod"/>
+                </a:pPr>
+                <a:r>
+                  <a:rPr lang="ru-RU" sz="2200" dirty="0" smtClean="0"/>
+                  <a:t>Строится </a:t>
+                </a:r>
+                <a:r>
+                  <a:rPr lang="en-US" sz="2200" dirty="0" smtClean="0"/>
+                  <a:t>5</a:t>
+                </a:r>
+                <a:r>
+                  <a:rPr lang="ru-RU" sz="2200" dirty="0" smtClean="0"/>
+                  <a:t> моделей </a:t>
+                </a:r>
+                <a:r>
+                  <a:rPr lang="en-US" sz="2200" dirty="0" smtClean="0"/>
+                  <a:t>ARMA (P-1,Q), </a:t>
+                </a:r>
+                <a:r>
+                  <a:rPr lang="en-US" sz="2200" dirty="0" smtClean="0"/>
+                  <a:t>ARMA (P,Q-1)</a:t>
+                </a:r>
+                <a:r>
+                  <a:rPr lang="ru-RU" sz="2200" dirty="0" smtClean="0"/>
+                  <a:t>, </a:t>
+                </a:r>
+                <a:r>
+                  <a:rPr lang="en-US" sz="2200" dirty="0" smtClean="0"/>
+                  <a:t>ARMA (P,Q)</a:t>
+                </a:r>
+                <a:r>
+                  <a:rPr lang="ru-RU" sz="2200" dirty="0" smtClean="0"/>
+                  <a:t>, </a:t>
+                </a:r>
+                <a:r>
+                  <a:rPr lang="en-US" sz="2200" dirty="0" smtClean="0"/>
+                  <a:t>ARMA (P</a:t>
+                </a:r>
+                <a:r>
+                  <a:rPr lang="ru-RU" sz="2200" dirty="0" smtClean="0"/>
+                  <a:t>+1</a:t>
+                </a:r>
+                <a:r>
+                  <a:rPr lang="en-US" sz="2200" dirty="0" smtClean="0"/>
+                  <a:t>,Q), ARMA (P,Q</a:t>
+                </a:r>
+                <a:r>
+                  <a:rPr lang="ru-RU" sz="2200" dirty="0" smtClean="0"/>
+                  <a:t>+</a:t>
+                </a:r>
+                <a:r>
+                  <a:rPr lang="en-US" sz="2200" dirty="0" smtClean="0"/>
+                  <a:t>1)</a:t>
+                </a:r>
+                <a:r>
+                  <a:rPr lang="ru-RU" sz="2200" dirty="0" smtClean="0"/>
+                  <a:t>, могут также модели с константой</a:t>
+                </a:r>
+                <a:endParaRPr lang="ru-RU" sz="2200" dirty="0" smtClean="0"/>
+              </a:p>
+              <a:p>
+                <a:pPr marL="457200" indent="-457200">
+                  <a:buFont typeface="+mj-lt"/>
+                  <a:buAutoNum type="arabicPeriod"/>
+                </a:pPr>
+                <a:r>
+                  <a:rPr lang="ru-RU" sz="2200" dirty="0" smtClean="0"/>
+                  <a:t>Рассчитываются </a:t>
+                </a:r>
+                <a:r>
+                  <a:rPr lang="en-US" sz="2200" dirty="0" err="1" smtClean="0"/>
+                  <a:t>AICc</a:t>
+                </a:r>
+                <a:r>
+                  <a:rPr lang="en-US" sz="2200" dirty="0" smtClean="0"/>
+                  <a:t> </a:t>
+                </a:r>
+                <a:r>
+                  <a:rPr lang="ru-RU" sz="2200" dirty="0" smtClean="0"/>
+                  <a:t>для всех случаев.</a:t>
+                </a:r>
+              </a:p>
+              <a:p>
+                <a:pPr marL="457200" indent="-457200">
+                  <a:buFont typeface="+mj-lt"/>
+                  <a:buAutoNum type="arabicPeriod"/>
+                </a:pPr>
+                <a:r>
+                  <a:rPr lang="ru-RU" sz="2200" dirty="0" smtClean="0"/>
+                  <a:t>Для лучшей модели </a:t>
+                </a:r>
+                <a:r>
+                  <a:rPr lang="en-US" sz="2200" dirty="0" smtClean="0"/>
+                  <a:t>(</a:t>
+                </a:r>
+                <a:r>
+                  <a:rPr lang="en-US" sz="2200" dirty="0" err="1" smtClean="0"/>
+                  <a:t>AICc</a:t>
+                </a:r>
+                <a:r>
+                  <a:rPr lang="en-US" sz="2200" dirty="0" smtClean="0"/>
+                  <a:t> </a:t>
+                </a:r>
+                <a:r>
+                  <a:rPr lang="ru-RU" sz="2200" dirty="0" smtClean="0"/>
+                  <a:t>минимальный) обновляются </a:t>
+                </a:r>
+                <a:r>
+                  <a:rPr lang="en-US" sz="2200" dirty="0" smtClean="0"/>
+                  <a:t>P, Q</a:t>
+                </a:r>
+                <a:endParaRPr lang="ru-RU" sz="2200" dirty="0" smtClean="0"/>
+              </a:p>
+              <a:p>
+                <a:pPr marL="457200" indent="-457200">
+                  <a:buFont typeface="+mj-lt"/>
+                  <a:buAutoNum type="arabicPeriod"/>
+                </a:pPr>
+                <a:r>
+                  <a:rPr lang="ru-RU" sz="2200" dirty="0" smtClean="0"/>
+                  <a:t>Процесс повторяется с шага 2 (</a:t>
+                </a:r>
+                <a:r>
+                  <a:rPr lang="ru-RU" sz="2200" dirty="0" smtClean="0"/>
+                  <a:t>до сходимости)</a:t>
+                </a:r>
+                <a:r>
+                  <a:rPr lang="ru-RU" sz="2200" dirty="0" smtClean="0"/>
+                  <a:t>.</a:t>
+                </a:r>
+              </a:p>
+              <a:p>
+                <a:pPr marL="0" indent="0">
+                  <a:buNone/>
+                </a:pPr>
+                <a:r>
+                  <a:rPr lang="ru-RU" sz="2200" dirty="0" smtClean="0"/>
+                  <a:t>Если несколько комбинаций </a:t>
+                </a:r>
+                <a:r>
+                  <a:rPr lang="en-US" sz="2200" dirty="0" smtClean="0"/>
+                  <a:t>P, Q</a:t>
+                </a:r>
+                <a:r>
+                  <a:rPr lang="ru-RU" sz="2200" dirty="0" smtClean="0"/>
+                  <a:t> имеют стат. неразличимые </a:t>
+                </a:r>
+                <a:br>
+                  <a:rPr lang="ru-RU" sz="2200" dirty="0" smtClean="0"/>
+                </a:br>
+                <a:r>
+                  <a:rPr lang="en-US" sz="2200" dirty="0" err="1" smtClean="0"/>
+                  <a:t>AICc</a:t>
+                </a:r>
+                <a:r>
+                  <a:rPr lang="ru-RU" sz="2200" dirty="0" smtClean="0"/>
+                  <a:t> – лучше проверить все.</a:t>
+                </a:r>
+              </a:p>
+              <a:p>
+                <a:pPr marL="0" indent="0">
+                  <a:buNone/>
+                </a:pPr>
+                <a:r>
+                  <a:rPr lang="ru-RU" sz="2200" dirty="0" smtClean="0"/>
+                  <a:t>Процесс выполняется на тренировочных данных.</a:t>
+                </a:r>
+              </a:p>
+              <a:p>
+                <a:pPr marL="0" indent="0">
+                  <a:buNone/>
+                </a:pPr>
+                <a:r>
+                  <a:rPr lang="ru-RU" sz="2200" dirty="0" smtClean="0"/>
+                  <a:t>После получения модели рекомендуется проверить остатки на БГШ</a:t>
+                </a:r>
+              </a:p>
+              <a:p>
+                <a:pPr marL="0" indent="0">
+                  <a:buNone/>
+                </a:pPr>
+                <a:r>
+                  <a:rPr lang="ru-RU" sz="2200" dirty="0" smtClean="0"/>
+                  <a:t>На тесте возможно варьирование </a:t>
+                </a:r>
+                <a:r>
+                  <a:rPr lang="en-US" sz="2200" dirty="0" smtClean="0"/>
+                  <a:t>P, Q</a:t>
+                </a:r>
+                <a:r>
+                  <a:rPr lang="ru-RU" sz="2200" dirty="0" smtClean="0"/>
+                  <a:t> </a:t>
+                </a:r>
+                <a14:m>
+                  <m:oMath xmlns:m="http://schemas.openxmlformats.org/officeDocument/2006/math">
+                    <m:r>
+                      <a:rPr lang="ru-RU" sz="2200" i="1" dirty="0" smtClean="0">
+                        <a:latin typeface="Cambria Math" panose="02040503050406030204" pitchFamily="18" charset="0"/>
+                      </a:rPr>
+                      <m:t>±</m:t>
+                    </m:r>
+                  </m:oMath>
+                </a14:m>
+                <a:r>
+                  <a:rPr lang="ru-RU" sz="2200" dirty="0" smtClean="0"/>
+                  <a:t>1</a:t>
+                </a:r>
+              </a:p>
+              <a:p>
+                <a:pPr marL="0" indent="0">
+                  <a:buNone/>
+                </a:pPr>
+                <a:endParaRPr lang="en-US" sz="2200" dirty="0" smtClean="0"/>
+              </a:p>
+              <a:p>
+                <a:endParaRPr lang="ru-RU" sz="2200" dirty="0"/>
+              </a:p>
+            </p:txBody>
+          </p:sp>
+        </mc:Choice>
+        <mc:Fallback>
+          <p:sp>
+            <p:nvSpPr>
+              <p:cNvPr id="4" name="Объект 3"/>
+              <p:cNvSpPr>
+                <a:spLocks noGrp="1" noRot="1" noChangeAspect="1" noMove="1" noResize="1" noEditPoints="1" noAdjustHandles="1" noChangeArrowheads="1" noChangeShapeType="1" noTextEdit="1"/>
+              </p:cNvSpPr>
+              <p:nvPr>
+                <p:ph idx="1"/>
+              </p:nvPr>
+            </p:nvSpPr>
+            <p:spPr>
+              <a:xfrm>
+                <a:off x="238125" y="914399"/>
+                <a:ext cx="11534775" cy="5553075"/>
+              </a:xfrm>
+              <a:blipFill>
+                <a:blip r:embed="rId2"/>
+                <a:stretch>
+                  <a:fillRect l="-687" t="-1427"/>
+                </a:stretch>
+              </a:blipFill>
+            </p:spPr>
+            <p:txBody>
+              <a:bodyPr/>
+              <a:lstStyle/>
+              <a:p>
+                <a:r>
+                  <a:rPr lang="ru-RU">
+                    <a:noFill/>
+                  </a:rPr>
+                  <a:t> </a:t>
+                </a:r>
+              </a:p>
+            </p:txBody>
+          </p:sp>
+        </mc:Fallback>
+      </mc:AlternateContent>
+      <p:pic>
+        <p:nvPicPr>
+          <p:cNvPr id="7172" name="Picture 4" descr="https://otexts.com/fpppy/nbs/09-arima_files/figure-html/fig-armagridsearch-output-1.png"/>
+          <p:cNvPicPr>
+            <a:picLocks noChangeAspect="1" noChangeArrowheads="1"/>
+          </p:cNvPicPr>
+          <p:nvPr/>
+        </p:nvPicPr>
+        <p:blipFill>
+          <a:blip r:embed="rId3">
+            <a:extLst>
+              <a:ext uri="{28A0092B-C50C-407E-A947-70E740481C1C}">
+                <a14:useLocalDpi xmlns:a14="http://schemas.microsoft.com/office/drawing/2010/main" val="0"/>
+              </a:ext>
+            </a:extLst>
+          </a:blip>
+          <a:srcRect/>
+          <a:stretch>
+            <a:fillRect/>
+          </a:stretch>
+        </p:blipFill>
+        <p:spPr bwMode="auto">
+          <a:xfrm>
+            <a:off x="8486775" y="2962275"/>
+            <a:ext cx="3638550" cy="3638550"/>
+          </a:xfrm>
+          <a:prstGeom prst="rect">
+            <a:avLst/>
+          </a:prstGeom>
+          <a:noFill/>
+          <a:extLst>
+            <a:ext uri="{909E8E84-426E-40DD-AFC4-6F175D3DCCD1}">
+              <a14:hiddenFill xmlns:a14="http://schemas.microsoft.com/office/drawing/2010/main">
+                <a:solidFill>
+                  <a:srgbClr val="FFFFFF"/>
+                </a:solidFill>
+              </a14:hiddenFill>
+            </a:ext>
+          </a:extLst>
+        </p:spPr>
+      </p:pic>
+      <p:sp>
+        <p:nvSpPr>
+          <p:cNvPr id="6" name="Прямоугольник 5"/>
+          <p:cNvSpPr/>
+          <p:nvPr/>
+        </p:nvSpPr>
+        <p:spPr>
+          <a:xfrm>
+            <a:off x="238125" y="6467474"/>
+            <a:ext cx="6096000" cy="307777"/>
+          </a:xfrm>
+          <a:prstGeom prst="rect">
+            <a:avLst/>
+          </a:prstGeom>
+        </p:spPr>
+        <p:txBody>
+          <a:bodyPr>
+            <a:spAutoFit/>
+          </a:bodyPr>
+          <a:lstStyle/>
+          <a:p>
+            <a:r>
+              <a:rPr lang="ru-RU" sz="1400" dirty="0" smtClean="0"/>
+              <a:t>https://otexts.com/fpppy/nbs/09-arima.html#sec-arima-estimation</a:t>
+            </a:r>
+            <a:endParaRPr lang="ru-RU" sz="1400" dirty="0"/>
+          </a:p>
+        </p:txBody>
+      </p:sp>
+    </p:spTree>
+    <p:extLst>
+      <p:ext uri="{BB962C8B-B14F-4D97-AF65-F5344CB8AC3E}">
+        <p14:creationId xmlns:p14="http://schemas.microsoft.com/office/powerpoint/2010/main" val="2107321394"/>
+      </p:ext>
+    </p:extLst>
+  </p:cSld>
+  <p:clrMapOvr>
+    <a:masterClrMapping/>
+  </p:clrMapOvr>
+  <p:timing>
+    <p:tnLst>
+      <p:par>
+        <p:cTn id="1" dur="indefinite" restart="never" nodeType="tmRoot"/>
+      </p:par>
+    </p:tnLst>
+  </p:timing>
+</p:sld>
+</file>
+
+<file path=ppt/slides/slide18.xml><?xml version="1.0" encoding="utf-8"?>
+<p:sld xmlns:a="http://schemas.openxmlformats.org/drawingml/2006/main" xmlns:r="http://schemas.openxmlformats.org/officeDocument/2006/relationships" xmlns:p="http://schemas.openxmlformats.org/presentationml/2006/main">
+  <p:cSld>
+    <p:spTree>
+      <p:nvGrpSpPr>
+        <p:cNvPr id="1" name=""/>
+        <p:cNvGrpSpPr/>
+        <p:nvPr/>
+      </p:nvGrpSpPr>
+      <p:grpSpPr>
+        <a:xfrm>
+          <a:off x="0" y="0"/>
+          <a:ext cx="0" cy="0"/>
+          <a:chOff x="0" y="0"/>
+          <a:chExt cx="0" cy="0"/>
+        </a:xfrm>
+      </p:grpSpPr>
+      <p:sp>
+        <p:nvSpPr>
+          <p:cNvPr id="2" name="Заголовок 1"/>
+          <p:cNvSpPr>
+            <a:spLocks noGrp="1"/>
+          </p:cNvSpPr>
+          <p:nvPr>
+            <p:ph type="title"/>
+          </p:nvPr>
+        </p:nvSpPr>
+        <p:spPr>
+          <a:xfrm>
+            <a:off x="238125" y="136525"/>
+            <a:ext cx="10515600" cy="777875"/>
+          </a:xfrm>
+        </p:spPr>
+        <p:txBody>
+          <a:bodyPr/>
+          <a:lstStyle/>
+          <a:p>
+            <a:r>
+              <a:rPr lang="ru-RU" dirty="0"/>
+              <a:t>Алгоритм </a:t>
+            </a:r>
+            <a:r>
+              <a:rPr lang="en-US" dirty="0" err="1" smtClean="0"/>
+              <a:t>Auto</a:t>
+            </a:r>
+            <a:r>
+              <a:rPr lang="en-US" dirty="0" err="1" smtClean="0"/>
+              <a:t>ARMA</a:t>
+            </a:r>
+            <a:endParaRPr lang="ru-RU" dirty="0"/>
+          </a:p>
+        </p:txBody>
+      </p:sp>
+      <p:sp>
+        <p:nvSpPr>
+          <p:cNvPr id="6" name="Прямоугольник 5"/>
+          <p:cNvSpPr/>
+          <p:nvPr/>
+        </p:nvSpPr>
+        <p:spPr>
+          <a:xfrm>
+            <a:off x="238125" y="6467474"/>
+            <a:ext cx="6096000" cy="307777"/>
+          </a:xfrm>
+          <a:prstGeom prst="rect">
+            <a:avLst/>
+          </a:prstGeom>
+        </p:spPr>
+        <p:txBody>
+          <a:bodyPr>
+            <a:spAutoFit/>
+          </a:bodyPr>
+          <a:lstStyle/>
+          <a:p>
+            <a:r>
+              <a:rPr lang="en-US" sz="1400" dirty="0" smtClean="0"/>
+              <a:t>https://alkaline-ml.com/pmdarima/auto_examples/example_pipeline.html</a:t>
+            </a:r>
+            <a:endParaRPr lang="ru-RU" sz="1400" dirty="0"/>
+          </a:p>
+        </p:txBody>
+      </p:sp>
+      <p:sp>
+        <p:nvSpPr>
+          <p:cNvPr id="3" name="Объект 2"/>
+          <p:cNvSpPr>
+            <a:spLocks noGrp="1"/>
+          </p:cNvSpPr>
+          <p:nvPr>
+            <p:ph idx="1"/>
+          </p:nvPr>
+        </p:nvSpPr>
+        <p:spPr/>
+        <p:txBody>
+          <a:bodyPr/>
+          <a:lstStyle/>
+          <a:p>
+            <a:endParaRPr lang="ru-RU" dirty="0"/>
+          </a:p>
+        </p:txBody>
+      </p:sp>
+      <p:pic>
+        <p:nvPicPr>
+          <p:cNvPr id="5" name="Рисунок 4"/>
+          <p:cNvPicPr>
+            <a:picLocks noChangeAspect="1"/>
+          </p:cNvPicPr>
+          <p:nvPr/>
+        </p:nvPicPr>
+        <p:blipFill rotWithShape="1">
+          <a:blip r:embed="rId2"/>
+          <a:srcRect b="37123"/>
+          <a:stretch/>
+        </p:blipFill>
+        <p:spPr>
+          <a:xfrm>
+            <a:off x="5981700" y="2508049"/>
+            <a:ext cx="5823307" cy="4171950"/>
+          </a:xfrm>
+          <a:prstGeom prst="rect">
+            <a:avLst/>
+          </a:prstGeom>
+        </p:spPr>
+      </p:pic>
+      <p:pic>
+        <p:nvPicPr>
+          <p:cNvPr id="9" name="Рисунок 8"/>
+          <p:cNvPicPr>
+            <a:picLocks noChangeAspect="1"/>
+          </p:cNvPicPr>
+          <p:nvPr/>
+        </p:nvPicPr>
+        <p:blipFill rotWithShape="1">
+          <a:blip r:embed="rId2"/>
+          <a:srcRect t="63451" r="29012"/>
+          <a:stretch/>
+        </p:blipFill>
+        <p:spPr>
+          <a:xfrm>
+            <a:off x="122312" y="914400"/>
+            <a:ext cx="5765652" cy="3382305"/>
+          </a:xfrm>
+          <a:prstGeom prst="rect">
+            <a:avLst/>
+          </a:prstGeom>
+        </p:spPr>
+      </p:pic>
+    </p:spTree>
+    <p:extLst>
+      <p:ext uri="{BB962C8B-B14F-4D97-AF65-F5344CB8AC3E}">
+        <p14:creationId xmlns:p14="http://schemas.microsoft.com/office/powerpoint/2010/main" val="1591853800"/>
+      </p:ext>
+    </p:extLst>
+  </p:cSld>
+  <p:clrMapOvr>
+    <a:masterClrMapping/>
+  </p:clrMapOvr>
+  <p:timing>
+    <p:tnLst>
+      <p:par>
+        <p:cTn id="1" dur="indefinite" restart="never" nodeType="tmRoot"/>
+      </p:par>
+    </p:tnLst>
+  </p:timing>
+</p:sld>
+</file>
+
+<file path=ppt/slides/slide19.xml><?xml version="1.0" encoding="utf-8"?>
+<p:sld xmlns:a="http://schemas.openxmlformats.org/drawingml/2006/main" xmlns:r="http://schemas.openxmlformats.org/officeDocument/2006/relationships" xmlns:p="http://schemas.openxmlformats.org/presentationml/2006/main">
+  <p:cSld>
+    <p:spTree>
+      <p:nvGrpSpPr>
+        <p:cNvPr id="1" name=""/>
+        <p:cNvGrpSpPr/>
+        <p:nvPr/>
+      </p:nvGrpSpPr>
+      <p:grpSpPr>
+        <a:xfrm>
+          <a:off x="0" y="0"/>
+          <a:ext cx="0" cy="0"/>
+          <a:chOff x="0" y="0"/>
+          <a:chExt cx="0" cy="0"/>
+        </a:xfrm>
+      </p:grpSpPr>
+      <p:sp>
+        <p:nvSpPr>
+          <p:cNvPr id="2" name="Заголовок 1">
+            <a:extLst>
+              <a:ext uri="{FF2B5EF4-FFF2-40B4-BE49-F238E27FC236}">
+                <a16:creationId xmlns:a16="http://schemas.microsoft.com/office/drawing/2014/main" id="{9AE3A209-E86B-43CF-A4CE-1917FCF9C1BD}"/>
+              </a:ext>
+            </a:extLst>
+          </p:cNvPr>
+          <p:cNvSpPr>
+            <a:spLocks noGrp="1"/>
+          </p:cNvSpPr>
+          <p:nvPr>
+            <p:ph type="ctrTitle"/>
+          </p:nvPr>
+        </p:nvSpPr>
+        <p:spPr>
+          <a:xfrm>
+            <a:off x="1259080" y="2371415"/>
+            <a:ext cx="10932920" cy="3760934"/>
+          </a:xfrm>
+        </p:spPr>
+        <p:txBody>
+          <a:bodyPr>
+            <a:normAutofit fontScale="90000"/>
+          </a:bodyPr>
+          <a:lstStyle/>
+          <a:p>
+            <a:r>
+              <a:rPr lang="ru-RU" sz="8800" b="1" dirty="0"/>
+              <a:t>М</a:t>
+            </a:r>
+            <a:r>
+              <a:rPr lang="en-US" sz="8800" b="1" dirty="0" err="1"/>
+              <a:t>одели</a:t>
+            </a:r>
+            <a:r>
+              <a:rPr lang="en-US" sz="8800" b="1" dirty="0"/>
+              <a:t> </a:t>
+            </a:r>
+            <a:r>
+              <a:rPr lang="ru-RU" sz="8800" b="1" dirty="0"/>
+              <a:t>интегрированной а</a:t>
+            </a:r>
+            <a:r>
+              <a:rPr lang="en-US" sz="8800" b="1" dirty="0" err="1"/>
+              <a:t>вторегресси</a:t>
+            </a:r>
+            <a:r>
+              <a:rPr lang="ru-RU" sz="8800" b="1" dirty="0"/>
+              <a:t>и</a:t>
+            </a:r>
+            <a:r>
+              <a:rPr lang="en-US" sz="8800" b="1" dirty="0"/>
+              <a:t> </a:t>
+            </a:r>
+            <a:br>
+              <a:rPr lang="en-US" sz="8800" b="1" dirty="0"/>
+            </a:br>
+            <a:r>
+              <a:rPr lang="ru-RU" sz="8800" b="1" dirty="0"/>
+              <a:t>с</a:t>
+            </a:r>
+            <a:r>
+              <a:rPr lang="en-US" sz="8800" b="1" dirty="0" err="1"/>
+              <a:t>кользящ</a:t>
+            </a:r>
+            <a:r>
+              <a:rPr lang="ru-RU" sz="8800" b="1" dirty="0"/>
+              <a:t>его</a:t>
+            </a:r>
+            <a:r>
+              <a:rPr lang="en-US" sz="8800" b="1" dirty="0"/>
+              <a:t> </a:t>
+            </a:r>
+            <a:r>
+              <a:rPr lang="en-US" sz="8800" b="1" dirty="0" err="1"/>
+              <a:t>средн</a:t>
+            </a:r>
+            <a:r>
+              <a:rPr lang="ru-RU" sz="8800" b="1" dirty="0"/>
+              <a:t>его</a:t>
+            </a:r>
+            <a:br>
+              <a:rPr lang="ru-RU" sz="8800" b="1" dirty="0"/>
+            </a:br>
+            <a:r>
+              <a:rPr lang="en-US" sz="8800" b="1" dirty="0"/>
+              <a:t>ARIMA </a:t>
+            </a:r>
+          </a:p>
+        </p:txBody>
+      </p:sp>
+    </p:spTree>
+    <p:extLst>
+      <p:ext uri="{BB962C8B-B14F-4D97-AF65-F5344CB8AC3E}">
+        <p14:creationId xmlns:p14="http://schemas.microsoft.com/office/powerpoint/2010/main" val="3884849862"/>
+      </p:ext>
+    </p:extLst>
+  </p:cSld>
+  <p:clrMapOvr>
+    <a:masterClrMapping/>
+  </p:clrMapOvr>
+  <p:timing>
+    <p:tnLst>
+      <p:par>
+        <p:cTn id="1" dur="indefinite" restart="never" nodeType="tmRoot"/>
+      </p:par>
+    </p:tnLst>
+  </p:timing>
+</p:sld>
+</file>
+
 <file path=ppt/slides/slide2.xml><?xml version="1.0" encoding="utf-8"?>
+<p:sld xmlns:a="http://schemas.openxmlformats.org/drawingml/2006/main" xmlns:r="http://schemas.openxmlformats.org/officeDocument/2006/relationships" xmlns:p="http://schemas.openxmlformats.org/presentationml/2006/main">
+  <p:cSld>
+    <p:spTree>
+      <p:nvGrpSpPr>
+        <p:cNvPr id="1" name=""/>
+        <p:cNvGrpSpPr/>
+        <p:nvPr/>
+      </p:nvGrpSpPr>
+      <p:grpSpPr>
+        <a:xfrm>
+          <a:off x="0" y="0"/>
+          <a:ext cx="0" cy="0"/>
+          <a:chOff x="0" y="0"/>
+          <a:chExt cx="0" cy="0"/>
+        </a:xfrm>
+      </p:grpSpPr>
+      <p:sp>
+        <p:nvSpPr>
+          <p:cNvPr id="2" name="Заголовок 1"/>
+          <p:cNvSpPr>
+            <a:spLocks noGrp="1"/>
+          </p:cNvSpPr>
+          <p:nvPr>
+            <p:ph type="title"/>
+          </p:nvPr>
+        </p:nvSpPr>
+        <p:spPr>
+          <a:xfrm>
+            <a:off x="314325" y="365125"/>
+            <a:ext cx="11039475" cy="1325563"/>
+          </a:xfrm>
+        </p:spPr>
+        <p:txBody>
+          <a:bodyPr>
+            <a:normAutofit/>
+          </a:bodyPr>
+          <a:lstStyle/>
+          <a:p>
+            <a:r>
+              <a:rPr lang="ru-RU" b="1" dirty="0" smtClean="0"/>
+              <a:t>М</a:t>
+            </a:r>
+            <a:r>
+              <a:rPr lang="en-US" b="1" dirty="0" err="1" smtClean="0"/>
+              <a:t>одели</a:t>
+            </a:r>
+            <a:r>
+              <a:rPr lang="en-US" b="1" dirty="0" smtClean="0"/>
+              <a:t> </a:t>
+            </a:r>
+            <a:r>
+              <a:rPr lang="ru-RU" b="1" dirty="0" smtClean="0"/>
+              <a:t>а</a:t>
+            </a:r>
+            <a:r>
+              <a:rPr lang="en-US" b="1" dirty="0" err="1" smtClean="0"/>
+              <a:t>вторегресси</a:t>
+            </a:r>
+            <a:r>
+              <a:rPr lang="ru-RU" b="1" dirty="0" smtClean="0"/>
+              <a:t>и</a:t>
+            </a:r>
+            <a:r>
+              <a:rPr lang="en-US" b="1" dirty="0" smtClean="0"/>
+              <a:t> </a:t>
+            </a:r>
+            <a:r>
+              <a:rPr lang="ru-RU" b="1" dirty="0" smtClean="0"/>
+              <a:t>с</a:t>
+            </a:r>
+            <a:r>
+              <a:rPr lang="en-US" b="1" dirty="0" err="1" smtClean="0"/>
+              <a:t>кользящ</a:t>
+            </a:r>
+            <a:r>
+              <a:rPr lang="ru-RU" b="1" dirty="0" smtClean="0"/>
+              <a:t>его</a:t>
+            </a:r>
+            <a:r>
+              <a:rPr lang="en-US" b="1" dirty="0" smtClean="0"/>
+              <a:t> </a:t>
+            </a:r>
+            <a:r>
+              <a:rPr lang="en-US" b="1" dirty="0" err="1" smtClean="0"/>
+              <a:t>средн</a:t>
+            </a:r>
+            <a:r>
+              <a:rPr lang="ru-RU" b="1" dirty="0" smtClean="0"/>
+              <a:t>его</a:t>
+            </a:r>
+            <a:r>
+              <a:rPr lang="en-US" b="1" dirty="0" smtClean="0"/>
+              <a:t> </a:t>
+            </a:r>
+            <a:endParaRPr lang="ru-RU" dirty="0"/>
+          </a:p>
+        </p:txBody>
+      </p:sp>
+      <p:sp>
+        <p:nvSpPr>
+          <p:cNvPr id="3" name="Объект 2"/>
+          <p:cNvSpPr>
+            <a:spLocks noGrp="1"/>
+          </p:cNvSpPr>
+          <p:nvPr>
+            <p:ph idx="1"/>
+          </p:nvPr>
+        </p:nvSpPr>
+        <p:spPr>
+          <a:xfrm>
+            <a:off x="104775" y="1354440"/>
+            <a:ext cx="10515600" cy="4351338"/>
+          </a:xfrm>
+        </p:spPr>
+        <p:txBody>
+          <a:bodyPr/>
+          <a:lstStyle/>
+          <a:p>
+            <a:pPr marL="0" indent="0">
+              <a:buNone/>
+            </a:pPr>
+            <a:r>
+              <a:rPr lang="ru-RU" b="1" dirty="0" smtClean="0"/>
+              <a:t>М</a:t>
+            </a:r>
+            <a:r>
+              <a:rPr lang="en-US" b="1" dirty="0" err="1" smtClean="0"/>
+              <a:t>одели</a:t>
+            </a:r>
+            <a:r>
+              <a:rPr lang="en-US" b="1" dirty="0" smtClean="0"/>
+              <a:t> </a:t>
+            </a:r>
+            <a:r>
+              <a:rPr lang="ru-RU" b="1" dirty="0" smtClean="0"/>
+              <a:t>а</a:t>
+            </a:r>
+            <a:r>
+              <a:rPr lang="en-US" b="1" dirty="0" err="1" smtClean="0"/>
+              <a:t>вторегресси</a:t>
+            </a:r>
+            <a:r>
+              <a:rPr lang="ru-RU" b="1" dirty="0" smtClean="0"/>
+              <a:t>и</a:t>
+            </a:r>
+            <a:r>
+              <a:rPr lang="en-US" b="1" dirty="0" smtClean="0"/>
+              <a:t> </a:t>
+            </a:r>
+            <a:r>
+              <a:rPr lang="ru-RU" b="1" dirty="0" smtClean="0"/>
+              <a:t>с</a:t>
+            </a:r>
+            <a:r>
+              <a:rPr lang="en-US" b="1" dirty="0" err="1" smtClean="0"/>
+              <a:t>кользящ</a:t>
+            </a:r>
+            <a:r>
+              <a:rPr lang="ru-RU" b="1" dirty="0" smtClean="0"/>
+              <a:t>его</a:t>
+            </a:r>
+            <a:r>
+              <a:rPr lang="en-US" b="1" dirty="0" smtClean="0"/>
+              <a:t> </a:t>
+            </a:r>
+            <a:r>
+              <a:rPr lang="en-US" b="1" dirty="0" err="1" smtClean="0"/>
+              <a:t>средн</a:t>
+            </a:r>
+            <a:r>
+              <a:rPr lang="ru-RU" b="1" dirty="0" smtClean="0"/>
+              <a:t>его </a:t>
+            </a:r>
+            <a:r>
+              <a:rPr lang="en-US" b="1" dirty="0" smtClean="0"/>
+              <a:t>(AR(I)MA) </a:t>
+            </a:r>
+            <a:r>
+              <a:rPr lang="ru-RU" b="1" dirty="0" smtClean="0"/>
+              <a:t>остаются </a:t>
+            </a:r>
+            <a:r>
+              <a:rPr lang="ru-RU" b="1" dirty="0" smtClean="0"/>
+              <a:t>главным </a:t>
+            </a:r>
+            <a:r>
+              <a:rPr lang="ru-RU" b="1" dirty="0" err="1" smtClean="0"/>
+              <a:t>бейзлайном</a:t>
+            </a:r>
+            <a:r>
+              <a:rPr lang="ru-RU" b="1" dirty="0" smtClean="0"/>
+              <a:t> в задачах предсказания</a:t>
+            </a:r>
+            <a:endParaRPr lang="ru-RU" dirty="0"/>
+          </a:p>
+        </p:txBody>
+      </p:sp>
+      <p:pic>
+        <p:nvPicPr>
+          <p:cNvPr id="8194" name="Picture 2" descr="Types of Autoregressive Integrated Moving Average (ARIMA) Models"/>
+          <p:cNvPicPr>
+            <a:picLocks noChangeAspect="1" noChangeArrowheads="1"/>
+          </p:cNvPicPr>
+          <p:nvPr/>
+        </p:nvPicPr>
+        <p:blipFill>
+          <a:blip r:embed="rId2">
+            <a:extLst>
+              <a:ext uri="{28A0092B-C50C-407E-A947-70E740481C1C}">
+                <a14:useLocalDpi xmlns:a14="http://schemas.microsoft.com/office/drawing/2010/main" val="0"/>
+              </a:ext>
+            </a:extLst>
+          </a:blip>
+          <a:srcRect/>
+          <a:stretch>
+            <a:fillRect/>
+          </a:stretch>
+        </p:blipFill>
+        <p:spPr bwMode="auto">
+          <a:xfrm>
+            <a:off x="6096000" y="4095249"/>
+            <a:ext cx="6013450" cy="2762751"/>
+          </a:xfrm>
+          <a:prstGeom prst="rect">
+            <a:avLst/>
+          </a:prstGeom>
+          <a:noFill/>
+          <a:extLst>
+            <a:ext uri="{909E8E84-426E-40DD-AFC4-6F175D3DCCD1}">
+              <a14:hiddenFill xmlns:a14="http://schemas.microsoft.com/office/drawing/2010/main">
+                <a:solidFill>
+                  <a:srgbClr val="FFFFFF"/>
+                </a:solidFill>
+              </a14:hiddenFill>
+            </a:ext>
+          </a:extLst>
+        </p:spPr>
+      </p:pic>
+      <p:sp>
+        <p:nvSpPr>
+          <p:cNvPr id="4" name="Прямоугольник 3"/>
+          <p:cNvSpPr/>
+          <p:nvPr/>
+        </p:nvSpPr>
+        <p:spPr>
+          <a:xfrm>
+            <a:off x="0" y="6164703"/>
+            <a:ext cx="6096000" cy="646331"/>
+          </a:xfrm>
+          <a:prstGeom prst="rect">
+            <a:avLst/>
+          </a:prstGeom>
+        </p:spPr>
+        <p:txBody>
+          <a:bodyPr>
+            <a:spAutoFit/>
+          </a:bodyPr>
+          <a:lstStyle/>
+          <a:p>
+            <a:r>
+              <a:rPr lang="en-US" dirty="0" smtClean="0"/>
+              <a:t>A.AR – ARIMA – </a:t>
+            </a:r>
+            <a:r>
+              <a:rPr lang="ru-RU" dirty="0" smtClean="0"/>
+              <a:t>имеет </a:t>
+            </a:r>
+            <a:r>
+              <a:rPr lang="en-US" dirty="0" smtClean="0"/>
+              <a:t>MAPE</a:t>
+            </a:r>
+            <a:r>
+              <a:rPr lang="ru-RU" dirty="0" smtClean="0"/>
+              <a:t> близкую к </a:t>
+            </a:r>
+            <a:r>
+              <a:rPr lang="en-US" dirty="0" smtClean="0"/>
+              <a:t>LLM </a:t>
+            </a:r>
+            <a:r>
+              <a:rPr lang="en-US" dirty="0" err="1" smtClean="0"/>
+              <a:t>Ch</a:t>
+            </a:r>
+            <a:r>
+              <a:rPr lang="en-US" dirty="0" err="1"/>
+              <a:t>r</a:t>
+            </a:r>
+            <a:r>
+              <a:rPr lang="en-US" dirty="0" err="1" smtClean="0"/>
+              <a:t>onos</a:t>
+            </a:r>
+            <a:r>
+              <a:rPr lang="en-US" dirty="0" smtClean="0"/>
+              <a:t> </a:t>
+            </a:r>
+            <a:r>
+              <a:rPr lang="ru-RU" dirty="0" smtClean="0"/>
+              <a:t>на</a:t>
+            </a:r>
+            <a:r>
+              <a:rPr lang="en-US" dirty="0" smtClean="0"/>
+              <a:t> </a:t>
+            </a:r>
+            <a:r>
+              <a:rPr lang="ru-RU" dirty="0" err="1" smtClean="0"/>
+              <a:t>бенчмарке</a:t>
+            </a:r>
+            <a:r>
+              <a:rPr lang="ru-RU" dirty="0" smtClean="0"/>
+              <a:t> </a:t>
+            </a:r>
+            <a:r>
+              <a:rPr lang="en-US" dirty="0" smtClean="0"/>
+              <a:t>GIFT-EVAL</a:t>
+            </a:r>
+            <a:endParaRPr lang="ru-RU" dirty="0"/>
+          </a:p>
+        </p:txBody>
+      </p:sp>
+      <p:pic>
+        <p:nvPicPr>
+          <p:cNvPr id="8196" name="Picture 4" descr="https://www.salesforce.com/blog/wp-content/uploads/sites/2/2024/11/image_df344c.png"/>
+          <p:cNvPicPr>
+            <a:picLocks noChangeAspect="1" noChangeArrowheads="1"/>
+          </p:cNvPicPr>
+          <p:nvPr/>
+        </p:nvPicPr>
+        <p:blipFill>
+          <a:blip r:embed="rId3">
+            <a:extLst>
+              <a:ext uri="{28A0092B-C50C-407E-A947-70E740481C1C}">
+                <a14:useLocalDpi xmlns:a14="http://schemas.microsoft.com/office/drawing/2010/main" val="0"/>
+              </a:ext>
+            </a:extLst>
+          </a:blip>
+          <a:srcRect/>
+          <a:stretch>
+            <a:fillRect/>
+          </a:stretch>
+        </p:blipFill>
+        <p:spPr bwMode="auto">
+          <a:xfrm>
+            <a:off x="752474" y="2149613"/>
+            <a:ext cx="10963276" cy="4015300"/>
+          </a:xfrm>
+          <a:prstGeom prst="rect">
+            <a:avLst/>
+          </a:prstGeom>
+          <a:noFill/>
+          <a:extLst>
+            <a:ext uri="{909E8E84-426E-40DD-AFC4-6F175D3DCCD1}">
+              <a14:hiddenFill xmlns:a14="http://schemas.microsoft.com/office/drawing/2010/main">
+                <a:solidFill>
+                  <a:srgbClr val="FFFFFF"/>
+                </a:solidFill>
+              </a14:hiddenFill>
+            </a:ext>
+          </a:extLst>
+        </p:spPr>
+      </p:pic>
+      <p:sp>
+        <p:nvSpPr>
+          <p:cNvPr id="5" name="Прямоугольник 4"/>
+          <p:cNvSpPr/>
+          <p:nvPr/>
+        </p:nvSpPr>
+        <p:spPr>
+          <a:xfrm>
+            <a:off x="6234112" y="6333979"/>
+            <a:ext cx="6096000" cy="307777"/>
+          </a:xfrm>
+          <a:prstGeom prst="rect">
+            <a:avLst/>
+          </a:prstGeom>
+        </p:spPr>
+        <p:txBody>
+          <a:bodyPr>
+            <a:spAutoFit/>
+          </a:bodyPr>
+          <a:lstStyle/>
+          <a:p>
+            <a:r>
+              <a:rPr lang="ru-RU" sz="1400" dirty="0" smtClean="0"/>
+              <a:t>https://www.salesforce.com/blog/gift-eval-time-series-benchmark/</a:t>
+            </a:r>
+            <a:endParaRPr lang="ru-RU" sz="1400" dirty="0"/>
+          </a:p>
+        </p:txBody>
+      </p:sp>
+    </p:spTree>
+    <p:extLst>
+      <p:ext uri="{BB962C8B-B14F-4D97-AF65-F5344CB8AC3E}">
+        <p14:creationId xmlns:p14="http://schemas.microsoft.com/office/powerpoint/2010/main" val="3603978810"/>
+      </p:ext>
+    </p:extLst>
+  </p:cSld>
+  <p:clrMapOvr>
+    <a:masterClrMapping/>
+  </p:clrMapOvr>
+</p:sld>
+</file>
+
+<file path=ppt/slides/slide20.xml><?xml version="1.0" encoding="utf-8"?>
+<p:sld xmlns:a="http://schemas.openxmlformats.org/drawingml/2006/main" xmlns:r="http://schemas.openxmlformats.org/officeDocument/2006/relationships" xmlns:p="http://schemas.openxmlformats.org/presentationml/2006/main">
+  <p:cSld>
+    <p:spTree>
+      <p:nvGrpSpPr>
+        <p:cNvPr id="1" name=""/>
+        <p:cNvGrpSpPr/>
+        <p:nvPr/>
+      </p:nvGrpSpPr>
+      <p:grpSpPr>
+        <a:xfrm>
+          <a:off x="0" y="0"/>
+          <a:ext cx="0" cy="0"/>
+          <a:chOff x="0" y="0"/>
+          <a:chExt cx="0" cy="0"/>
+        </a:xfrm>
+      </p:grpSpPr>
+      <p:sp>
+        <p:nvSpPr>
+          <p:cNvPr id="2" name="Заголовок 1">
+            <a:extLst>
+              <a:ext uri="{FF2B5EF4-FFF2-40B4-BE49-F238E27FC236}">
+                <a16:creationId xmlns:a16="http://schemas.microsoft.com/office/drawing/2014/main" id="{5DBA10D1-E2DF-4CAB-A0B5-AD303DF5644B}"/>
+              </a:ext>
+            </a:extLst>
+          </p:cNvPr>
+          <p:cNvSpPr>
+            <a:spLocks noGrp="1"/>
+          </p:cNvSpPr>
+          <p:nvPr>
+            <p:ph type="title"/>
+          </p:nvPr>
+        </p:nvSpPr>
+        <p:spPr>
+          <a:xfrm>
+            <a:off x="276225" y="365125"/>
+            <a:ext cx="11077575" cy="827181"/>
+          </a:xfrm>
+        </p:spPr>
+        <p:txBody>
+          <a:bodyPr>
+            <a:noAutofit/>
+          </a:bodyPr>
+          <a:lstStyle/>
+          <a:p>
+            <a:pPr algn="ctr"/>
+            <a:r>
+              <a:rPr lang="ru-RU" sz="3600" b="1" dirty="0"/>
+              <a:t>М</a:t>
+            </a:r>
+            <a:r>
+              <a:rPr lang="en-US" sz="3600" b="1" dirty="0" err="1"/>
+              <a:t>одели</a:t>
+            </a:r>
+            <a:r>
+              <a:rPr lang="ru-RU" sz="3600" b="1" dirty="0"/>
+              <a:t> интегрированной</a:t>
+            </a:r>
+            <a:r>
+              <a:rPr lang="en-US" sz="3600" b="1" dirty="0"/>
+              <a:t> </a:t>
+            </a:r>
+            <a:r>
+              <a:rPr lang="ru-RU" sz="3600" b="1" dirty="0"/>
+              <a:t>а</a:t>
+            </a:r>
+            <a:r>
+              <a:rPr lang="en-US" sz="3600" b="1" dirty="0" err="1"/>
+              <a:t>вторегресси</a:t>
+            </a:r>
+            <a:r>
+              <a:rPr lang="ru-RU" sz="3600" b="1" dirty="0"/>
+              <a:t> -</a:t>
+            </a:r>
+            <a:r>
+              <a:rPr lang="en-US" sz="3600" b="1" dirty="0"/>
+              <a:t> </a:t>
+            </a:r>
+            <a:r>
+              <a:rPr lang="ru-RU" sz="3600" b="1" dirty="0"/>
+              <a:t>с</a:t>
+            </a:r>
+            <a:r>
+              <a:rPr lang="en-US" sz="3600" b="1" dirty="0" err="1"/>
+              <a:t>кользящ</a:t>
+            </a:r>
+            <a:r>
+              <a:rPr lang="ru-RU" sz="3600" b="1" dirty="0"/>
+              <a:t>его</a:t>
+            </a:r>
+            <a:r>
+              <a:rPr lang="en-US" sz="3600" b="1" dirty="0"/>
+              <a:t> </a:t>
+            </a:r>
+            <a:r>
+              <a:rPr lang="en-US" sz="3600" b="1" dirty="0" err="1"/>
+              <a:t>средн</a:t>
+            </a:r>
+            <a:r>
+              <a:rPr lang="ru-RU" sz="3600" b="1" dirty="0"/>
+              <a:t>его </a:t>
+            </a:r>
+            <a:r>
+              <a:rPr lang="en-US" sz="3600" b="1" dirty="0"/>
+              <a:t>(ARIMA)</a:t>
+            </a:r>
+          </a:p>
+        </p:txBody>
+      </p:sp>
+      <p:sp>
+        <p:nvSpPr>
+          <p:cNvPr id="3" name="Объект 2">
+            <a:extLst>
+              <a:ext uri="{FF2B5EF4-FFF2-40B4-BE49-F238E27FC236}">
+                <a16:creationId xmlns:a16="http://schemas.microsoft.com/office/drawing/2014/main" id="{19D767B6-15E9-44FE-83F3-68423D4C12D7}"/>
+              </a:ext>
+            </a:extLst>
+          </p:cNvPr>
+          <p:cNvSpPr>
+            <a:spLocks noGrp="1"/>
+          </p:cNvSpPr>
+          <p:nvPr>
+            <p:ph idx="1"/>
+          </p:nvPr>
+        </p:nvSpPr>
+        <p:spPr>
+          <a:xfrm>
+            <a:off x="479612" y="1279188"/>
+            <a:ext cx="11232776" cy="5168266"/>
+          </a:xfrm>
+        </p:spPr>
+        <p:txBody>
+          <a:bodyPr>
+            <a:normAutofit/>
+          </a:bodyPr>
+          <a:lstStyle/>
+          <a:p>
+            <a:pPr algn="l" rtl="0">
+              <a:lnSpc>
+                <a:spcPct val="100000"/>
+              </a:lnSpc>
+            </a:pPr>
+            <a:r>
+              <a:rPr lang="en-US" sz="2400" dirty="0"/>
+              <a:t>Основным недостатком процесса ARMA в ранее описанной форме является </a:t>
+            </a:r>
+            <a:r>
+              <a:rPr lang="en-US" sz="2400" dirty="0" err="1"/>
+              <a:t>внутреннее</a:t>
+            </a:r>
+            <a:r>
+              <a:rPr lang="en-US" sz="2400" dirty="0"/>
+              <a:t> </a:t>
+            </a:r>
+            <a:r>
+              <a:rPr lang="en-US" sz="2400" dirty="0" err="1"/>
+              <a:t>требование</a:t>
+            </a:r>
+            <a:r>
+              <a:rPr lang="en-US" sz="2400" dirty="0"/>
+              <a:t> </a:t>
+            </a:r>
+            <a:r>
+              <a:rPr lang="ru-RU" sz="2400" dirty="0"/>
+              <a:t>стационарности</a:t>
+            </a:r>
+            <a:r>
+              <a:rPr lang="en-US" sz="2400" dirty="0"/>
+              <a:t>, которое лежит в процедуре поиска коэффициентов. </a:t>
+            </a:r>
+            <a:endParaRPr lang="en-US" sz="2400" dirty="0" smtClean="0"/>
+          </a:p>
+          <a:p>
+            <a:pPr lvl="1">
+              <a:lnSpc>
+                <a:spcPct val="100000"/>
+              </a:lnSpc>
+            </a:pPr>
+            <a:r>
+              <a:rPr lang="ru-RU" sz="2000" dirty="0" smtClean="0"/>
+              <a:t>Следующее значение всегда задается набором </a:t>
+            </a:r>
+            <a:r>
+              <a:rPr lang="en-US" sz="2000" dirty="0" smtClean="0"/>
+              <a:t>(</a:t>
+            </a:r>
+            <a:r>
+              <a:rPr lang="en-US" sz="2000" dirty="0" err="1" smtClean="0"/>
+              <a:t>p,q</a:t>
+            </a:r>
+            <a:r>
+              <a:rPr lang="en-US" sz="2000" dirty="0" smtClean="0"/>
+              <a:t>) </a:t>
+            </a:r>
+            <a:r>
+              <a:rPr lang="ru-RU" sz="2000" dirty="0" smtClean="0"/>
+              <a:t>предыдущих значений и их ошибок. Это значит что паттерны во ВР всегда должны быть одни и </a:t>
+            </a:r>
+            <a:r>
+              <a:rPr lang="ru-RU" sz="2000" dirty="0" err="1" smtClean="0"/>
+              <a:t>теже</a:t>
+            </a:r>
+            <a:r>
+              <a:rPr lang="ru-RU" sz="2000" dirty="0" smtClean="0"/>
+              <a:t>.</a:t>
+            </a:r>
+            <a:endParaRPr lang="en-US" sz="2000" dirty="0"/>
+          </a:p>
+          <a:p>
+            <a:pPr algn="l" rtl="0">
+              <a:lnSpc>
+                <a:spcPct val="100000"/>
+              </a:lnSpc>
+            </a:pPr>
+            <a:r>
+              <a:rPr lang="ru-RU" sz="2400" dirty="0" smtClean="0"/>
+              <a:t>Чем </a:t>
+            </a:r>
+            <a:r>
+              <a:rPr lang="ru-RU" sz="2400" dirty="0"/>
+              <a:t>менее стационарный ряд – тем больше ошибка и тем больше она растет при увеличении горизонта прогнозирования</a:t>
+            </a:r>
+            <a:r>
+              <a:rPr lang="ru-RU" sz="2400" dirty="0" smtClean="0"/>
+              <a:t>.</a:t>
+            </a:r>
+          </a:p>
+          <a:p>
+            <a:pPr algn="l" rtl="0">
+              <a:lnSpc>
+                <a:spcPct val="100000"/>
+              </a:lnSpc>
+            </a:pPr>
+            <a:r>
+              <a:rPr lang="ru-RU" sz="2400" dirty="0" smtClean="0"/>
+              <a:t>Если ряд </a:t>
+            </a:r>
+            <a:r>
+              <a:rPr lang="en-US" sz="2400" dirty="0" smtClean="0"/>
+              <a:t>TS-</a:t>
+            </a:r>
+            <a:r>
+              <a:rPr lang="ru-RU" sz="2400" dirty="0" smtClean="0"/>
+              <a:t>стационарный (по </a:t>
+            </a:r>
+            <a:r>
+              <a:rPr lang="ru-RU" sz="2400" dirty="0" err="1" smtClean="0"/>
+              <a:t>отн</a:t>
+            </a:r>
+            <a:r>
+              <a:rPr lang="ru-RU" sz="2400" dirty="0" smtClean="0"/>
+              <a:t>. К тренду и сезонности), то можно попытаться их убрать и аппроксимировать то что осталось </a:t>
+            </a:r>
+            <a:r>
+              <a:rPr lang="en-US" sz="2400" dirty="0" smtClean="0"/>
+              <a:t>ARMA</a:t>
+            </a:r>
+          </a:p>
+          <a:p>
+            <a:pPr>
+              <a:lnSpc>
+                <a:spcPct val="100000"/>
+              </a:lnSpc>
+            </a:pPr>
+            <a:r>
+              <a:rPr lang="ru-RU" sz="2400" dirty="0" smtClean="0"/>
+              <a:t>Если ряд </a:t>
+            </a:r>
+            <a:r>
+              <a:rPr lang="en-US" sz="2400" dirty="0" smtClean="0"/>
+              <a:t>DS-</a:t>
+            </a:r>
+            <a:r>
+              <a:rPr lang="ru-RU" sz="2400" dirty="0" smtClean="0"/>
+              <a:t>стационарный (</a:t>
+            </a:r>
+            <a:r>
+              <a:rPr lang="ru-RU" sz="2400" dirty="0" smtClean="0"/>
+              <a:t>разности стационарны</a:t>
+            </a:r>
+            <a:r>
+              <a:rPr lang="ru-RU" sz="2400" dirty="0" smtClean="0"/>
+              <a:t>), то можно попытаться встроить этот процесс в модель </a:t>
+            </a:r>
+            <a:r>
+              <a:rPr lang="en-US" sz="2400" dirty="0" smtClean="0"/>
+              <a:t>ARMA</a:t>
+            </a:r>
+            <a:r>
+              <a:rPr lang="ru-RU" sz="2400" dirty="0" smtClean="0"/>
+              <a:t> </a:t>
+            </a:r>
+            <a:endParaRPr lang="en-US" sz="2400" dirty="0" smtClean="0"/>
+          </a:p>
+          <a:p>
+            <a:pPr algn="l" rtl="0">
+              <a:lnSpc>
+                <a:spcPct val="100000"/>
+              </a:lnSpc>
+            </a:pPr>
+            <a:endParaRPr lang="en-US" sz="2400" dirty="0"/>
+          </a:p>
+        </p:txBody>
+      </p:sp>
+    </p:spTree>
+    <p:extLst>
+      <p:ext uri="{BB962C8B-B14F-4D97-AF65-F5344CB8AC3E}">
+        <p14:creationId xmlns:p14="http://schemas.microsoft.com/office/powerpoint/2010/main" val="1720655368"/>
+      </p:ext>
+    </p:extLst>
+  </p:cSld>
+  <p:clrMapOvr>
+    <a:masterClrMapping/>
+  </p:clrMapOvr>
+  <p:timing>
+    <p:tnLst>
+      <p:par>
+        <p:cTn id="1" dur="indefinite" restart="never" nodeType="tmRoot"/>
+      </p:par>
+    </p:tnLst>
+  </p:timing>
+</p:sld>
+</file>
+
+<file path=ppt/slides/slide3.xml><?xml version="1.0" encoding="utf-8"?>
 <p:sld xmlns:a="http://schemas.openxmlformats.org/drawingml/2006/main" xmlns:r="http://schemas.openxmlformats.org/officeDocument/2006/relationships" xmlns:p="http://schemas.openxmlformats.org/presentationml/2006/main">
   <p:cSld>
     <p:spTree>
@@ -3370,7 +9579,7 @@
 </p:sld>
 </file>
 
-<file path=ppt/slides/slide3.xml><?xml version="1.0" encoding="utf-8"?>
+<file path=ppt/slides/slide4.xml><?xml version="1.0" encoding="utf-8"?>
 <p:sld xmlns:a="http://schemas.openxmlformats.org/drawingml/2006/main" xmlns:r="http://schemas.openxmlformats.org/officeDocument/2006/relationships" xmlns:p="http://schemas.openxmlformats.org/presentationml/2006/main">
   <p:cSld>
     <p:spTree>
@@ -4312,7 +10521,7 @@
 </p:sld>
 </file>
 
-<file path=ppt/slides/slide4.xml><?xml version="1.0" encoding="utf-8"?>
+<file path=ppt/slides/slide5.xml><?xml version="1.0" encoding="utf-8"?>
 <p:sld xmlns:a="http://schemas.openxmlformats.org/drawingml/2006/main" xmlns:r="http://schemas.openxmlformats.org/officeDocument/2006/relationships" xmlns:p="http://schemas.openxmlformats.org/presentationml/2006/main">
   <p:cSld>
     <p:spTree>
@@ -4740,19 +10949,19 @@
               <a:p>
                 <a:pPr algn="just"/>
                 <a:r>
-                  <a:rPr lang="ru-RU" sz="2400" dirty="0" smtClean="0"/>
+                  <a:rPr lang="ru-RU" sz="2400" b="1" dirty="0" smtClean="0"/>
                   <a:t>Теорема </a:t>
                 </a:r>
                 <a:r>
-                  <a:rPr lang="ru-RU" sz="2400" dirty="0" err="1" smtClean="0"/>
+                  <a:rPr lang="ru-RU" sz="2400" b="1" dirty="0" err="1" smtClean="0"/>
                   <a:t>Вольда</a:t>
                 </a:r>
                 <a:r>
-                  <a:rPr lang="ru-RU" sz="2400" dirty="0" smtClean="0"/>
+                  <a:rPr lang="ru-RU" sz="2400" b="1" dirty="0" smtClean="0"/>
                   <a:t>.</a:t>
                 </a:r>
                 <a:r>
-                  <a:rPr lang="en-US" sz="2400" dirty="0" smtClean="0"/>
+                  <a:rPr lang="en-US" sz="2400" b="1" dirty="0" smtClean="0"/>
                   <a:t> </a:t>
                 </a:r>
                 <a:r>
@@ -4789,164 +10998,181 @@
                 </a:r>
               </a:p>
               <a:p>
-                <a:pPr marL="0" indent="0">
+                <a:pPr marL="0" indent="0" algn="ctr">
                   <a:buNone/>
                 </a:pPr>
                 <a14:m>
-                  <m:oMathPara xmlns:m="http://schemas.openxmlformats.org/officeDocument/2006/math">
-                    <m:oMathParaPr>
-                      <m:jc m:val="centerGroup"/>
-                    </m:oMathParaPr>
-                    <m:oMath xmlns:m="http://schemas.openxmlformats.org/officeDocument/2006/math">
-                      <m:sSub>
-                        <m:sSubPr>
-                          <m:ctrlPr>
-                            <a:rPr lang="en-US" sz="2200" i="1">
-                              <a:latin typeface="Cambria Math" panose="02040503050406030204" pitchFamily="18" charset="0"/>
-                            </a:rPr>
-                          </m:ctrlPr>
-                        </m:sSubPr>
-                        <m:e>
-                          <m:r>
-                            <a:rPr lang="en-US" sz="2200" i="1">
-                              <a:latin typeface="Cambria Math" panose="02040503050406030204" pitchFamily="18" charset="0"/>
-                            </a:rPr>
-                            <m:t>𝑦</m:t>
-                          </m:r>
-                        </m:e>
-                        <m:sub>
-                          <m:r>
-                            <a:rPr lang="en-US" sz="2200" i="1">
-                              <a:latin typeface="Cambria Math" panose="02040503050406030204" pitchFamily="18" charset="0"/>
-                            </a:rPr>
-                            <m:t>𝑛</m:t>
-                          </m:r>
-                        </m:sub>
-                      </m:sSub>
-                      <m:r>
-                        <a:rPr lang="en-US" sz="2200" i="1">
-                          <a:latin typeface="Cambria Math" panose="02040503050406030204" pitchFamily="18" charset="0"/>
-                        </a:rPr>
-                        <m:t>=</m:t>
-                      </m:r>
-                      <m:r>
-                        <a:rPr lang="en-US" sz="2200" i="1">
-                          <a:latin typeface="Cambria Math" panose="02040503050406030204" pitchFamily="18" charset="0"/>
-                        </a:rPr>
-                        <m:t>𝑐</m:t>
-                      </m:r>
-                      <m:r>
-                        <a:rPr lang="en-US" sz="2200" i="1">
-                          <a:latin typeface="Cambria Math" panose="02040503050406030204" pitchFamily="18" charset="0"/>
-                        </a:rPr>
-                        <m:t>+</m:t>
-                      </m:r>
-                      <m:nary>
-                        <m:naryPr>
-                          <m:chr m:val="∑"/>
-                          <m:limLoc m:val="undOvr"/>
-                          <m:ctrlPr>
-                            <a:rPr lang="en-US" sz="2200" i="1">
-                              <a:latin typeface="Cambria Math" panose="02040503050406030204" pitchFamily="18" charset="0"/>
-                            </a:rPr>
-                          </m:ctrlPr>
-                        </m:naryPr>
-                        <m:sub>
-                          <m:r>
-                            <a:rPr lang="en-US" sz="2200" i="1">
-                              <a:latin typeface="Cambria Math" panose="02040503050406030204" pitchFamily="18" charset="0"/>
-                            </a:rPr>
-                            <m:t>𝑖</m:t>
-                          </m:r>
-                          <m:r>
-                            <a:rPr lang="en-US" sz="2200" i="1">
-                              <a:latin typeface="Cambria Math" panose="02040503050406030204" pitchFamily="18" charset="0"/>
-                            </a:rPr>
-                            <m:t>=0</m:t>
-                          </m:r>
-                        </m:sub>
-                        <m:sup>
-                          <m:r>
-                            <a:rPr lang="en-US" sz="2200" i="1">
-                              <a:latin typeface="Cambria Math" panose="02040503050406030204" pitchFamily="18" charset="0"/>
-                            </a:rPr>
-                            <m:t>𝑞</m:t>
-                          </m:r>
-                        </m:sup>
-                        <m:e>
-                          <m:sSub>
-                            <m:sSubPr>
-                              <m:ctrlPr>
-                                <a:rPr lang="en-US" sz="2200" i="1">
-                                  <a:latin typeface="Cambria Math" panose="02040503050406030204" pitchFamily="18" charset="0"/>
-                                </a:rPr>
-                              </m:ctrlPr>
-                            </m:sSubPr>
-                            <m:e>
-                              <m:r>
-                                <a:rPr lang="en-US" sz="2200" i="1">
-                                  <a:latin typeface="Cambria Math" panose="02040503050406030204" pitchFamily="18" charset="0"/>
-                                </a:rPr>
-                                <m:t>𝛽</m:t>
-                              </m:r>
-                            </m:e>
-                            <m:sub>
-                              <m:r>
-                                <a:rPr lang="en-US" sz="2200" i="1">
-                                  <a:latin typeface="Cambria Math" panose="02040503050406030204" pitchFamily="18" charset="0"/>
-                                </a:rPr>
-                                <m:t>𝑖</m:t>
-                              </m:r>
-                            </m:sub>
-                          </m:sSub>
-                          <m:sSub>
-                            <m:sSubPr>
-                              <m:ctrlPr>
-                                <a:rPr lang="en-US" sz="2200" i="1">
-                                  <a:latin typeface="Cambria Math" panose="02040503050406030204" pitchFamily="18" charset="0"/>
-                                </a:rPr>
-                              </m:ctrlPr>
-                            </m:sSubPr>
-                            <m:e>
-                              <m:r>
-                                <a:rPr lang="en-US" sz="2200" i="1">
-                                  <a:latin typeface="Cambria Math" panose="02040503050406030204" pitchFamily="18" charset="0"/>
-                                </a:rPr>
-                                <m:t>𝜀</m:t>
-                              </m:r>
-                            </m:e>
-                            <m:sub>
-                              <m:r>
-                                <a:rPr lang="en-US" sz="2200" i="1">
-                                  <a:latin typeface="Cambria Math" panose="02040503050406030204" pitchFamily="18" charset="0"/>
-                                </a:rPr>
-                                <m:t>𝑛</m:t>
-                              </m:r>
-                              <m:r>
-                                <a:rPr lang="en-US" sz="2200" i="1">
-                                  <a:latin typeface="Cambria Math" panose="02040503050406030204" pitchFamily="18" charset="0"/>
-                                </a:rPr>
-                                <m:t>−</m:t>
-                              </m:r>
-                              <m:r>
-                                <a:rPr lang="en-US" sz="2200" i="1">
-                                  <a:latin typeface="Cambria Math" panose="02040503050406030204" pitchFamily="18" charset="0"/>
-                                </a:rPr>
-                                <m:t>𝑖</m:t>
-                              </m:r>
-                            </m:sub>
-                          </m:sSub>
-                        </m:e>
-                      </m:nary>
-                      <m:r>
-                        <a:rPr lang="en-US" sz="2200" i="1">
-                          <a:latin typeface="Cambria Math" panose="02040503050406030204" pitchFamily="18" charset="0"/>
-                        </a:rPr>
-                        <m:t>,</m:t>
-                      </m:r>
-                    </m:oMath>
-                  </m:oMathPara>
+                  <m:oMath xmlns:m="http://schemas.openxmlformats.org/officeDocument/2006/math">
+                    <m:sSub>
+                      <m:sSubPr>
+                        <m:ctrlPr>
+                          <a:rPr lang="en-US" sz="2200" i="1">
+                            <a:latin typeface="Cambria Math" panose="02040503050406030204" pitchFamily="18" charset="0"/>
+                          </a:rPr>
+                        </m:ctrlPr>
+                      </m:sSubPr>
+                      <m:e>
+                        <m:acc>
+                          <m:accPr>
+                            <m:chr m:val="̂"/>
+                            <m:ctrlPr>
+                              <a:rPr lang="en-US" sz="2200" b="0" i="1" smtClean="0">
+                                <a:latin typeface="Cambria Math" panose="02040503050406030204" pitchFamily="18" charset="0"/>
+                              </a:rPr>
+                            </m:ctrlPr>
+                          </m:accPr>
+                          <m:e>
+                            <m:r>
+                              <a:rPr lang="en-US" sz="2200" b="0" i="1" smtClean="0">
+                                <a:latin typeface="Cambria Math" panose="02040503050406030204" pitchFamily="18" charset="0"/>
+                              </a:rPr>
+                              <m:t>𝑦</m:t>
+                            </m:r>
+                          </m:e>
+                        </m:acc>
+                      </m:e>
+                      <m:sub>
+                        <m:r>
+                          <a:rPr lang="en-US" sz="2200" i="1">
+                            <a:latin typeface="Cambria Math" panose="02040503050406030204" pitchFamily="18" charset="0"/>
+                          </a:rPr>
+                          <m:t>𝑛</m:t>
+                        </m:r>
+                        <m:r>
+                          <a:rPr lang="en-US" sz="2200" b="0" i="1" smtClean="0">
+                            <a:latin typeface="Cambria Math" panose="02040503050406030204" pitchFamily="18" charset="0"/>
+                          </a:rPr>
+                          <m:t>+1</m:t>
+                        </m:r>
+                      </m:sub>
+                    </m:sSub>
+                    <m:r>
+                      <a:rPr lang="en-US" sz="2200" i="1">
+                        <a:latin typeface="Cambria Math" panose="02040503050406030204" pitchFamily="18" charset="0"/>
+                      </a:rPr>
+                      <m:t>=</m:t>
+                    </m:r>
+                    <m:r>
+                      <a:rPr lang="en-US" sz="2200" i="1" smtClean="0">
+                        <a:latin typeface="Cambria Math" panose="02040503050406030204" pitchFamily="18" charset="0"/>
+                      </a:rPr>
+                      <m:t>𝑐</m:t>
+                    </m:r>
+                    <m:r>
+                      <a:rPr lang="en-US" sz="2200" i="1" smtClean="0">
+                        <a:latin typeface="Cambria Math" panose="02040503050406030204" pitchFamily="18" charset="0"/>
+                      </a:rPr>
+                      <m:t>+</m:t>
+                    </m:r>
+                    <m:nary>
+                      <m:naryPr>
+                        <m:chr m:val="∑"/>
+                        <m:limLoc m:val="undOvr"/>
+                        <m:ctrlPr>
+                          <a:rPr lang="en-US" sz="2200" i="1">
+                            <a:latin typeface="Cambria Math" panose="02040503050406030204" pitchFamily="18" charset="0"/>
+                          </a:rPr>
+                        </m:ctrlPr>
+                      </m:naryPr>
+                      <m:sub>
+                        <m:r>
+                          <a:rPr lang="en-US" sz="2200" i="1">
+                            <a:latin typeface="Cambria Math" panose="02040503050406030204" pitchFamily="18" charset="0"/>
+                          </a:rPr>
+                          <m:t>𝑖</m:t>
+                        </m:r>
+                        <m:r>
+                          <a:rPr lang="en-US" sz="2200" i="1">
+                            <a:latin typeface="Cambria Math" panose="02040503050406030204" pitchFamily="18" charset="0"/>
+                          </a:rPr>
+                          <m:t>=0</m:t>
+                        </m:r>
+                      </m:sub>
+                      <m:sup>
+                        <m:r>
+                          <a:rPr lang="en-US" sz="2200" i="1">
+                            <a:latin typeface="Cambria Math" panose="02040503050406030204" pitchFamily="18" charset="0"/>
+                          </a:rPr>
+                          <m:t>𝑞</m:t>
+                        </m:r>
+                      </m:sup>
+                      <m:e>
+                        <m:sSub>
+                          <m:sSubPr>
+                            <m:ctrlPr>
+                              <a:rPr lang="en-US" sz="2200" i="1">
+                                <a:latin typeface="Cambria Math" panose="02040503050406030204" pitchFamily="18" charset="0"/>
+                              </a:rPr>
+                            </m:ctrlPr>
+                          </m:sSubPr>
+                          <m:e>
+                            <m:r>
+                              <a:rPr lang="en-US" sz="2200" i="1">
+                                <a:latin typeface="Cambria Math" panose="02040503050406030204" pitchFamily="18" charset="0"/>
+                              </a:rPr>
+                              <m:t>𝛽</m:t>
+                            </m:r>
+                          </m:e>
+                          <m:sub>
+                            <m:r>
+                              <a:rPr lang="en-US" sz="2200" i="1">
+                                <a:latin typeface="Cambria Math" panose="02040503050406030204" pitchFamily="18" charset="0"/>
+                              </a:rPr>
+                              <m:t>𝑖</m:t>
+                            </m:r>
+                          </m:sub>
+                        </m:sSub>
+                        <m:sSub>
+                          <m:sSubPr>
+                            <m:ctrlPr>
+                              <a:rPr lang="en-US" sz="2200" i="1">
+                                <a:latin typeface="Cambria Math" panose="02040503050406030204" pitchFamily="18" charset="0"/>
+                              </a:rPr>
+                            </m:ctrlPr>
+                          </m:sSubPr>
+                          <m:e>
+                            <m:r>
+                              <a:rPr lang="en-US" sz="2200" i="1">
+                                <a:latin typeface="Cambria Math" panose="02040503050406030204" pitchFamily="18" charset="0"/>
+                              </a:rPr>
+                              <m:t>𝜀</m:t>
+                            </m:r>
+                          </m:e>
+                          <m:sub>
+                            <m:r>
+                              <a:rPr lang="en-US" sz="2200" i="1">
+                                <a:latin typeface="Cambria Math" panose="02040503050406030204" pitchFamily="18" charset="0"/>
+                              </a:rPr>
+                              <m:t>𝑛</m:t>
+                            </m:r>
+                            <m:r>
+                              <a:rPr lang="en-US" sz="2200" i="1">
+                                <a:latin typeface="Cambria Math" panose="02040503050406030204" pitchFamily="18" charset="0"/>
+                              </a:rPr>
+                              <m:t>−</m:t>
+                            </m:r>
+                            <m:r>
+                              <a:rPr lang="en-US" sz="2200" i="1">
+                                <a:latin typeface="Cambria Math" panose="02040503050406030204" pitchFamily="18" charset="0"/>
+                              </a:rPr>
+                              <m:t>𝑖</m:t>
+                            </m:r>
+                          </m:sub>
+                        </m:sSub>
+                      </m:e>
+                    </m:nary>
+                    <m:r>
+                      <a:rPr lang="en-US" sz="2200" i="1">
+                        <a:latin typeface="Cambria Math" panose="02040503050406030204" pitchFamily="18" charset="0"/>
+                      </a:rPr>
+                      <m:t>,</m:t>
+                    </m:r>
+                  </m:oMath>
                 </a14:m>
+                <a:r>
+                  <a:rPr lang="en-US" sz="2200" dirty="0" smtClean="0"/>
+                  <a:t> </a:t>
+                </a:r>
                 <a:endParaRPr lang="en-US" sz="2200" dirty="0"/>
               </a:p>
               <a:p>
@@ -5282,7 +11508,7 @@
               <a:blipFill>
                 <a:blip r:embed="rId2"/>
                 <a:stretch>
-                  <a:fillRect l="-568" t="-526" r="-517" b="-12526"/>
+                  <a:fillRect l="-568" t="-526" r="-517" b="-5895"/>
                 </a:stretch>
               </a:blipFill>
             </p:spPr>
@@ -5301,6 +11527,99 @@
           </p:sp>
         </mc:Fallback>
       </mc:AlternateContent>
+      <p:sp>
+        <p:nvSpPr>
+          <p:cNvPr id="5" name="Прямоугольник 4"/>
+          <p:cNvSpPr/>
+          <p:nvPr/>
+        </p:nvSpPr>
+        <p:spPr>
+          <a:xfrm>
+            <a:off x="355600" y="6581001"/>
+            <a:ext cx="6096000" cy="276999"/>
+          </a:xfrm>
+          <a:prstGeom prst="rect">
+            <a:avLst/>
+          </a:prstGeom>
+        </p:spPr>
+        <p:txBody>
+          <a:bodyPr>
+            <a:spAutoFit/>
+          </a:bodyPr>
+          <a:lstStyle/>
+          <a:p>
+            <a:r>
+              <a:rPr lang="ru-RU" sz="1200" dirty="0" smtClean="0"/>
+              <a:t>https://education.yandex.ru/handbook/ml/article/modeli-vida-arima</a:t>
+            </a:r>
+            <a:endParaRPr lang="ru-RU" sz="1200" dirty="0"/>
+          </a:p>
+        </p:txBody>
+      </p:sp>
+      <p:sp>
+        <p:nvSpPr>
+          <p:cNvPr id="6" name="Прямоугольник 5"/>
+          <p:cNvSpPr/>
+          <p:nvPr/>
+        </p:nvSpPr>
+        <p:spPr>
+          <a:xfrm>
+            <a:off x="43180" y="6119336"/>
+            <a:ext cx="11691620" cy="584775"/>
+          </a:xfrm>
+          <a:prstGeom prst="rect">
+            <a:avLst/>
+          </a:prstGeom>
+        </p:spPr>
+        <p:txBody>
+          <a:bodyPr wrap="square">
+            <a:spAutoFit/>
+          </a:bodyPr>
+          <a:lstStyle/>
+          <a:p>
+            <a:r>
+              <a:rPr lang="en-US" sz="1600" b="0" i="0" dirty="0" smtClean="0">
+                <a:solidFill>
+                  <a:srgbClr val="333333"/>
+                </a:solidFill>
+                <a:effectLst/>
+                <a:latin typeface="Georgia" panose="02040502050405020303" pitchFamily="18" charset="0"/>
+              </a:rPr>
+              <a:t>Why Innovation? The predictable components of your time-series are removed, so the leftover seems the only unknown thing. So is was called “innovation”.</a:t>
+            </a:r>
+            <a:endParaRPr lang="ru-RU" sz="1600" dirty="0"/>
+          </a:p>
+        </p:txBody>
+      </p:sp>
+      <p:sp>
+        <p:nvSpPr>
+          <p:cNvPr id="7" name="Прямоугольник 6"/>
+          <p:cNvSpPr/>
+          <p:nvPr/>
+        </p:nvSpPr>
+        <p:spPr>
+          <a:xfrm>
+            <a:off x="4848224" y="6550223"/>
+            <a:ext cx="8162925" cy="307777"/>
+          </a:xfrm>
+          <a:prstGeom prst="rect">
+            <a:avLst/>
+          </a:prstGeom>
+        </p:spPr>
+        <p:txBody>
+          <a:bodyPr wrap="square">
+            <a:spAutoFit/>
+          </a:bodyPr>
+          <a:lstStyle/>
+          <a:p>
+            <a:r>
+              <a:rPr lang="ru-RU" sz="1400" dirty="0" smtClean="0"/>
+              <a:t>https://xiaorui.site/Forecasting-and-Time-Series-Methods/Lecture/2_AR_MA.html</a:t>
+            </a:r>
+            <a:endParaRPr lang="ru-RU" sz="1400" dirty="0"/>
+          </a:p>
+        </p:txBody>
+      </p:sp>
     </p:spTree>
     <p:extLst>
       <p:ext uri="{BB962C8B-B14F-4D97-AF65-F5344CB8AC3E}">
@@ -5314,7 +11633,7 @@
 </p:sld>
 </file>
 
-<file path=ppt/slides/slide5.xml><?xml version="1.0" encoding="utf-8"?>
+<file path=ppt/slides/slide6.xml><?xml version="1.0" encoding="utf-8"?>
 <p:sld xmlns:a="http://schemas.openxmlformats.org/drawingml/2006/main" xmlns:r="http://schemas.openxmlformats.org/officeDocument/2006/relationships" xmlns:p="http://schemas.openxmlformats.org/presentationml/2006/main">
   <p:cSld>
     <p:spTree>
@@ -6188,7 +12507,7 @@
 </p:sld>
 </file>
 
-<file path=ppt/slides/slide6.xml><?xml version="1.0" encoding="utf-8"?>
+<file path=ppt/slides/slide7.xml><?xml version="1.0" encoding="utf-8"?>
 <p:sld xmlns:a="http://schemas.openxmlformats.org/drawingml/2006/main" xmlns:r="http://schemas.openxmlformats.org/officeDocument/2006/relationships" xmlns:p="http://schemas.openxmlformats.org/presentationml/2006/main">
   <p:cSld>
     <p:spTree>
@@ -6319,7 +12638,7 @@
 </p:sld>
 </file>
 
-<file path=ppt/slides/slide7.xml><?xml version="1.0" encoding="utf-8"?>
+<file path=ppt/slides/slide8.xml><?xml version="1.0" encoding="utf-8"?>
 <p:sld xmlns:a="http://schemas.openxmlformats.org/drawingml/2006/main" xmlns:r="http://schemas.openxmlformats.org/officeDocument/2006/relationships" xmlns:p="http://schemas.openxmlformats.org/presentationml/2006/main">
   <p:cSld>
     <p:spTree>
@@ -7513,8 +13832,16 @@
                   </a:spcBef>
                 </a:pPr>
                 <a:r>
-                  <a:rPr lang="ru-RU" sz="2000" smtClean="0"/>
-                  <a:t>Можно </a:t>
+                  <a:rPr lang="ru-RU" sz="2000" dirty="0" smtClean="0"/>
+                  <a:t>Можно оценить оба параметра путем </a:t>
+                </a:r>
+                <a:r>
+                  <a:rPr lang="ru-RU" sz="2000" dirty="0" err="1" smtClean="0"/>
+                  <a:t>минмизации</a:t>
+                </a:r>
+                <a:r>
+                  <a:rPr lang="ru-RU" sz="2000" dirty="0" smtClean="0"/>
+                  <a:t> квадрата невязки.</a:t>
                 </a:r>
                 <a:endParaRPr lang="en-US" sz="2000" dirty="0"/>
               </a:p>
@@ -7590,6 +13917,79 @@
           </a:p>
         </p:txBody>
       </p:sp>
+      <p:sp>
+        <p:nvSpPr>
+          <p:cNvPr id="6" name="Прямоугольник 5"/>
+          <p:cNvSpPr/>
+          <p:nvPr/>
+        </p:nvSpPr>
+        <p:spPr>
+          <a:xfrm>
+            <a:off x="259759" y="5950196"/>
+            <a:ext cx="11932241" cy="430887"/>
+          </a:xfrm>
+          <a:prstGeom prst="rect">
+            <a:avLst/>
+          </a:prstGeom>
+        </p:spPr>
+        <p:txBody>
+          <a:bodyPr wrap="none">
+            <a:spAutoFit/>
+          </a:bodyPr>
+          <a:lstStyle/>
+          <a:p>
+            <a:r>
+              <a:rPr lang="ru-RU" sz="2200" dirty="0"/>
+              <a:t>Модели записываются в виде </a:t>
+            </a:r>
+            <a:r>
+              <a:rPr lang="en-US" sz="2200" dirty="0"/>
+              <a:t>ARMA(</a:t>
+            </a:r>
+            <a:r>
+              <a:rPr lang="en-US" sz="2200" dirty="0" err="1"/>
+              <a:t>p,q</a:t>
+            </a:r>
+            <a:r>
+              <a:rPr lang="en-US" sz="2200" dirty="0"/>
+              <a:t>)</a:t>
+            </a:r>
+            <a:r>
+              <a:rPr lang="ru-RU" sz="2200" dirty="0"/>
+              <a:t> – что значит модель </a:t>
+            </a:r>
+            <a:r>
+              <a:rPr lang="en-US" sz="2200" dirty="0"/>
+              <a:t>p-</a:t>
+            </a:r>
+            <a:r>
+              <a:rPr lang="ru-RU" sz="2200" dirty="0"/>
+              <a:t>порядка по </a:t>
+            </a:r>
+            <a:r>
+              <a:rPr lang="en-US" sz="2200" dirty="0"/>
+              <a:t>AR </a:t>
+            </a:r>
+            <a:r>
+              <a:rPr lang="ru-RU" sz="2200" dirty="0"/>
+              <a:t>и </a:t>
+            </a:r>
+            <a:r>
+              <a:rPr lang="en-US" sz="2200" dirty="0"/>
+              <a:t>q-</a:t>
+            </a:r>
+            <a:r>
+              <a:rPr lang="ru-RU" sz="2200" dirty="0"/>
+              <a:t>порядка по </a:t>
+            </a:r>
+            <a:r>
+              <a:rPr lang="en-US" sz="2200" dirty="0"/>
+              <a:t>MA</a:t>
+            </a:r>
+            <a:endParaRPr lang="ru-RU" sz="2200" dirty="0"/>
+          </a:p>
+        </p:txBody>
+      </p:sp>
     </p:spTree>
     <p:extLst>
       <p:ext uri="{BB962C8B-B14F-4D97-AF65-F5344CB8AC3E}">
@@ -7607,6 +14007,917 @@
       </p:par>
     </p:tnLst>
   </p:timing>
+</p:sld>
+</file>
+
+<file path=ppt/slides/slide9.xml><?xml version="1.0" encoding="utf-8"?>
+<p:sld xmlns:a="http://schemas.openxmlformats.org/drawingml/2006/main" xmlns:r="http://schemas.openxmlformats.org/officeDocument/2006/relationships" xmlns:p="http://schemas.openxmlformats.org/presentationml/2006/main">
+  <p:cSld>
+    <p:spTree>
+      <p:nvGrpSpPr>
+        <p:cNvPr id="1" name=""/>
+        <p:cNvGrpSpPr/>
+        <p:nvPr/>
+      </p:nvGrpSpPr>
+      <p:grpSpPr>
+        <a:xfrm>
+          <a:off x="0" y="0"/>
+          <a:ext cx="0" cy="0"/>
+          <a:chOff x="0" y="0"/>
+          <a:chExt cx="0" cy="0"/>
+        </a:xfrm>
+      </p:grpSpPr>
+      <p:sp>
+        <p:nvSpPr>
+          <p:cNvPr id="2" name="Заголовок 1"/>
+          <p:cNvSpPr>
+            <a:spLocks noGrp="1"/>
+          </p:cNvSpPr>
+          <p:nvPr>
+            <p:ph type="title"/>
+          </p:nvPr>
+        </p:nvSpPr>
+        <p:spPr>
+          <a:xfrm>
+            <a:off x="274320" y="365125"/>
+            <a:ext cx="11079480" cy="711835"/>
+          </a:xfrm>
+        </p:spPr>
+        <p:txBody>
+          <a:bodyPr/>
+          <a:lstStyle/>
+          <a:p>
+            <a:pPr algn="ctr"/>
+            <a:r>
+              <a:rPr lang="ru-RU" dirty="0" smtClean="0"/>
+              <a:t>Связь </a:t>
+            </a:r>
+            <a:r>
+              <a:rPr lang="en-US" dirty="0" smtClean="0"/>
+              <a:t>ARIMA c ACF </a:t>
+            </a:r>
+            <a:r>
+              <a:rPr lang="ru-RU" dirty="0" smtClean="0"/>
+              <a:t>и </a:t>
+            </a:r>
+            <a:r>
+              <a:rPr lang="en-US" dirty="0" smtClean="0"/>
+              <a:t>PACF</a:t>
+            </a:r>
+            <a:endParaRPr lang="ru-RU" dirty="0"/>
+          </a:p>
+        </p:txBody>
+      </p:sp>
+      <mc:AlternateContent xmlns:mc="http://schemas.openxmlformats.org/markup-compatibility/2006">
+        <mc:Choice xmlns:a14="http://schemas.microsoft.com/office/drawing/2010/main" Requires="a14">
+          <p:sp>
+            <p:nvSpPr>
+              <p:cNvPr id="3" name="Объект 2"/>
+              <p:cNvSpPr>
+                <a:spLocks noGrp="1"/>
+              </p:cNvSpPr>
+              <p:nvPr>
+                <p:ph idx="1"/>
+              </p:nvPr>
+            </p:nvSpPr>
+            <p:spPr>
+              <a:xfrm>
+                <a:off x="0" y="1076960"/>
+                <a:ext cx="12192000" cy="5293360"/>
+              </a:xfrm>
+            </p:spPr>
+            <p:txBody>
+              <a:bodyPr>
+                <a:normAutofit/>
+              </a:bodyPr>
+              <a:lstStyle/>
+              <a:p>
+                <a:r>
+                  <a:rPr lang="ru-RU" sz="2000" dirty="0" smtClean="0"/>
+                  <a:t>Процесс авторегрессии </a:t>
+                </a:r>
+                <a14:m>
+                  <m:oMath xmlns:m="http://schemas.openxmlformats.org/officeDocument/2006/math">
+                    <m:sSub>
+                      <m:sSubPr>
+                        <m:ctrlPr>
+                          <a:rPr lang="en-US" sz="2000" i="1">
+                            <a:latin typeface="Cambria Math" panose="02040503050406030204" pitchFamily="18" charset="0"/>
+                          </a:rPr>
+                        </m:ctrlPr>
+                      </m:sSubPr>
+                      <m:e>
+                        <m:acc>
+                          <m:accPr>
+                            <m:chr m:val="̂"/>
+                            <m:ctrlPr>
+                              <a:rPr lang="en-US" sz="2000" i="1">
+                                <a:latin typeface="Cambria Math" panose="02040503050406030204" pitchFamily="18" charset="0"/>
+                              </a:rPr>
+                            </m:ctrlPr>
+                          </m:accPr>
+                          <m:e>
+                            <m:r>
+                              <a:rPr lang="en-US" sz="2000" i="1">
+                                <a:latin typeface="Cambria Math" panose="02040503050406030204" pitchFamily="18" charset="0"/>
+                              </a:rPr>
+                              <m:t>𝑦</m:t>
+                            </m:r>
+                          </m:e>
+                        </m:acc>
+                      </m:e>
+                      <m:sub>
+                        <m:r>
+                          <a:rPr lang="en-US" sz="2000" i="1">
+                            <a:latin typeface="Cambria Math" panose="02040503050406030204" pitchFamily="18" charset="0"/>
+                          </a:rPr>
+                          <m:t>𝑛</m:t>
+                        </m:r>
+                        <m:r>
+                          <a:rPr lang="ru-RU" sz="2000" i="1">
+                            <a:latin typeface="Cambria Math" panose="02040503050406030204" pitchFamily="18" charset="0"/>
+                          </a:rPr>
+                          <m:t>+1</m:t>
+                        </m:r>
+                      </m:sub>
+                    </m:sSub>
+                    <m:r>
+                      <a:rPr lang="en-US" sz="2000" i="1">
+                        <a:latin typeface="Cambria Math" panose="02040503050406030204" pitchFamily="18" charset="0"/>
+                      </a:rPr>
+                      <m:t>=</m:t>
+                    </m:r>
+                    <m:sSub>
+                      <m:sSubPr>
+                        <m:ctrlPr>
+                          <a:rPr lang="en-US" sz="2000" i="1">
+                            <a:latin typeface="Cambria Math" panose="02040503050406030204" pitchFamily="18" charset="0"/>
+                          </a:rPr>
+                        </m:ctrlPr>
+                      </m:sSubPr>
+                      <m:e>
+                        <m:r>
+                          <a:rPr lang="en-US" sz="2000" i="1">
+                            <a:latin typeface="Cambria Math" panose="02040503050406030204" pitchFamily="18" charset="0"/>
+                          </a:rPr>
+                          <m:t>𝛼</m:t>
+                        </m:r>
+                      </m:e>
+                      <m:sub>
+                        <m:r>
+                          <a:rPr lang="ru-RU" sz="2000" i="1">
+                            <a:latin typeface="Cambria Math" panose="02040503050406030204" pitchFamily="18" charset="0"/>
+                          </a:rPr>
+                          <m:t>0</m:t>
+                        </m:r>
+                      </m:sub>
+                    </m:sSub>
+                    <m:sSub>
+                      <m:sSubPr>
+                        <m:ctrlPr>
+                          <a:rPr lang="en-US" sz="2000" i="1">
+                            <a:latin typeface="Cambria Math" panose="02040503050406030204" pitchFamily="18" charset="0"/>
+                          </a:rPr>
+                        </m:ctrlPr>
+                      </m:sSubPr>
+                      <m:e>
+                        <m:r>
+                          <a:rPr lang="en-US" sz="2000" i="1">
+                            <a:latin typeface="Cambria Math" panose="02040503050406030204" pitchFamily="18" charset="0"/>
+                          </a:rPr>
+                          <m:t>𝑦</m:t>
+                        </m:r>
+                      </m:e>
+                      <m:sub>
+                        <m:r>
+                          <a:rPr lang="en-US" sz="2000" i="1">
+                            <a:latin typeface="Cambria Math" panose="02040503050406030204" pitchFamily="18" charset="0"/>
+                          </a:rPr>
+                          <m:t>𝑛</m:t>
+                        </m:r>
+                      </m:sub>
+                    </m:sSub>
+                    <m:r>
+                      <a:rPr lang="en-US" sz="2000" i="1">
+                        <a:latin typeface="Cambria Math" panose="02040503050406030204" pitchFamily="18" charset="0"/>
+                      </a:rPr>
+                      <m:t>+</m:t>
+                    </m:r>
+                    <m:sSub>
+                      <m:sSubPr>
+                        <m:ctrlPr>
+                          <a:rPr lang="en-US" sz="2000" i="1">
+                            <a:latin typeface="Cambria Math" panose="02040503050406030204" pitchFamily="18" charset="0"/>
+                          </a:rPr>
+                        </m:ctrlPr>
+                      </m:sSubPr>
+                      <m:e>
+                        <m:r>
+                          <a:rPr lang="en-US" sz="2000" i="1">
+                            <a:latin typeface="Cambria Math" panose="02040503050406030204" pitchFamily="18" charset="0"/>
+                          </a:rPr>
+                          <m:t>𝛼</m:t>
+                        </m:r>
+                      </m:e>
+                      <m:sub>
+                        <m:r>
+                          <a:rPr lang="en-US" sz="2000" i="1">
+                            <a:latin typeface="Cambria Math" panose="02040503050406030204" pitchFamily="18" charset="0"/>
+                          </a:rPr>
+                          <m:t>1</m:t>
+                        </m:r>
+                      </m:sub>
+                    </m:sSub>
+                    <m:sSub>
+                      <m:sSubPr>
+                        <m:ctrlPr>
+                          <a:rPr lang="en-US" sz="2000" i="1">
+                            <a:latin typeface="Cambria Math" panose="02040503050406030204" pitchFamily="18" charset="0"/>
+                          </a:rPr>
+                        </m:ctrlPr>
+                      </m:sSubPr>
+                      <m:e>
+                        <m:r>
+                          <a:rPr lang="en-US" sz="2000" i="1">
+                            <a:latin typeface="Cambria Math" panose="02040503050406030204" pitchFamily="18" charset="0"/>
+                          </a:rPr>
+                          <m:t>𝑦</m:t>
+                        </m:r>
+                      </m:e>
+                      <m:sub>
+                        <m:r>
+                          <a:rPr lang="en-US" sz="2000" i="1">
+                            <a:latin typeface="Cambria Math" panose="02040503050406030204" pitchFamily="18" charset="0"/>
+                          </a:rPr>
+                          <m:t>𝑛</m:t>
+                        </m:r>
+                        <m:r>
+                          <a:rPr lang="en-US" sz="2000" i="1">
+                            <a:latin typeface="Cambria Math" panose="02040503050406030204" pitchFamily="18" charset="0"/>
+                          </a:rPr>
+                          <m:t>−1</m:t>
+                        </m:r>
+                      </m:sub>
+                    </m:sSub>
+                    <m:r>
+                      <a:rPr lang="en-US" sz="2000" i="1">
+                        <a:latin typeface="Cambria Math" panose="02040503050406030204" pitchFamily="18" charset="0"/>
+                      </a:rPr>
+                      <m:t>+</m:t>
+                    </m:r>
+                    <m:r>
+                      <a:rPr lang="ru-RU" sz="2000" b="0" i="1" smtClean="0">
+                        <a:latin typeface="Cambria Math" panose="02040503050406030204" pitchFamily="18" charset="0"/>
+                      </a:rPr>
+                      <m:t>… </m:t>
+                    </m:r>
+                  </m:oMath>
+                </a14:m>
+                <a:r>
+                  <a:rPr lang="ru-RU" sz="2000" dirty="0" smtClean="0"/>
+                  <a:t> предполагает, что текущее значение </a:t>
+                </a:r>
+                <a14:m>
+                  <m:oMath xmlns:m="http://schemas.openxmlformats.org/officeDocument/2006/math">
+                    <m:sSub>
+                      <m:sSubPr>
+                        <m:ctrlPr>
+                          <a:rPr lang="en-US" sz="2000" i="1" smtClean="0">
+                            <a:latin typeface="Cambria Math" panose="02040503050406030204" pitchFamily="18" charset="0"/>
+                          </a:rPr>
+                        </m:ctrlPr>
+                      </m:sSubPr>
+                      <m:e>
+                        <m:r>
+                          <a:rPr lang="en-US" sz="2000" i="1">
+                            <a:latin typeface="Cambria Math" panose="02040503050406030204" pitchFamily="18" charset="0"/>
+                          </a:rPr>
+                          <m:t>𝑦</m:t>
+                        </m:r>
+                      </m:e>
+                      <m:sub>
+                        <m:r>
+                          <a:rPr lang="en-US" sz="2000" i="1">
+                            <a:latin typeface="Cambria Math" panose="02040503050406030204" pitchFamily="18" charset="0"/>
+                          </a:rPr>
+                          <m:t>𝑛</m:t>
+                        </m:r>
+                        <m:r>
+                          <a:rPr lang="ru-RU" sz="2000" i="1">
+                            <a:latin typeface="Cambria Math" panose="02040503050406030204" pitchFamily="18" charset="0"/>
+                          </a:rPr>
+                          <m:t>+1</m:t>
+                        </m:r>
+                      </m:sub>
+                    </m:sSub>
+                  </m:oMath>
+                </a14:m>
+                <a:r>
+                  <a:rPr lang="ru-RU" sz="2000" dirty="0" smtClean="0"/>
+                  <a:t> имеет корреляцию с предыдущими значениями.</a:t>
+                </a:r>
+              </a:p>
+              <a:p>
+                <a:pPr lvl="1"/>
+                <a:r>
+                  <a:rPr lang="ru-RU" sz="2000" dirty="0" smtClean="0"/>
+                  <a:t>Можно показать, что если процесс описывается предыдущими значениями до лага </a:t>
+                </a:r>
+                <a14:m>
+                  <m:oMath xmlns:m="http://schemas.openxmlformats.org/officeDocument/2006/math">
+                    <m:r>
+                      <a:rPr lang="en-US" sz="2000" i="1" dirty="0" smtClean="0">
+                        <a:latin typeface="Cambria Math" panose="02040503050406030204" pitchFamily="18" charset="0"/>
+                      </a:rPr>
+                      <m:t>𝑃</m:t>
+                    </m:r>
+                    <m:r>
+                      <a:rPr lang="en-US" sz="2000" b="0" i="1" dirty="0" smtClean="0">
+                        <a:latin typeface="Cambria Math" panose="02040503050406030204" pitchFamily="18" charset="0"/>
+                      </a:rPr>
+                      <m:t>,</m:t>
+                    </m:r>
+                  </m:oMath>
+                </a14:m>
+                <a:r>
+                  <a:rPr lang="en-US" sz="2000" dirty="0" smtClean="0"/>
+                  <a:t> </a:t>
+                </a:r>
+                <a:r>
+                  <a:rPr lang="ru-RU" sz="2000" dirty="0" smtClean="0"/>
+                  <a:t>то на графике </a:t>
+                </a:r>
+                <a:r>
+                  <a:rPr lang="en-US" sz="2000" dirty="0" smtClean="0"/>
+                  <a:t>PACF </a:t>
+                </a:r>
+                <a:r>
+                  <a:rPr lang="ru-RU" sz="2000" dirty="0" smtClean="0"/>
+                  <a:t> не будет значимых лагов выше </a:t>
+                </a:r>
+                <a14:m>
+                  <m:oMath xmlns:m="http://schemas.openxmlformats.org/officeDocument/2006/math">
+                    <m:r>
+                      <a:rPr lang="en-US" sz="2000" i="1" dirty="0" smtClean="0">
+                        <a:latin typeface="Cambria Math" panose="02040503050406030204" pitchFamily="18" charset="0"/>
+                      </a:rPr>
+                      <m:t>𝑃</m:t>
+                    </m:r>
+                  </m:oMath>
+                </a14:m>
+                <a:endParaRPr lang="ru-RU" sz="2000" dirty="0" smtClean="0"/>
+              </a:p>
+              <a:p>
+                <a:pPr lvl="2"/>
+                <a:r>
+                  <a:rPr lang="en-US" sz="1800" dirty="0"/>
+                  <a:t>P</a:t>
+                </a:r>
+                <a:r>
+                  <a:rPr lang="en-US" sz="1800" dirty="0" smtClean="0"/>
+                  <a:t>ACF </a:t>
+                </a:r>
+                <a:r>
+                  <a:rPr lang="ru-RU" sz="1800" dirty="0" smtClean="0"/>
+                  <a:t>корреляцию </a:t>
+                </a:r>
+                <a:r>
+                  <a:rPr lang="ru-RU" sz="1800" dirty="0"/>
+                  <a:t>между </a:t>
+                </a:r>
+                <a:r>
+                  <a:rPr lang="en-US" sz="1800" i="1" dirty="0" err="1" smtClean="0"/>
+                  <a:t>yt</a:t>
+                </a:r>
+                <a:r>
+                  <a:rPr lang="en-US" sz="1800" dirty="0"/>
+                  <a:t>​ </a:t>
+                </a:r>
+                <a:r>
+                  <a:rPr lang="ru-RU" sz="1800" dirty="0"/>
+                  <a:t>и </a:t>
+                </a:r>
+                <a:r>
+                  <a:rPr lang="en-US" sz="1800" dirty="0" smtClean="0"/>
+                  <a:t>y </a:t>
+                </a:r>
+                <a:r>
+                  <a:rPr lang="en-US" sz="1800" i="1" dirty="0" err="1" smtClean="0"/>
+                  <a:t>yt</a:t>
+                </a:r>
+                <a:r>
+                  <a:rPr lang="en-US" sz="1800" dirty="0"/>
+                  <a:t>−</a:t>
+                </a:r>
+                <a:r>
+                  <a:rPr lang="en-US" sz="1800" i="1" dirty="0"/>
+                  <a:t>k</a:t>
+                </a:r>
+                <a:r>
+                  <a:rPr lang="en-US" sz="1800" dirty="0"/>
+                  <a:t>​, </a:t>
+                </a:r>
+                <a:r>
+                  <a:rPr lang="ru-RU" sz="1800" b="1" dirty="0"/>
+                  <a:t>удалив влияние промежуточных </a:t>
+                </a:r>
+                <a:r>
+                  <a:rPr lang="ru-RU" sz="1800" b="1" dirty="0" smtClean="0"/>
+                  <a:t>лагов</a:t>
+                </a:r>
+                <a:r>
+                  <a:rPr lang="ru-RU" sz="1800" dirty="0" smtClean="0"/>
+                  <a:t> (</a:t>
+                </a:r>
+                <a:r>
+                  <a:rPr lang="en-US" sz="1800" dirty="0" smtClean="0"/>
+                  <a:t>y</a:t>
+                </a:r>
+                <a14:m>
+                  <m:oMath xmlns:m="http://schemas.openxmlformats.org/officeDocument/2006/math">
+                    <m:r>
+                      <a:rPr lang="en-US" sz="1800" i="1" dirty="0" smtClean="0">
+                        <a:latin typeface="Cambria Math" panose="02040503050406030204" pitchFamily="18" charset="0"/>
+                      </a:rPr>
+                      <m:t>𝑛</m:t>
+                    </m:r>
+                    <m:r>
+                      <a:rPr lang="en-US" sz="1800" i="1" dirty="0" smtClean="0">
+                        <a:latin typeface="Cambria Math" panose="02040503050406030204" pitchFamily="18" charset="0"/>
+                      </a:rPr>
+                      <m:t>−1</m:t>
+                    </m:r>
+                  </m:oMath>
+                </a14:m>
+                <a:r>
+                  <a:rPr lang="en-US" sz="1800" dirty="0" smtClean="0"/>
+                  <a:t>,</a:t>
+                </a:r>
+                <a:r>
+                  <a:rPr lang="ru-RU" sz="1800" dirty="0" smtClean="0"/>
+                  <a:t> </a:t>
+                </a:r>
+                <a:r>
+                  <a:rPr lang="en-US" sz="1800" dirty="0" smtClean="0"/>
+                  <a:t>yt</a:t>
+                </a:r>
+                <a:r>
+                  <a:rPr lang="en-US" sz="1800" dirty="0"/>
+                  <a:t>−2,…,yt−</a:t>
+                </a:r>
+                <a:r>
+                  <a:rPr lang="en-US" sz="1800" dirty="0" smtClean="0"/>
+                  <a:t>k+1​). – </a:t>
+                </a:r>
+                <a:r>
+                  <a:rPr lang="ru-RU" sz="1800" dirty="0" smtClean="0"/>
+                  <a:t>то есть лаги выше не несут новой информации.</a:t>
+                </a:r>
+                <a:endParaRPr lang="en-US" sz="1800" dirty="0"/>
+              </a:p>
+              <a:p>
+                <a:r>
+                  <a:rPr lang="ru-RU" sz="2000" dirty="0" smtClean="0"/>
+                  <a:t> Если процесс включает скользящее среднее до лага </a:t>
+                </a:r>
+                <a14:m>
+                  <m:oMath xmlns:m="http://schemas.openxmlformats.org/officeDocument/2006/math">
+                    <m:r>
+                      <a:rPr lang="en-US" sz="2000" i="1" dirty="0" smtClean="0">
+                        <a:latin typeface="Cambria Math" panose="02040503050406030204" pitchFamily="18" charset="0"/>
+                      </a:rPr>
+                      <m:t>𝑄</m:t>
+                    </m:r>
+                  </m:oMath>
+                </a14:m>
+                <a:r>
+                  <a:rPr lang="en-US" sz="2000" dirty="0" smtClean="0"/>
+                  <a:t> </a:t>
+                </a:r>
+                <a14:m>
+                  <m:oMath xmlns:m="http://schemas.openxmlformats.org/officeDocument/2006/math">
+                    <m:sSub>
+                      <m:sSubPr>
+                        <m:ctrlPr>
+                          <a:rPr lang="en-US" sz="2000" i="1">
+                            <a:latin typeface="Cambria Math" panose="02040503050406030204" pitchFamily="18" charset="0"/>
+                          </a:rPr>
+                        </m:ctrlPr>
+                      </m:sSubPr>
+                      <m:e>
+                        <m:acc>
+                          <m:accPr>
+                            <m:chr m:val="̂"/>
+                            <m:ctrlPr>
+                              <a:rPr lang="en-US" sz="2000" i="1">
+                                <a:latin typeface="Cambria Math" panose="02040503050406030204" pitchFamily="18" charset="0"/>
+                              </a:rPr>
+                            </m:ctrlPr>
+                          </m:accPr>
+                          <m:e>
+                            <m:r>
+                              <a:rPr lang="en-US" sz="2000" i="1">
+                                <a:latin typeface="Cambria Math" panose="02040503050406030204" pitchFamily="18" charset="0"/>
+                              </a:rPr>
+                              <m:t>𝑦</m:t>
+                            </m:r>
+                          </m:e>
+                        </m:acc>
+                      </m:e>
+                      <m:sub>
+                        <m:r>
+                          <a:rPr lang="en-US" sz="2000" i="1">
+                            <a:latin typeface="Cambria Math" panose="02040503050406030204" pitchFamily="18" charset="0"/>
+                          </a:rPr>
+                          <m:t>𝑛</m:t>
+                        </m:r>
+                        <m:r>
+                          <a:rPr lang="en-US" sz="2000" i="1">
+                            <a:latin typeface="Cambria Math" panose="02040503050406030204" pitchFamily="18" charset="0"/>
+                          </a:rPr>
+                          <m:t>+1</m:t>
+                        </m:r>
+                      </m:sub>
+                    </m:sSub>
+                    <m:r>
+                      <a:rPr lang="en-US" sz="2000" i="1">
+                        <a:latin typeface="Cambria Math" panose="02040503050406030204" pitchFamily="18" charset="0"/>
+                      </a:rPr>
+                      <m:t>=</m:t>
+                    </m:r>
+                    <m:r>
+                      <a:rPr lang="en-US" sz="2000" i="1">
+                        <a:latin typeface="Cambria Math" panose="02040503050406030204" pitchFamily="18" charset="0"/>
+                      </a:rPr>
+                      <m:t>𝑐</m:t>
+                    </m:r>
+                    <m:r>
+                      <a:rPr lang="en-US" sz="2000" i="1">
+                        <a:latin typeface="Cambria Math" panose="02040503050406030204" pitchFamily="18" charset="0"/>
+                      </a:rPr>
+                      <m:t>+</m:t>
+                    </m:r>
+                    <m:nary>
+                      <m:naryPr>
+                        <m:chr m:val="∑"/>
+                        <m:limLoc m:val="undOvr"/>
+                        <m:ctrlPr>
+                          <a:rPr lang="en-US" sz="2000" i="1">
+                            <a:latin typeface="Cambria Math" panose="02040503050406030204" pitchFamily="18" charset="0"/>
+                          </a:rPr>
+                        </m:ctrlPr>
+                      </m:naryPr>
+                      <m:sub>
+                        <m:r>
+                          <a:rPr lang="en-US" sz="2000" i="1">
+                            <a:latin typeface="Cambria Math" panose="02040503050406030204" pitchFamily="18" charset="0"/>
+                          </a:rPr>
+                          <m:t>𝑖</m:t>
+                        </m:r>
+                        <m:r>
+                          <a:rPr lang="en-US" sz="2000" i="1">
+                            <a:latin typeface="Cambria Math" panose="02040503050406030204" pitchFamily="18" charset="0"/>
+                          </a:rPr>
+                          <m:t>=0</m:t>
+                        </m:r>
+                      </m:sub>
+                      <m:sup>
+                        <m:r>
+                          <a:rPr lang="en-US" sz="2000" i="1">
+                            <a:latin typeface="Cambria Math" panose="02040503050406030204" pitchFamily="18" charset="0"/>
+                          </a:rPr>
+                          <m:t>𝑞</m:t>
+                        </m:r>
+                      </m:sup>
+                      <m:e>
+                        <m:sSub>
+                          <m:sSubPr>
+                            <m:ctrlPr>
+                              <a:rPr lang="en-US" sz="2000" i="1">
+                                <a:latin typeface="Cambria Math" panose="02040503050406030204" pitchFamily="18" charset="0"/>
+                              </a:rPr>
+                            </m:ctrlPr>
+                          </m:sSubPr>
+                          <m:e>
+                            <m:r>
+                              <a:rPr lang="en-US" sz="2000" i="1">
+                                <a:latin typeface="Cambria Math" panose="02040503050406030204" pitchFamily="18" charset="0"/>
+                              </a:rPr>
+                              <m:t>𝛽</m:t>
+                            </m:r>
+                          </m:e>
+                          <m:sub>
+                            <m:r>
+                              <a:rPr lang="en-US" sz="2000" i="1">
+                                <a:latin typeface="Cambria Math" panose="02040503050406030204" pitchFamily="18" charset="0"/>
+                              </a:rPr>
+                              <m:t>𝑖</m:t>
+                            </m:r>
+                          </m:sub>
+                        </m:sSub>
+                        <m:sSub>
+                          <m:sSubPr>
+                            <m:ctrlPr>
+                              <a:rPr lang="en-US" sz="2000" i="1">
+                                <a:latin typeface="Cambria Math" panose="02040503050406030204" pitchFamily="18" charset="0"/>
+                              </a:rPr>
+                            </m:ctrlPr>
+                          </m:sSubPr>
+                          <m:e>
+                            <m:r>
+                              <a:rPr lang="en-US" sz="2000" i="1">
+                                <a:latin typeface="Cambria Math" panose="02040503050406030204" pitchFamily="18" charset="0"/>
+                              </a:rPr>
+                              <m:t>𝜀</m:t>
+                            </m:r>
+                          </m:e>
+                          <m:sub>
+                            <m:r>
+                              <a:rPr lang="en-US" sz="2000" i="1">
+                                <a:latin typeface="Cambria Math" panose="02040503050406030204" pitchFamily="18" charset="0"/>
+                              </a:rPr>
+                              <m:t>𝑛</m:t>
+                            </m:r>
+                            <m:r>
+                              <a:rPr lang="en-US" sz="2000" i="1">
+                                <a:latin typeface="Cambria Math" panose="02040503050406030204" pitchFamily="18" charset="0"/>
+                              </a:rPr>
+                              <m:t>−</m:t>
+                            </m:r>
+                            <m:r>
+                              <a:rPr lang="en-US" sz="2000" i="1">
+                                <a:latin typeface="Cambria Math" panose="02040503050406030204" pitchFamily="18" charset="0"/>
+                              </a:rPr>
+                              <m:t>𝑖</m:t>
+                            </m:r>
+                          </m:sub>
+                        </m:sSub>
+                      </m:e>
+                    </m:nary>
+                  </m:oMath>
+                </a14:m>
+                <a:r>
+                  <a:rPr lang="en-US" sz="2000" dirty="0" smtClean="0"/>
+                  <a:t> - </a:t>
+                </a:r>
+                <a:r>
+                  <a:rPr lang="ru-RU" sz="2000" dirty="0" smtClean="0"/>
+                  <a:t>можно показать, что на графике </a:t>
+                </a:r>
+                <a:r>
+                  <a:rPr lang="en-US" sz="2000" dirty="0" smtClean="0"/>
+                  <a:t>ACF </a:t>
+                </a:r>
+                <a:r>
+                  <a:rPr lang="ru-RU" sz="2000" dirty="0" smtClean="0"/>
+                  <a:t> не будет значимых лагов выше </a:t>
+                </a:r>
+                <a:r>
+                  <a:rPr lang="en-US" sz="2000" dirty="0" smtClean="0"/>
+                  <a:t>Q</a:t>
+                </a:r>
+                <a:endParaRPr lang="ru-RU" sz="2000" dirty="0" smtClean="0"/>
+              </a:p>
+              <a:p>
+                <a:pPr lvl="1"/>
+                <a:r>
+                  <a:rPr lang="en-US" sz="2000" dirty="0"/>
+                  <a:t>A</a:t>
+                </a:r>
+                <a:r>
+                  <a:rPr lang="ru-RU" sz="2000" dirty="0" smtClean="0"/>
+                  <a:t>CF </a:t>
+                </a:r>
+                <a:r>
+                  <a:rPr lang="ru-RU" sz="2000" dirty="0"/>
+                  <a:t>измеряет </a:t>
+                </a:r>
+                <a:r>
+                  <a:rPr lang="ru-RU" sz="2000" b="1" dirty="0"/>
+                  <a:t>непосредственную корреляцию</a:t>
+                </a:r>
+                <a:r>
+                  <a:rPr lang="ru-RU" sz="2000" dirty="0"/>
+                  <a:t> между </a:t>
+                </a:r>
+                <a:r>
+                  <a:rPr lang="ru-RU" sz="2000" dirty="0" err="1" smtClean="0"/>
+                  <a:t>yt</a:t>
+                </a:r>
+                <a:r>
+                  <a:rPr lang="ru-RU" sz="2000" dirty="0" smtClean="0"/>
+                  <a:t>​</a:t>
+                </a:r>
+                <a:r>
+                  <a:rPr lang="ru-RU" sz="2000" dirty="0"/>
+                  <a:t> и </a:t>
+                </a:r>
+                <a:r>
+                  <a:rPr lang="ru-RU" sz="2000" dirty="0" err="1"/>
+                  <a:t>yt</a:t>
+                </a:r>
+                <a:r>
+                  <a:rPr lang="ru-RU" sz="2000" dirty="0"/>
+                  <a:t>−</a:t>
+                </a:r>
+                <a:r>
+                  <a:rPr lang="ru-RU" sz="2000" dirty="0" smtClean="0"/>
+                  <a:t>k​</a:t>
+                </a:r>
+                <a:r>
+                  <a:rPr lang="ru-RU" sz="2000" dirty="0"/>
+                  <a:t>.</a:t>
+                </a:r>
+              </a:p>
+              <a:p>
+                <a:pPr lvl="2"/>
+                <a:r>
+                  <a:rPr lang="ru-RU" sz="1800" dirty="0"/>
+                  <a:t>В MA(Q) процесс зависит только от последних </a:t>
+                </a:r>
+                <a:r>
+                  <a:rPr lang="ru-RU" sz="1800" dirty="0" smtClean="0"/>
+                  <a:t>Q</a:t>
+                </a:r>
+                <a:r>
+                  <a:rPr lang="ru-RU" sz="1800" dirty="0"/>
+                  <a:t> шумов, поэтому корреляция </a:t>
+                </a:r>
+                <a:r>
+                  <a:rPr lang="ru-RU" sz="1800" b="1" dirty="0"/>
+                  <a:t>исчезает после лага </a:t>
+                </a:r>
+                <a:r>
+                  <a:rPr lang="ru-RU" sz="1800" b="1" dirty="0" smtClean="0"/>
+                  <a:t>Q</a:t>
+                </a:r>
+                <a:endParaRPr lang="ru-RU" sz="1800" dirty="0"/>
+              </a:p>
+              <a:p>
+                <a:endParaRPr lang="ru-RU" sz="2000" dirty="0"/>
+              </a:p>
+            </p:txBody>
+          </p:sp>
+        </mc:Choice>
+        <mc:Fallback>
+          <p:sp>
+            <p:nvSpPr>
+              <p:cNvPr id="3" name="Объект 2"/>
+              <p:cNvSpPr>
+                <a:spLocks noGrp="1" noRot="1" noChangeAspect="1" noMove="1" noResize="1" noEditPoints="1" noAdjustHandles="1" noChangeArrowheads="1" noChangeShapeType="1" noTextEdit="1"/>
+              </p:cNvSpPr>
+              <p:nvPr>
+                <p:ph idx="1"/>
+              </p:nvPr>
+            </p:nvSpPr>
+            <p:spPr>
+              <a:xfrm>
+                <a:off x="0" y="1076960"/>
+                <a:ext cx="12192000" cy="5293360"/>
+              </a:xfrm>
+              <a:blipFill>
+                <a:blip r:embed="rId2"/>
+                <a:stretch>
+                  <a:fillRect l="-450" t="-1267"/>
+                </a:stretch>
+              </a:blipFill>
+            </p:spPr>
+            <p:txBody>
+              <a:bodyPr/>
+              <a:lstStyle/>
+              <a:p>
+                <a:r>
+                  <a:rPr lang="ru-RU">
+                    <a:noFill/>
+                  </a:rPr>
+                  <a:t> </a:t>
+                </a:r>
+              </a:p>
+            </p:txBody>
+          </p:sp>
+        </mc:Fallback>
+      </mc:AlternateContent>
+      <p:pic>
+        <p:nvPicPr>
+          <p:cNvPr id="2050" name="Picture 2" descr="../../../_images/examples_notebooks_generated_tsa_arma_0_8_1.png"/>
+          <p:cNvPicPr>
+            <a:picLocks noChangeAspect="1" noChangeArrowheads="1"/>
+          </p:cNvPicPr>
+          <p:nvPr/>
+        </p:nvPicPr>
+        <p:blipFill>
+          <a:blip r:embed="rId3" cstate="print">
+            <a:extLst>
+              <a:ext uri="{28A0092B-C50C-407E-A947-70E740481C1C}">
+                <a14:useLocalDpi xmlns:a14="http://schemas.microsoft.com/office/drawing/2010/main" val="0"/>
+              </a:ext>
+            </a:extLst>
+          </a:blip>
+          <a:srcRect/>
+          <a:stretch>
+            <a:fillRect/>
+          </a:stretch>
+        </p:blipFill>
+        <p:spPr bwMode="auto">
+          <a:xfrm>
+            <a:off x="1313145" y="4227483"/>
+            <a:ext cx="3594135" cy="2402165"/>
+          </a:xfrm>
+          <a:prstGeom prst="rect">
+            <a:avLst/>
+          </a:prstGeom>
+          <a:noFill/>
+          <a:extLst>
+            <a:ext uri="{909E8E84-426E-40DD-AFC4-6F175D3DCCD1}">
+              <a14:hiddenFill xmlns:a14="http://schemas.microsoft.com/office/drawing/2010/main">
+                <a:solidFill>
+                  <a:srgbClr val="FFFFFF"/>
+                </a:solidFill>
+              </a14:hiddenFill>
+            </a:ext>
+          </a:extLst>
+        </p:spPr>
+      </p:pic>
+      <p:pic>
+        <p:nvPicPr>
+          <p:cNvPr id="2052" name="Picture 4" descr="../../../_images/examples_notebooks_generated_tsa_arma_0_9_0.png"/>
+          <p:cNvPicPr>
+            <a:picLocks noChangeAspect="1" noChangeArrowheads="1"/>
+          </p:cNvPicPr>
+          <p:nvPr/>
+        </p:nvPicPr>
+        <p:blipFill>
+          <a:blip r:embed="rId4" cstate="print">
+            <a:extLst>
+              <a:ext uri="{28A0092B-C50C-407E-A947-70E740481C1C}">
+                <a14:useLocalDpi xmlns:a14="http://schemas.microsoft.com/office/drawing/2010/main" val="0"/>
+              </a:ext>
+            </a:extLst>
+          </a:blip>
+          <a:srcRect/>
+          <a:stretch>
+            <a:fillRect/>
+          </a:stretch>
+        </p:blipFill>
+        <p:spPr bwMode="auto">
+          <a:xfrm>
+            <a:off x="5699760" y="4227483"/>
+            <a:ext cx="3494404" cy="2378427"/>
+          </a:xfrm>
+          <a:prstGeom prst="rect">
+            <a:avLst/>
+          </a:prstGeom>
+          <a:noFill/>
+          <a:extLst>
+            <a:ext uri="{909E8E84-426E-40DD-AFC4-6F175D3DCCD1}">
+              <a14:hiddenFill xmlns:a14="http://schemas.microsoft.com/office/drawing/2010/main">
+                <a:solidFill>
+                  <a:srgbClr val="FFFFFF"/>
+                </a:solidFill>
+              </a14:hiddenFill>
+            </a:ext>
+          </a:extLst>
+        </p:spPr>
+      </p:pic>
+      <p:sp>
+        <p:nvSpPr>
+          <p:cNvPr id="4" name="Прямоугольник 3"/>
+          <p:cNvSpPr/>
+          <p:nvPr/>
+        </p:nvSpPr>
+        <p:spPr>
+          <a:xfrm>
+            <a:off x="274320" y="6629648"/>
+            <a:ext cx="8636000" cy="276999"/>
+          </a:xfrm>
+          <a:prstGeom prst="rect">
+            <a:avLst/>
+          </a:prstGeom>
+        </p:spPr>
+        <p:txBody>
+          <a:bodyPr wrap="square">
+            <a:spAutoFit/>
+          </a:bodyPr>
+          <a:lstStyle/>
+          <a:p>
+            <a:r>
+              <a:rPr lang="ru-RU" sz="1200" dirty="0" smtClean="0"/>
+              <a:t>https://www.statsmodels.org/stable/examples/notebooks/generated/tsa_arma_0.html</a:t>
+            </a:r>
+            <a:endParaRPr lang="ru-RU" sz="1200" dirty="0"/>
+          </a:p>
+        </p:txBody>
+      </p:sp>
+    </p:spTree>
+    <p:extLst>
+      <p:ext uri="{BB962C8B-B14F-4D97-AF65-F5344CB8AC3E}">
+        <p14:creationId xmlns:p14="http://schemas.microsoft.com/office/powerpoint/2010/main" val="3248625819"/>
+      </p:ext>
+    </p:extLst>
+  </p:cSld>
+  <p:clrMapOvr>
+    <a:masterClrMapping/>
+  </p:clrMapOvr>
 </p:sld>
 </file>
 
